--- a/docs/기획서.pptx
+++ b/docs/기획서.pptx
@@ -3618,7 +3618,7 @@
                 </a:solidFill>
                 <a:latin typeface="맑은 고딕"/>
               </a:rPr>
-              <a:t>코어 루프 — 6초 · 한 라운드 · 한 판</a:t>
+              <a:t>코어 루프</a:t>
             </a:r>
           </a:p>
         </p:txBody>
@@ -4527,7 +4527,7 @@
                 </a:solidFill>
                 <a:latin typeface="맑은 고딕"/>
               </a:rPr>
-              <a:t>한 라운드는 네 걸음이다</a:t>
+              <a:t>라운드 진행</a:t>
             </a:r>
           </a:p>
         </p:txBody>
@@ -5071,7 +5071,7 @@
                 </a:solidFill>
                 <a:latin typeface="맑은 고딕"/>
               </a:rPr>
-              <a:t>- 목표를 넘긴 순간 라운드가 끝나므로, 과잉 조준이 손해가 된다. 남은 다트 한 발이 골드 1이다. - 제약에 스킵이 없어서 여덟 번의 선택이</a:t>
+              <a:t>· 목표를 넘긴 순간 라운드가 끝나므로, 과잉 조준이 손해가 된다. 남은 다트 한 발이 골드 1이다.</a:t>
             </a:r>
           </a:p>
           <a:p>
@@ -5090,7 +5090,7 @@
                 </a:solidFill>
                 <a:latin typeface="맑은 고딕"/>
               </a:rPr>
-              <a:t>그 판의 성격이 된다. 「어느 쪽이 내 빌드에 덜 아픈가」를 묻는다. - 상점 자리가 넷으로 고정이라, 무엇을 사지 않을지가 무엇을 살지만큼</a:t>
+              <a:t>· 제약에 스킵이 없어서 여덟 번의 선택이 그 판의 성격이 된다. 「어느 쪽이 내 빌드에 덜 아픈가」를 묻는다.</a:t>
             </a:r>
           </a:p>
           <a:p>
@@ -5109,7 +5109,7 @@
                 </a:solidFill>
                 <a:latin typeface="맑은 고딕"/>
               </a:rPr>
-              <a:t>중요하다.</a:t>
+              <a:t>· 상점 자리가 넷으로 고정이라, 무엇을 사지 않을지가 무엇을 살지만큼 중요하다.</a:t>
             </a:r>
           </a:p>
         </p:txBody>
@@ -5244,7 +5244,7 @@
                 </a:solidFill>
                 <a:latin typeface="맑은 고딕"/>
               </a:rPr>
-              <a:t>한 발이 지나는 여섯 상태</a:t>
+              <a:t>한 발의 상태 전이</a:t>
             </a:r>
           </a:p>
         </p:txBody>
@@ -6121,7 +6121,7 @@
                 </a:solidFill>
                 <a:latin typeface="맑은 고딕"/>
               </a:rPr>
-              <a:t>- 확인 구간을 둔 것은 「내가 어디에 넣었는지」를 눈으로 확인하고 결과를 받게 하기 위해서다. 없으면 실패가 억울해진다. - 남은 자루가</a:t>
+              <a:t>· 확인 구간을 둔 것은 「내가 어디에 넣었는지」를 눈으로 확인하고 결과를 받게 하기 위해서다. 없으면 실패가 억울해진다.</a:t>
             </a:r>
           </a:p>
           <a:p>
@@ -6140,7 +6140,7 @@
                 </a:solidFill>
                 <a:latin typeface="맑은 고딕"/>
               </a:rPr>
-              <a:t>전부 같은 종류면 PICK을 건너뛴다. 표준 다트만 든 첫 판에서는 이 화면이 한 번도 안 뜬다.</a:t>
+              <a:t>· 남은 자루가 전부 같은 종류면 PICK을 건너뛴다. 표준 다트만 든 첫 판에서는 이 화면이 한 번도 안 뜬다.</a:t>
             </a:r>
           </a:p>
         </p:txBody>
@@ -6275,7 +6275,7 @@
                 </a:solidFill>
                 <a:latin typeface="맑은 고딕"/>
               </a:rPr>
-              <a:t>한 판은 여덟 라운드다</a:t>
+              <a:t>라운드별 목표 점수</a:t>
             </a:r>
           </a:p>
         </p:txBody>
@@ -6327,7 +6327,7 @@
         </p:nvSpPr>
         <p:spPr>
           <a:xfrm>
-            <a:off x="566928" y="1463039"/>
+            <a:off x="566928" y="1467612"/>
             <a:ext cx="9555480" cy="10972"/>
           </a:xfrm>
           <a:prstGeom prst="rect">
@@ -6372,7 +6372,7 @@
           <p:nvPr/>
         </p:nvGraphicFramePr>
         <p:xfrm>
-          <a:off x="566928" y="1664207"/>
+          <a:off x="566928" y="1668780"/>
           <a:ext cx="9555478" cy="2674620"/>
         </p:xfrm>
         <a:graphic>
@@ -7389,7 +7389,7 @@
         </p:nvSpPr>
         <p:spPr>
           <a:xfrm>
-            <a:off x="566928" y="4430268"/>
+            <a:off x="566928" y="4434840"/>
             <a:ext cx="9555480" cy="274320"/>
           </a:xfrm>
           <a:prstGeom prst="rect">
@@ -7434,7 +7434,7 @@
                 </a:solidFill>
                 <a:latin typeface="맑은 고딕"/>
               </a:rPr>
-              <a:t>- 공비 약 1.775의 등비수열을 반올림했다. - R1(45)만 실측 근거가 있다. 칩 없이 넘도록 잡은 값이고, 그래서 1라운드가 사실상 튜토리얼</a:t>
+              <a:t>· 공비 약 1.775의 등비수열을 반올림했다.</a:t>
             </a:r>
           </a:p>
           <a:p>
@@ -7453,7 +7453,7 @@
                 </a:solidFill>
                 <a:latin typeface="맑은 고딕"/>
               </a:rPr>
-              <a:t>구간이 된다. - 무장 없는 한 발 상한은 60점(칸 20 × 배수 3)이다. 6발이면 360점이므로 R5(470)부터는 조준만으로 못 넘는다. 곱셈 층이</a:t>
+              <a:t>· R1(45)만 실측 근거가 있다. 칩 없이 넘도록 잡은 값이고, 그래서 1라운드가 사실상 튜토리얼 구간이 된다.</a:t>
             </a:r>
           </a:p>
           <a:p>
@@ -7472,7 +7472,45 @@
                 </a:solidFill>
                 <a:latin typeface="맑은 고딕"/>
               </a:rPr>
-              <a:t>필요해지는 정확한 지점이다. - R2~R8은 미검증이다. 사람 플레이 로그로 보정하는 것이 다음 작업이다.</a:t>
+              <a:t>· 무장 없는 한 발 상한은 60점(칸 20 × 배수 3)이다. 6발이면 360점이므로 R5(470)부터는 조준만으로 못 넘는다. 곱셈 층이 필요해지는 정확한</a:t>
+            </a:r>
+          </a:p>
+          <a:p>
+            <a:pPr>
+              <a:lnSpc>
+                <a:spcPct val="128000"/>
+              </a:lnSpc>
+              <a:spcBef>
+                <a:spcPts val="600"/>
+              </a:spcBef>
+            </a:pPr>
+            <a:r>
+              <a:rPr sz="1100" b="0">
+                <a:solidFill>
+                  <a:srgbClr val="3D394A"/>
+                </a:solidFill>
+                <a:latin typeface="맑은 고딕"/>
+              </a:rPr>
+              <a:t>지점이다.</a:t>
+            </a:r>
+          </a:p>
+          <a:p>
+            <a:pPr>
+              <a:lnSpc>
+                <a:spcPct val="128000"/>
+              </a:lnSpc>
+              <a:spcBef>
+                <a:spcPts val="600"/>
+              </a:spcBef>
+            </a:pPr>
+            <a:r>
+              <a:rPr sz="1100" b="0">
+                <a:solidFill>
+                  <a:srgbClr val="3D394A"/>
+                </a:solidFill>
+                <a:latin typeface="맑은 고딕"/>
+              </a:rPr>
+              <a:t>· R2~R8은 미검증이다. 사람 플레이 로그로 보정하는 것이 다음 작업이다.</a:t>
             </a:r>
           </a:p>
         </p:txBody>
@@ -7607,7 +7645,7 @@
                 </a:solidFill>
                 <a:latin typeface="맑은 고딕"/>
               </a:rPr>
-              <a:t>꽂힌 자리를 읽는 다섯 단계</a:t>
+              <a:t>판정 순서</a:t>
             </a:r>
           </a:p>
         </p:txBody>
@@ -7659,7 +7697,7 @@
         </p:nvSpPr>
         <p:spPr>
           <a:xfrm>
-            <a:off x="566928" y="1463039"/>
+            <a:off x="566928" y="1467612"/>
             <a:ext cx="9555480" cy="10972"/>
           </a:xfrm>
           <a:prstGeom prst="rect">
@@ -7704,7 +7742,7 @@
           <p:nvPr/>
         </p:nvGraphicFramePr>
         <p:xfrm>
-          <a:off x="566928" y="1664207"/>
+          <a:off x="566928" y="1668780"/>
           <a:ext cx="9555478" cy="1783080"/>
         </p:xfrm>
         <a:graphic>
@@ -8228,7 +8266,7 @@
         </p:nvSpPr>
         <p:spPr>
           <a:xfrm>
-            <a:off x="566928" y="3538728"/>
+            <a:off x="566928" y="3543300"/>
             <a:ext cx="9555480" cy="274320"/>
           </a:xfrm>
           <a:prstGeom prst="rect">
@@ -8479,7 +8517,7 @@
         </p:nvSpPr>
         <p:spPr>
           <a:xfrm>
-            <a:off x="566928" y="1463039"/>
+            <a:off x="566928" y="1467612"/>
             <a:ext cx="9555480" cy="10972"/>
           </a:xfrm>
           <a:prstGeom prst="rect">
@@ -8524,7 +8562,7 @@
           <p:nvPr/>
         </p:nvGraphicFramePr>
         <p:xfrm>
-          <a:off x="566928" y="1664207"/>
+          <a:off x="566928" y="1668780"/>
           <a:ext cx="9555478" cy="2377440"/>
         </p:xfrm>
         <a:graphic>
@@ -9648,7 +9686,7 @@
         </p:nvSpPr>
         <p:spPr>
           <a:xfrm>
-            <a:off x="566928" y="4133087"/>
+            <a:off x="566928" y="4137659"/>
             <a:ext cx="9555480" cy="274320"/>
           </a:xfrm>
           <a:prstGeom prst="rect">
@@ -9687,7 +9725,7 @@
         </p:nvSpPr>
         <p:spPr>
           <a:xfrm>
-            <a:off x="566928" y="4494275"/>
+            <a:off x="566928" y="4498848"/>
             <a:ext cx="9555480" cy="832103"/>
           </a:xfrm>
           <a:prstGeom prst="rect">
@@ -9901,7 +9939,7 @@
                 </a:solidFill>
                 <a:latin typeface="맑은 고딕"/>
               </a:rPr>
-              <a:t>점수가 만들어지는 순서</a:t>
+              <a:t>정산 순서</a:t>
             </a:r>
           </a:p>
         </p:txBody>
@@ -9953,7 +9991,7 @@
         </p:nvSpPr>
         <p:spPr>
           <a:xfrm>
-            <a:off x="566928" y="1463039"/>
+            <a:off x="566928" y="1467612"/>
             <a:ext cx="9555480" cy="10972"/>
           </a:xfrm>
           <a:prstGeom prst="rect">
@@ -9998,7 +10036,7 @@
           <p:nvPr/>
         </p:nvGraphicFramePr>
         <p:xfrm>
-          <a:off x="566928" y="1664207"/>
+          <a:off x="566928" y="1668780"/>
           <a:ext cx="9555478" cy="1783080"/>
         </p:xfrm>
         <a:graphic>
@@ -10522,7 +10560,7 @@
         </p:nvSpPr>
         <p:spPr>
           <a:xfrm>
-            <a:off x="566928" y="3538728"/>
+            <a:off x="566928" y="3543300"/>
             <a:ext cx="9555480" cy="274320"/>
           </a:xfrm>
           <a:prstGeom prst="rect">
@@ -10586,7 +10624,7 @@
                 </a:solidFill>
                 <a:latin typeface="맑은 고딕"/>
               </a:rPr>
-              <a:t>주의 — 발동 순서가 값을 바꾼다. 정산은 배수 +N을 다 더한 뒤 ×N을 곱하는 것이 아니다. 랙 순서대로 하나씩 처리하므로, 곱셈 칩이 덧셈</a:t>
+              <a:t>주의. 발동 순서가 값을 바꾼다. 정산은 배수 +N을 다 더한 뒤 ×N을 곱하는 것이 아니다. 랙 순서대로 하나씩 처리하므로, 곱셈 칩이 덧셈</a:t>
             </a:r>
           </a:p>
           <a:p>
@@ -10740,7 +10778,7 @@
                 </a:solidFill>
                 <a:latin typeface="맑은 고딕"/>
               </a:rPr>
-              <a:t>매 라운드 제약 하나를 안고 던진다</a:t>
+              <a:t>스테이지 제약</a:t>
             </a:r>
           </a:p>
         </p:txBody>
@@ -10792,7 +10830,7 @@
         </p:nvSpPr>
         <p:spPr>
           <a:xfrm>
-            <a:off x="566928" y="1463039"/>
+            <a:off x="566928" y="1467612"/>
             <a:ext cx="9555480" cy="10972"/>
           </a:xfrm>
           <a:prstGeom prst="rect">
@@ -10837,7 +10875,7 @@
           <p:nvPr/>
         </p:nvGraphicFramePr>
         <p:xfrm>
-          <a:off x="566928" y="1664207"/>
+          <a:off x="566928" y="1668780"/>
           <a:ext cx="9555479" cy="2080260"/>
         </p:xfrm>
         <a:graphic>
@@ -11634,7 +11672,7 @@
         </p:nvSpPr>
         <p:spPr>
           <a:xfrm>
-            <a:off x="566928" y="3835907"/>
+            <a:off x="566928" y="3840479"/>
             <a:ext cx="9555480" cy="274320"/>
           </a:xfrm>
           <a:prstGeom prst="rect">
@@ -11673,8 +11711,8 @@
         </p:nvSpPr>
         <p:spPr>
           <a:xfrm>
-            <a:off x="566928" y="4197096"/>
-            <a:ext cx="9555480" cy="832103"/>
+            <a:off x="566928" y="4201667"/>
+            <a:ext cx="9555480" cy="617220"/>
           </a:xfrm>
           <a:prstGeom prst="rect">
             <a:avLst/>
@@ -11736,23 +11774,7 @@
                 </a:solidFill>
                 <a:latin typeface="맑은 고딕"/>
               </a:rPr>
-              <a:t>스킵을 없앤 것은 「얼마나 무리할까」가 아니라 「어느 쪽이 내 빌드에 덜 아픈가」를 묻기 위해서다. 스킵이 있으면 그 물음이</a:t>
-            </a:r>
-          </a:p>
-          <a:p>
-            <a:pPr algn="l">
-              <a:lnSpc>
-                <a:spcPct val="132000"/>
-              </a:lnSpc>
-            </a:pPr>
-            <a:r>
-              <a:rPr sz="1050" b="0">
-                <a:solidFill>
-                  <a:srgbClr val="1A1822"/>
-                </a:solidFill>
-                <a:latin typeface="맑은 고딕"/>
-              </a:rPr>
-              <a:t>사라진다.</a:t>
+              <a:t>스킵을 없앤 이유. 스킵이 있으면 플레이어는 제약을 그냥 넘긴다. 없애면 「어느 쪽이 내 빌드에 덜 아픈가」를 매 라운드 따져야 한다.</a:t>
             </a:r>
           </a:p>
         </p:txBody>
@@ -11926,7 +11948,23 @@
                 </a:solidFill>
                 <a:latin typeface="맑은 고딕"/>
               </a:rPr>
-              <a:t>개조가 자유롭게 판을 바꾸면 판정의 if 사슬이 전제하는 순서가 깨진다. 그 순서 자체가 규칙이고, 판을 굽는 매 단계마다 검사한다.</a:t>
+              <a:t>개조가 자유롭게 판을 바꾸면 판정의 if 사슬이 전제하는 순서가 깨진다. 그 순서 자체가 규칙이고, 판을 굽는 매 단계마다</a:t>
+            </a:r>
+          </a:p>
+          <a:p>
+            <a:pPr>
+              <a:lnSpc>
+                <a:spcPct val="128000"/>
+              </a:lnSpc>
+            </a:pPr>
+            <a:r>
+              <a:rPr sz="1150" b="0">
+                <a:solidFill>
+                  <a:srgbClr val="3D394A"/>
+                </a:solidFill>
+                <a:latin typeface="맑은 고딕"/>
+              </a:rPr>
+              <a:t>검사한다.</a:t>
             </a:r>
           </a:p>
         </p:txBody>
@@ -11939,7 +11977,7 @@
         </p:nvSpPr>
         <p:spPr>
           <a:xfrm>
-            <a:off x="566928" y="1463039"/>
+            <a:off x="566928" y="1691639"/>
             <a:ext cx="9555480" cy="10972"/>
           </a:xfrm>
           <a:prstGeom prst="rect">
@@ -11983,7 +12021,7 @@
         </p:nvSpPr>
         <p:spPr>
           <a:xfrm>
-            <a:off x="886968" y="1664207"/>
+            <a:off x="886968" y="1892807"/>
             <a:ext cx="8915400" cy="274320"/>
           </a:xfrm>
           <a:prstGeom prst="rect">
@@ -12038,7 +12076,7 @@
         </p:nvSpPr>
         <p:spPr>
           <a:xfrm>
-            <a:off x="566928" y="2121408"/>
+            <a:off x="566928" y="2350008"/>
             <a:ext cx="9555480" cy="274320"/>
           </a:xfrm>
           <a:prstGeom prst="rect">
@@ -12078,7 +12116,7 @@
           <p:nvPr/>
         </p:nvGraphicFramePr>
         <p:xfrm>
-          <a:off x="566928" y="2482596"/>
+          <a:off x="566928" y="2711196"/>
           <a:ext cx="9555479" cy="1188720"/>
         </p:xfrm>
         <a:graphic>
@@ -12436,7 +12474,7 @@
         </p:nvSpPr>
         <p:spPr>
           <a:xfrm>
-            <a:off x="566928" y="3762755"/>
+            <a:off x="566928" y="3991355"/>
             <a:ext cx="9555480" cy="274320"/>
           </a:xfrm>
           <a:prstGeom prst="rect">
@@ -12616,7 +12654,7 @@
                 </a:solidFill>
                 <a:latin typeface="맑은 고딕"/>
               </a:rPr>
-              <a:t>표가 스스로 잡는 것</a:t>
+              <a:t>데이터 검증</a:t>
             </a:r>
           </a:p>
         </p:txBody>
@@ -12655,7 +12693,7 @@
                 </a:solidFill>
                 <a:latin typeface="맑은 고딕"/>
               </a:rPr>
-              <a:t>CSV에는 컴파일이 없다. 오타 하나가 8라운드 중반의 조용한 미발동으로 나타나면 추적에 몇 시간이 든다. 그래서 부팅할 때 표 전체를 한</a:t>
+              <a:t>CSV에는 컴파일이 없다. 오타 하나가 8라운드 중반의 조용한 미발동으로 나타나면 추적에 몇 시간이 든다. 그래서 부팅할</a:t>
             </a:r>
           </a:p>
           <a:p>
@@ -12671,7 +12709,7 @@
                 </a:solidFill>
                 <a:latin typeface="맑은 고딕"/>
               </a:rPr>
-              <a:t>번 검사한다.</a:t>
+              <a:t>때 표 전체를 한 번 검사한다.</a:t>
             </a:r>
           </a:p>
         </p:txBody>
@@ -12684,7 +12722,7 @@
         </p:nvSpPr>
         <p:spPr>
           <a:xfrm>
-            <a:off x="566928" y="1682495"/>
+            <a:off x="566928" y="1691639"/>
             <a:ext cx="9555480" cy="10972"/>
           </a:xfrm>
           <a:prstGeom prst="rect">
@@ -12729,7 +12767,7 @@
           <p:nvPr/>
         </p:nvGraphicFramePr>
         <p:xfrm>
-          <a:off x="566928" y="1883664"/>
+          <a:off x="566928" y="1892807"/>
           <a:ext cx="9555479" cy="2080260"/>
         </p:xfrm>
         <a:graphic>
@@ -13146,7 +13184,7 @@
         </p:nvSpPr>
         <p:spPr>
           <a:xfrm>
-            <a:off x="566928" y="4055363"/>
+            <a:off x="566928" y="4064507"/>
             <a:ext cx="9555480" cy="274320"/>
           </a:xfrm>
           <a:prstGeom prst="rect">
@@ -13906,7 +13944,7 @@
                 </a:solidFill>
                 <a:latin typeface="맑은 고딕"/>
               </a:rPr>
-              <a:t>화면 열 개가 이어지는 길</a:t>
+              <a:t>화면 전이도</a:t>
             </a:r>
           </a:p>
         </p:txBody>
@@ -14462,7 +14500,7 @@
                 </a:solidFill>
                 <a:latin typeface="맑은 고딕"/>
               </a:rPr>
-              <a:t>추가 예정 — 타이틀 화면(TITLE)과 일시정지 판. 지금은 실행하면 곧바로 STAGE로 들어간다. 「미정」이 아니라 다음 작업 1순위다.</a:t>
+              <a:t>추가 예정. 타이틀 화면(TITLE)과 일시정지 판. 지금은 실행하면 곧바로 STAGE로 들어간다. 다음 작업 1순위로 잡아 뒀다.</a:t>
             </a:r>
           </a:p>
         </p:txBody>
@@ -14597,7 +14635,7 @@
                 </a:solidFill>
                 <a:latin typeface="맑은 고딕"/>
               </a:rPr>
-              <a:t>버튼 하나로 완주한다</a:t>
+              <a:t>입력 체계</a:t>
             </a:r>
           </a:p>
         </p:txBody>
@@ -14649,7 +14687,7 @@
         </p:nvSpPr>
         <p:spPr>
           <a:xfrm>
-            <a:off x="566928" y="1463039"/>
+            <a:off x="566928" y="1467612"/>
             <a:ext cx="9555480" cy="10972"/>
           </a:xfrm>
           <a:prstGeom prst="rect">
@@ -14694,7 +14732,7 @@
           <p:nvPr/>
         </p:nvGraphicFramePr>
         <p:xfrm>
-          <a:off x="566928" y="1664207"/>
+          <a:off x="566928" y="1668780"/>
           <a:ext cx="9555478" cy="2971800"/>
         </p:xfrm>
         <a:graphic>
@@ -15550,7 +15588,7 @@
         </p:nvSpPr>
         <p:spPr>
           <a:xfrm>
-            <a:off x="566928" y="4727448"/>
+            <a:off x="566928" y="4732020"/>
             <a:ext cx="9555480" cy="274320"/>
           </a:xfrm>
           <a:prstGeom prst="rect">
@@ -15595,7 +15633,7 @@
                 </a:solidFill>
                 <a:latin typeface="맑은 고딕"/>
               </a:rPr>
-              <a:t>지금 없는 것 — 키 재설정 · 게임패드 · 터치 · 우클릭 취소. 마우스만으로는 완주할 수 있고, 키보드만으로는 못 한다.</a:t>
+              <a:t>지금 없는 것. 키 재설정 · 게임패드 · 터치 · 우클릭 취소. 마우스만으로는 완주할 수 있고, 키보드만으로는 못 한다.</a:t>
             </a:r>
           </a:p>
         </p:txBody>
@@ -15730,7 +15768,7 @@
                 </a:solidFill>
                 <a:latin typeface="맑은 고딕"/>
               </a:rPr>
-              <a:t>상점 클릭은 순서가 곧 명세다</a:t>
+              <a:t>상점 조작</a:t>
             </a:r>
           </a:p>
         </p:txBody>
@@ -16372,7 +16410,7 @@
                           </a:solidFill>
                           <a:latin typeface="맑은 고딕"/>
                         </a:rPr>
-                        <a:t>구매가 아니라 「지금 세운다」</a:t>
+                        <a:t>구매로 안 친다. 「지금 세운다」</a:t>
                       </a:r>
                     </a:p>
                   </a:txBody>
@@ -16831,7 +16869,7 @@
         </p:nvSpPr>
         <p:spPr>
           <a:xfrm>
-            <a:off x="566928" y="1463039"/>
+            <a:off x="566928" y="1467612"/>
             <a:ext cx="9555480" cy="10972"/>
           </a:xfrm>
           <a:prstGeom prst="rect">
@@ -16876,7 +16914,7 @@
           <p:nvPr/>
         </p:nvGraphicFramePr>
         <p:xfrm>
-          <a:off x="566928" y="1664207"/>
+          <a:off x="566928" y="1668780"/>
           <a:ext cx="9555478" cy="1485900"/>
         </p:xfrm>
         <a:graphic>
@@ -17589,7 +17627,7 @@
         </p:nvSpPr>
         <p:spPr>
           <a:xfrm>
-            <a:off x="566928" y="3241548"/>
+            <a:off x="566928" y="3246120"/>
             <a:ext cx="9555480" cy="274320"/>
           </a:xfrm>
           <a:prstGeom prst="rect">
@@ -17615,7 +17653,7 @@
                 </a:solidFill>
                 <a:latin typeface="맑은 고딕"/>
               </a:rPr>
-              <a:t>정직하게 — 이 값들은 손으로 맞춘 것이고 실측이 아니다. 대신 게임 안에서 키로 바꿔 가며 맞출 수 있게 열어 뒀고, 현재 값이 화면</a:t>
+              <a:t>이 값들은 손으로 맞췄다. 실측이 아니다. 대신 게임 안에서 키로 바꿔 가며 맞출 수 있게 열어 뒀고, 현재 값이 화면 우하단에 항상 표시된다.</a:t>
             </a:r>
           </a:p>
           <a:p>
@@ -17634,7 +17672,7 @@
                 </a:solidFill>
                 <a:latin typeface="맑은 고딕"/>
               </a:rPr>
-              <a:t>우하단에 항상 표시된다. 감을 감이라고 인정하되 맞추는 방법은 만들어 둔 것이다.</a:t>
+              <a:t>감으로 맞춘 값이라는 것은 인정한다. 대신 맞추는 방법은 만들어 뒀다.</a:t>
             </a:r>
           </a:p>
         </p:txBody>
@@ -17647,7 +17685,7 @@
         </p:nvSpPr>
         <p:spPr>
           <a:xfrm>
-            <a:off x="566928" y="3817620"/>
+            <a:off x="566928" y="3822192"/>
             <a:ext cx="9555480" cy="832103"/>
           </a:xfrm>
           <a:prstGeom prst="rect">
@@ -17861,7 +17899,7 @@
                 </a:solidFill>
                 <a:latin typeface="맑은 고딕"/>
               </a:rPr>
-              <a:t>무엇을 먼저 보게 하는가</a:t>
+              <a:t>정보 위계</a:t>
             </a:r>
           </a:p>
         </p:txBody>
@@ -17913,7 +17951,7 @@
         </p:nvSpPr>
         <p:spPr>
           <a:xfrm>
-            <a:off x="566928" y="1463039"/>
+            <a:off x="566928" y="1467612"/>
             <a:ext cx="9555480" cy="10972"/>
           </a:xfrm>
           <a:prstGeom prst="rect">
@@ -17958,7 +17996,7 @@
           <p:nvPr/>
         </p:nvGraphicFramePr>
         <p:xfrm>
-          <a:off x="566928" y="1664207"/>
+          <a:off x="566928" y="1668780"/>
           <a:ext cx="9555478" cy="1188720"/>
         </p:xfrm>
         <a:graphic>
@@ -18316,7 +18354,7 @@
         </p:nvSpPr>
         <p:spPr>
           <a:xfrm>
-            <a:off x="566928" y="2944368"/>
+            <a:off x="566928" y="2948940"/>
             <a:ext cx="9555480" cy="274320"/>
           </a:xfrm>
           <a:prstGeom prst="rect">
@@ -18361,7 +18399,7 @@
                 </a:solidFill>
                 <a:latin typeface="맑은 고딕"/>
               </a:rPr>
-              <a:t>- 조준선 — 배경 위에서 가장 밝고 채도가 높다 - 잠긴 축은 즉시 내려앉는다 — 좌우를 조준하는 동안 이미 잠근 가로선이 55% 어두워진다.</a:t>
+              <a:t>· 조준선. 배경 위에서 가장 밝고 채도가 높다</a:t>
             </a:r>
           </a:p>
           <a:p>
@@ -18380,7 +18418,7 @@
                 </a:solidFill>
                 <a:latin typeface="맑은 고딕"/>
               </a:rPr>
-              <a:t>「이 축은 끝났다」가 밝기 하나로 말해진다 - 고른 자루 — 뽑아 든 것만 밝고 26px 앞으로 나온다. 나머지는 26% 어둡다</a:t>
+              <a:t>· 잠긴 축은 즉시 내려앉는다. 좌우를 조준하는 동안 이미 잠근 가로선이 55% 어두워진다. 「이 축은 끝났다」가 밝기 하나로 말해진다</a:t>
             </a:r>
           </a:p>
           <a:p>
@@ -18399,7 +18437,26 @@
                 </a:solidFill>
                 <a:latin typeface="맑은 고딕"/>
               </a:rPr>
-              <a:t>안 보이게 눌러 놓은 것 — 칸 숫자 스무 개, 「목표」 라벨, 랙의 조건 태그. 전부 보조색이거나 9~12pt다. 판 위에 있어도 어둡다.</a:t>
+              <a:t>· 고른 자루. 뽑아 든 것만 밝고 26px 앞으로 나온다. 나머지는 26% 어둡다</a:t>
+            </a:r>
+          </a:p>
+          <a:p>
+            <a:pPr>
+              <a:lnSpc>
+                <a:spcPct val="128000"/>
+              </a:lnSpc>
+              <a:spcBef>
+                <a:spcPts val="600"/>
+              </a:spcBef>
+            </a:pPr>
+            <a:r>
+              <a:rPr sz="1100" b="0">
+                <a:solidFill>
+                  <a:srgbClr val="3D394A"/>
+                </a:solidFill>
+                <a:latin typeface="맑은 고딕"/>
+              </a:rPr>
+              <a:t>안 보이게 눌러 놓은 것. 칸 숫자 스무 개, 「목표」 라벨, 랙의 조건 태그. 전부 보조색이거나 9~12pt다. 판 위에 있어도 어둡다.</a:t>
             </a:r>
           </a:p>
         </p:txBody>
@@ -18534,7 +18591,7 @@
                 </a:solidFill>
                 <a:latin typeface="맑은 고딕"/>
               </a:rPr>
-              <a:t>화면이 바뀌면 위계도 바뀐다</a:t>
+              <a:t>화면별 HUD 구성</a:t>
             </a:r>
           </a:p>
         </p:txBody>
@@ -18586,7 +18643,7 @@
         </p:nvSpPr>
         <p:spPr>
           <a:xfrm>
-            <a:off x="566928" y="1463039"/>
+            <a:off x="566928" y="1467612"/>
             <a:ext cx="9555480" cy="10972"/>
           </a:xfrm>
           <a:prstGeom prst="rect">
@@ -18631,7 +18688,7 @@
           <p:nvPr/>
         </p:nvGraphicFramePr>
         <p:xfrm>
-          <a:off x="566928" y="1664207"/>
+          <a:off x="566928" y="1668780"/>
           <a:ext cx="9555479" cy="1485900"/>
         </p:xfrm>
         <a:graphic>
@@ -19072,7 +19129,7 @@
         </p:nvSpPr>
         <p:spPr>
           <a:xfrm>
-            <a:off x="566928" y="3241548"/>
+            <a:off x="566928" y="3246120"/>
             <a:ext cx="9555480" cy="274320"/>
           </a:xfrm>
           <a:prstGeom prst="rect">
@@ -19112,7 +19169,7 @@
           <p:nvPr/>
         </p:nvGraphicFramePr>
         <p:xfrm>
-          <a:off x="566928" y="3602736"/>
+          <a:off x="566928" y="3607308"/>
           <a:ext cx="9555479" cy="1188720"/>
         </p:xfrm>
         <a:graphic>
@@ -19122,8 +19179,8 @@
                 <a:tableStyleId>{2D5ABB26-0587-4C30-8999-92F81FD0307C}</a:tableStyleId>
               </a:tblPr>
               <a:tblGrid>
-                <a:gridCol w="1565121"/>
-                <a:gridCol w="7990358"/>
+                <a:gridCol w="1488148"/>
+                <a:gridCol w="8067331"/>
               </a:tblGrid>
               <a:tr h="297180">
                 <a:tc>
@@ -19226,7 +19283,7 @@
                           </a:solidFill>
                           <a:latin typeface="맑은 고딕"/>
                         </a:rPr>
-                        <a:t>목록이 아니라 물건이다. 라운드가 시작되면 오른쪽에서 날아와 꽂히고, 던진 것만 사라진다</a:t>
+                        <a:t>목록으로 안 보여준다. 물건으로 보여준다. 라운드가 시작되면 오른쪽에서 날아와 꽂히고, 던진 것만 사라진다</a:t>
                       </a:r>
                     </a:p>
                   </a:txBody>
@@ -19535,7 +19592,7 @@
         </p:nvSpPr>
         <p:spPr>
           <a:xfrm>
-            <a:off x="566928" y="1463039"/>
+            <a:off x="566928" y="1467612"/>
             <a:ext cx="9555480" cy="10972"/>
           </a:xfrm>
           <a:prstGeom prst="rect">
@@ -19579,7 +19636,7 @@
         </p:nvSpPr>
         <p:spPr>
           <a:xfrm>
-            <a:off x="566928" y="1664207"/>
+            <a:off x="566928" y="1668780"/>
             <a:ext cx="9555480" cy="274320"/>
           </a:xfrm>
           <a:prstGeom prst="rect">
@@ -19619,7 +19676,7 @@
           <p:nvPr/>
         </p:nvGraphicFramePr>
         <p:xfrm>
-          <a:off x="566928" y="2025395"/>
+          <a:off x="566928" y="2029967"/>
           <a:ext cx="9555479" cy="2080260"/>
         </p:xfrm>
         <a:graphic>
@@ -20036,7 +20093,7 @@
         </p:nvSpPr>
         <p:spPr>
           <a:xfrm>
-            <a:off x="566928" y="4197096"/>
+            <a:off x="566928" y="4201667"/>
             <a:ext cx="9555480" cy="274320"/>
           </a:xfrm>
           <a:prstGeom prst="rect">
@@ -20081,7 +20138,7 @@
                 </a:solidFill>
                 <a:latin typeface="맑은 고딕"/>
               </a:rPr>
-              <a:t>서른여덟의 내역 — 조건 도형 19 + 제약 아이콘 6 + 개조 아이콘 8 + 다트 아이콘 5. 칩 26장이 조건 열아홉을 하나도 안 남기고 전부 쓴다.</a:t>
+              <a:t>서른여덟의 내역. 조건 도형 19 + 제약 아이콘 6 + 개조 아이콘 8 + 다트 아이콘 5. 칩 26장이 조건 열아홉을 하나도 안 남기고 전부 쓴다.</a:t>
             </a:r>
           </a:p>
           <a:p>
@@ -20292,7 +20349,7 @@
                 </a:solidFill>
                 <a:latin typeface="맑은 고딕"/>
               </a:rPr>
-              <a:t>실수를 막는 장치</a:t>
+              <a:t>오조작 방지</a:t>
             </a:r>
           </a:p>
         </p:txBody>
@@ -20344,7 +20401,7 @@
         </p:nvSpPr>
         <p:spPr>
           <a:xfrm>
-            <a:off x="566928" y="1463039"/>
+            <a:off x="566928" y="1467612"/>
             <a:ext cx="9555480" cy="10972"/>
           </a:xfrm>
           <a:prstGeom prst="rect">
@@ -20388,7 +20445,7 @@
         </p:nvSpPr>
         <p:spPr>
           <a:xfrm>
-            <a:off x="566928" y="1664207"/>
+            <a:off x="566928" y="1668780"/>
             <a:ext cx="9555480" cy="274320"/>
           </a:xfrm>
           <a:prstGeom prst="rect">
@@ -20428,7 +20485,7 @@
           <p:nvPr/>
         </p:nvGraphicFramePr>
         <p:xfrm>
-          <a:off x="566928" y="2025395"/>
+          <a:off x="566928" y="2029967"/>
           <a:ext cx="9555479" cy="1865376"/>
         </p:xfrm>
         <a:graphic>
@@ -20677,7 +20734,7 @@
         </p:nvSpPr>
         <p:spPr>
           <a:xfrm>
-            <a:off x="566928" y="3982211"/>
+            <a:off x="566928" y="3986783"/>
             <a:ext cx="9555480" cy="274320"/>
           </a:xfrm>
           <a:prstGeom prst="rect">
@@ -20703,7 +20760,7 @@
                 </a:solidFill>
                 <a:latin typeface="맑은 고딕"/>
               </a:rPr>
-              <a:t>움직이는 것은 못 누른다 — 매물이 낙하 중이면 첫 클릭은 「지금 세운다」다. 스테이지 카드는 0.56초 딜링이 끝날 때까지 클릭을 무시한다.</a:t>
+              <a:t>움직이는 것은 못 누른다. 매물이 낙하 중이면 첫 클릭은 「지금 세운다」다. 스테이지 카드는 0.56초 딜링이 끝날 때까지 클릭을 무시한다.</a:t>
             </a:r>
           </a:p>
           <a:p>
@@ -20741,7 +20798,7 @@
                 </a:solidFill>
                 <a:latin typeface="맑은 고딕"/>
               </a:rPr>
-              <a:t>탭과 드래그를 가르는 5px — 판정에 쓰는 것은 현재 거리가 아니라 누적 최대 거리다. 이 한 줄이 「끌고 갔다 돌아와서 뗌 → 탭</a:t>
+              <a:t>탭과 드래그를 가르는 5px. 판정에 쓰는 값은 현재 거리가 아니다. 누적 최대 거리를 본다. 이 한 줄이 「끌고 갔다 돌아와서 뗌 → 탭</a:t>
             </a:r>
           </a:p>
           <a:p>
@@ -20895,7 +20952,7 @@
                 </a:solidFill>
                 <a:latin typeface="맑은 고딕"/>
               </a:rPr>
-              <a:t>매물이 테이블 위로 떨어진다</a:t>
+              <a:t>상점 연출과 물리</a:t>
             </a:r>
           </a:p>
         </p:txBody>
@@ -20947,7 +21004,7 @@
         </p:nvSpPr>
         <p:spPr>
           <a:xfrm>
-            <a:off x="566928" y="1463039"/>
+            <a:off x="566928" y="1467612"/>
             <a:ext cx="9555480" cy="10972"/>
           </a:xfrm>
           <a:prstGeom prst="rect">
@@ -20992,7 +21049,7 @@
           <p:nvPr/>
         </p:nvGraphicFramePr>
         <p:xfrm>
-          <a:off x="566928" y="1664207"/>
+          <a:off x="566928" y="1668780"/>
           <a:ext cx="9555479" cy="1188720"/>
         </p:xfrm>
         <a:graphic>
@@ -21241,7 +21298,7 @@
         </p:nvSpPr>
         <p:spPr>
           <a:xfrm>
-            <a:off x="566928" y="2944368"/>
+            <a:off x="566928" y="2948940"/>
             <a:ext cx="9555480" cy="832103"/>
           </a:xfrm>
           <a:prstGeom prst="rect">
@@ -21304,7 +21361,7 @@
                 </a:solidFill>
                 <a:latin typeface="맑은 고딕"/>
               </a:rPr>
-              <a:t>상점을 물리 테이블로 만든 것은, 매대를 「목록」이 아니라 「자리」로 만들기 위해서다. 목록에서 고르는 것과 판 위에서 집어 미는</a:t>
+              <a:t>상점을 물리 테이블로 만든 이유. 목록에서 고르면 매대가 그냥 목록이지만, 판 위에 떨어뜨리면 자리가 생긴다. 목록에서 고르는 것과</a:t>
             </a:r>
           </a:p>
           <a:p>
@@ -21320,7 +21377,7 @@
                 </a:solidFill>
                 <a:latin typeface="맑은 고딕"/>
               </a:rPr>
-              <a:t>것은 같은 구매가 아니다. 라운드마다 배치가 달라지는 것도 그래서 값이 있다.</a:t>
+              <a:t>판 위에서 집어 미는 것은 같은 구매가 아니다. 라운드마다 배치가 달라지는 것도 그래서 값이 있다.</a:t>
             </a:r>
           </a:p>
         </p:txBody>
@@ -21455,7 +21512,7 @@
                 </a:solidFill>
                 <a:latin typeface="맑은 고딕"/>
               </a:rPr>
-              <a:t>등장인물은 둘이다</a:t>
+              <a:t>등장인물</a:t>
             </a:r>
           </a:p>
         </p:txBody>
@@ -21999,7 +22056,7 @@
                 </a:solidFill>
                 <a:latin typeface="맑은 고딕"/>
               </a:rPr>
-              <a:t>넣으면 눈코입이 각각 1~2px이 되어 사람이 아니라 얼룩이 된다. 그래서 목 위를 랙 뒤로 넣었다. 제약이 그대로 인상이 된다 — 손과 몸만</a:t>
+              <a:t>넣으면 눈코입이 각각 1~2px이 되어 얼룩으로 보인다. 그래서 목 위를 랙 뒤로 넣었다. 제약이 그대로 인상이 된다. 손과 몸만 보이는 딜러는</a:t>
             </a:r>
           </a:p>
           <a:p>
@@ -22018,7 +22075,7 @@
                 </a:solidFill>
                 <a:latin typeface="맑은 고딕"/>
               </a:rPr>
-              <a:t>보이는 딜러는 표정을 읽을 수 없다.</a:t>
+              <a:t>표정을 읽을 수 없다.</a:t>
             </a:r>
           </a:p>
           <a:p>
@@ -22037,7 +22094,7 @@
                 </a:solidFill>
                 <a:latin typeface="맑은 고딕"/>
               </a:rPr>
-              <a:t>플레이어 캐릭터를 안 만든 이유 — 이 게임에서 플레이어의 정체는 아무 규칙에도 안 걸린다. 손 하나면 충분하고, 캐릭터를 세우면 그 순간</a:t>
+              <a:t>플레이어 캐릭터를 안 만든 이유. 이 게임에서 플레이어의 정체는 아무 규칙에도 안 걸린다. 손 하나면 충분하고, 캐릭터를 세우면 그 순간</a:t>
             </a:r>
           </a:p>
           <a:p>
@@ -23144,7 +23201,7 @@
                 </a:solidFill>
                 <a:latin typeface="맑은 고딕"/>
               </a:rPr>
-              <a:t>성장 축이 셋이고, 서로를 대체하지 않는다</a:t>
+              <a:t>성장 축 세 가지</a:t>
             </a:r>
           </a:p>
         </p:txBody>
@@ -23196,7 +23253,7 @@
         </p:nvSpPr>
         <p:spPr>
           <a:xfrm>
-            <a:off x="566928" y="1463039"/>
+            <a:off x="566928" y="1467612"/>
             <a:ext cx="9555480" cy="10972"/>
           </a:xfrm>
           <a:prstGeom prst="rect">
@@ -23241,7 +23298,7 @@
           <p:nvPr/>
         </p:nvGraphicFramePr>
         <p:xfrm>
-          <a:off x="566928" y="1664207"/>
+          <a:off x="566928" y="1668780"/>
           <a:ext cx="9555479" cy="1188720"/>
         </p:xfrm>
         <a:graphic>
@@ -23708,7 +23765,7 @@
         </p:nvSpPr>
         <p:spPr>
           <a:xfrm>
-            <a:off x="566928" y="2944368"/>
+            <a:off x="566928" y="2948940"/>
             <a:ext cx="9555480" cy="274320"/>
           </a:xfrm>
           <a:prstGeom prst="rect">
@@ -23767,7 +23824,7 @@
           <p:nvPr/>
         </p:nvGraphicFramePr>
         <p:xfrm>
-          <a:off x="566928" y="3520440"/>
+          <a:off x="566928" y="3525012"/>
           <a:ext cx="9555478" cy="594360"/>
         </p:xfrm>
         <a:graphic>
@@ -24081,7 +24138,7 @@
                 </a:solidFill>
                 <a:latin typeface="맑은 고딕"/>
               </a:rPr>
-              <a:t>칩 — 조건과 효과의 짝</a:t>
+              <a:t>칩의 구조</a:t>
             </a:r>
           </a:p>
         </p:txBody>
@@ -24133,7 +24190,7 @@
         </p:nvSpPr>
         <p:spPr>
           <a:xfrm>
-            <a:off x="566928" y="1463039"/>
+            <a:off x="566928" y="1467612"/>
             <a:ext cx="9555480" cy="10972"/>
           </a:xfrm>
           <a:prstGeom prst="rect">
@@ -24177,7 +24234,7 @@
         </p:nvSpPr>
         <p:spPr>
           <a:xfrm>
-            <a:off x="886968" y="1664207"/>
+            <a:off x="886968" y="1668780"/>
             <a:ext cx="8915400" cy="274320"/>
           </a:xfrm>
           <a:prstGeom prst="rect">
@@ -24312,7 +24369,7 @@
         </p:nvSpPr>
         <p:spPr>
           <a:xfrm>
-            <a:off x="566928" y="2807208"/>
+            <a:off x="566928" y="2811780"/>
             <a:ext cx="9555480" cy="274320"/>
           </a:xfrm>
           <a:prstGeom prst="rect">
@@ -24352,7 +24409,7 @@
           <p:nvPr/>
         </p:nvGraphicFramePr>
         <p:xfrm>
-          <a:off x="566928" y="3168396"/>
+          <a:off x="566928" y="3172968"/>
           <a:ext cx="9555479" cy="2080260"/>
         </p:xfrm>
         <a:graphic>
@@ -24769,7 +24826,7 @@
         </p:nvSpPr>
         <p:spPr>
           <a:xfrm>
-            <a:off x="566928" y="5340096"/>
+            <a:off x="566928" y="5344668"/>
             <a:ext cx="9555480" cy="274320"/>
           </a:xfrm>
           <a:prstGeom prst="rect">
@@ -24809,8 +24866,8 @@
           <p:nvPr/>
         </p:nvGraphicFramePr>
         <p:xfrm>
-          <a:off x="566928" y="5701283"/>
-          <a:ext cx="9555478" cy="1485900"/>
+          <a:off x="566928" y="5705856"/>
+          <a:ext cx="9555479" cy="1485900"/>
         </p:xfrm>
         <a:graphic>
           <a:graphicData uri="http://schemas.openxmlformats.org/drawingml/2006/table">
@@ -24819,9 +24876,9 @@
                 <a:tableStyleId>{2D5ABB26-0587-4C30-8999-92F81FD0307C}</a:tableStyleId>
               </a:tblPr>
               <a:tblGrid>
-                <a:gridCol w="2502625"/>
-                <a:gridCol w="6142808"/>
-                <a:gridCol w="910045"/>
+                <a:gridCol w="2627757"/>
+                <a:gridCol w="5972175"/>
+                <a:gridCol w="955547"/>
               </a:tblGrid>
               <a:tr h="297180">
                 <a:tc>
@@ -25117,7 +25174,7 @@
                           </a:solidFill>
                           <a:latin typeface="맑은 고딕"/>
                         </a:rPr>
-                        <a:t>배수에 곱한다 — 두 번째 층</a:t>
+                        <a:t>배수에 곱한다. 두 번째 층</a:t>
                       </a:r>
                     </a:p>
                   </a:txBody>
@@ -25411,7 +25468,7 @@
                 </a:solidFill>
                 <a:latin typeface="맑은 고딕"/>
               </a:rPr>
-              <a:t>판정 함수가 아는 술어 전부다. 오른쪽 수치는 기본 판에서 다트 한 발이 그 조건에 걸릴 확률이다. 36만 발을 실제 판정 함수로 돌려 잰</a:t>
+              <a:t>판정 함수가 아는 술어 전부다. 오른쪽 수치는 기본 판에서 다트 한 발이 그 조건에 걸릴 확률이다. 36만 발을 실제 판정</a:t>
             </a:r>
           </a:p>
           <a:p>
@@ -25427,7 +25484,7 @@
                 </a:solidFill>
                 <a:latin typeface="맑은 고딕"/>
               </a:rPr>
-              <a:t>값이다.</a:t>
+              <a:t>함수로 돌려 잰 값이다.</a:t>
             </a:r>
           </a:p>
         </p:txBody>
@@ -25440,7 +25497,7 @@
         </p:nvSpPr>
         <p:spPr>
           <a:xfrm>
-            <a:off x="566928" y="1682495"/>
+            <a:off x="566928" y="1691639"/>
             <a:ext cx="9555480" cy="10972"/>
           </a:xfrm>
           <a:prstGeom prst="rect">
@@ -25485,7 +25542,7 @@
           <p:nvPr/>
         </p:nvGraphicFramePr>
         <p:xfrm>
-          <a:off x="566928" y="1883664"/>
+          <a:off x="566928" y="1892807"/>
           <a:ext cx="9555478" cy="3268980"/>
         </p:xfrm>
         <a:graphic>
@@ -26722,7 +26779,7 @@
         </p:nvSpPr>
         <p:spPr>
           <a:xfrm>
-            <a:off x="566928" y="5244083"/>
+            <a:off x="566928" y="5253227"/>
             <a:ext cx="9555480" cy="274320"/>
           </a:xfrm>
           <a:prstGeom prst="rect">
@@ -26767,7 +26824,7 @@
                 </a:solidFill>
                 <a:latin typeface="맑은 고딕"/>
               </a:rPr>
-              <a:t>- 왼쪽 31.05 + 오른쪽 31.19 = 62.24. 「무조건」과 소수점까지 같은 값이다. 두 장을 같이 사면 조건이 사라진다 - 홀수 30.57 + 짝수 30.50</a:t>
+              <a:t>· 왼쪽 31.05 + 오른쪽 31.19 = 62.24. 「무조건」과 소수점까지 같은 값이다. 두 장을 같이 사면 조건이 사라진다</a:t>
             </a:r>
           </a:p>
           <a:p>
@@ -26786,7 +26843,7 @@
                 </a:solidFill>
                 <a:latin typeface="맑은 고딕"/>
               </a:rPr>
-              <a:t>= 61.07. 무조건보다 1.17%p 낮은 것은 불(25·50)이 홀수도 짝수도 아니기 때문이다 - 조건 열아홉 중 죽은 것이 하나도 없다. 칩 26장이</a:t>
+              <a:t>· 홀수 30.57 + 짝수 30.50 = 61.07. 무조건보다 1.17%p 낮은 것은 불(25·50)이 홀수도 짝수도 아니기 때문이다</a:t>
             </a:r>
           </a:p>
           <a:p>
@@ -26805,7 +26862,7 @@
                 </a:solidFill>
                 <a:latin typeface="맑은 고딕"/>
               </a:rPr>
-              <a:t>열아홉을 하나도 안 남기고 전부 쓴다 - 「같은 칸 연속」과 「연속 명중」은 같은 술어다. 포함관계 표에 서로를 담는다고 적혀 있고,</a:t>
+              <a:t>· 조건 열아홉 중 죽은 것이 하나도 없다. 칩 26장이 열아홉을 하나도 안 남기고 전부 쓴다</a:t>
             </a:r>
           </a:p>
           <a:p>
@@ -26824,7 +26881,26 @@
                 </a:solidFill>
                 <a:latin typeface="맑은 고딕"/>
               </a:rPr>
-              <a:t>발동률도 둘 다 1.58%다. 그런데 값이 7골드와 11골드다</a:t>
+              <a:t>· 「같은 칸 연속」과 「연속 명중」은 같은 술어다. 포함관계 표에 서로를 담는다고 적혀 있고, 발동률도 둘 다 1.58%다. 그런데 값이 7골드와</a:t>
+            </a:r>
+          </a:p>
+          <a:p>
+            <a:pPr>
+              <a:lnSpc>
+                <a:spcPct val="128000"/>
+              </a:lnSpc>
+              <a:spcBef>
+                <a:spcPts val="600"/>
+              </a:spcBef>
+            </a:pPr>
+            <a:r>
+              <a:rPr sz="1100" b="0">
+                <a:solidFill>
+                  <a:srgbClr val="3D394A"/>
+                </a:solidFill>
+                <a:latin typeface="맑은 고딕"/>
+              </a:rPr>
+              <a:t>11골드다</a:t>
             </a:r>
           </a:p>
         </p:txBody>
@@ -26959,7 +27035,7 @@
                 </a:solidFill>
                 <a:latin typeface="맑은 고딕"/>
               </a:rPr>
-              <a:t>칩 데이터 ① — 흔함 아홉, 보통 여덟</a:t>
+              <a:t>칩 데이터 ① 흔함·보통</a:t>
             </a:r>
           </a:p>
         </p:txBody>
@@ -27011,7 +27087,7 @@
         </p:nvSpPr>
         <p:spPr>
           <a:xfrm>
-            <a:off x="566928" y="1463039"/>
+            <a:off x="566928" y="1467612"/>
             <a:ext cx="9555480" cy="10972"/>
           </a:xfrm>
           <a:prstGeom prst="rect">
@@ -27056,7 +27132,7 @@
           <p:nvPr/>
         </p:nvGraphicFramePr>
         <p:xfrm>
-          <a:off x="566928" y="1664207"/>
+          <a:off x="566928" y="1668780"/>
           <a:ext cx="9555477" cy="5349240"/>
         </p:xfrm>
         <a:graphic>
@@ -30646,7 +30722,7 @@
                 </a:solidFill>
                 <a:latin typeface="맑은 고딕"/>
               </a:rPr>
-              <a:t>칩 데이터 ② — 희귀 아홉</a:t>
+              <a:t>칩 데이터 ② 희귀</a:t>
             </a:r>
           </a:p>
         </p:txBody>
@@ -30698,7 +30774,7 @@
         </p:nvSpPr>
         <p:spPr>
           <a:xfrm>
-            <a:off x="566928" y="1463039"/>
+            <a:off x="566928" y="1467612"/>
             <a:ext cx="9555480" cy="10972"/>
           </a:xfrm>
           <a:prstGeom prst="rect">
@@ -30743,7 +30819,7 @@
           <p:nvPr/>
         </p:nvGraphicFramePr>
         <p:xfrm>
-          <a:off x="566928" y="1664207"/>
+          <a:off x="566928" y="1668780"/>
           <a:ext cx="9555476" cy="2971800"/>
         </p:xfrm>
         <a:graphic>
@@ -32683,7 +32759,7 @@
         </p:nvSpPr>
         <p:spPr>
           <a:xfrm>
-            <a:off x="566928" y="4727448"/>
+            <a:off x="566928" y="4732020"/>
             <a:ext cx="9555480" cy="274320"/>
           </a:xfrm>
           <a:prstGeom prst="rect">
@@ -32709,7 +32785,7 @@
                 </a:solidFill>
                 <a:latin typeface="맑은 고딕"/>
               </a:rPr>
-              <a:t>정밀(기여 0.52)과 기본기(22.31)는 43배 차이다. 이것은 밸런스가 깨진 것이 아니라 측정 모형의 한계다. 「연속 명중」은 균등 조준이 같은</a:t>
+              <a:t>정밀(기여 0.52)과 기본기(22.31)는 43배 차이다. 밸런스가 깨진 값은 아니다. 측정 모형의 한계다. 「연속 명중」은 균등 조준이 같은 칸을</a:t>
             </a:r>
           </a:p>
           <a:p>
@@ -32728,7 +32804,7 @@
                 </a:solidFill>
                 <a:latin typeface="맑은 고딕"/>
               </a:rPr>
-              <a:t>칸을 연달아 못 맞히기 때문에 거의 안 걸린다. 한 섹터를 겨냥하는 실제 플레이에서는 값이 완전히 달라진다.</a:t>
+              <a:t>연달아 못 맞히기 때문에 거의 안 걸린다. 한 섹터를 겨냥하는 실제 플레이에서는 값이 완전히 달라진다.</a:t>
             </a:r>
           </a:p>
         </p:txBody>
@@ -32863,7 +32939,7 @@
                 </a:solidFill>
                 <a:latin typeface="맑은 고딕"/>
               </a:rPr>
-              <a:t>골드 칩 다섯 — 슬롯 하나를 수입에 건다</a:t>
+              <a:t>골드 칩</a:t>
             </a:r>
           </a:p>
         </p:txBody>
@@ -32902,7 +32978,23 @@
                 </a:solidFill>
                 <a:latin typeface="맑은 고딕"/>
               </a:rPr>
-              <a:t>득점 반쪽을 깎고 정산에서 골드를 받는다. 다섯 장 모두 같은 조건의 다른 칩보다 득점이 낮고, 그 차액이 골드의 가격이다.</a:t>
+              <a:t>득점 반쪽을 깎고 정산에서 골드를 받는다. 다섯 장 모두 같은 조건의 다른 칩보다 득점이 낮고, 그 차액이 골드의</a:t>
+            </a:r>
+          </a:p>
+          <a:p>
+            <a:pPr>
+              <a:lnSpc>
+                <a:spcPct val="128000"/>
+              </a:lnSpc>
+            </a:pPr>
+            <a:r>
+              <a:rPr sz="1150" b="0">
+                <a:solidFill>
+                  <a:srgbClr val="3D394A"/>
+                </a:solidFill>
+                <a:latin typeface="맑은 고딕"/>
+              </a:rPr>
+              <a:t>가격이다.</a:t>
             </a:r>
           </a:p>
         </p:txBody>
@@ -32915,7 +33007,7 @@
         </p:nvSpPr>
         <p:spPr>
           <a:xfrm>
-            <a:off x="566928" y="1463039"/>
+            <a:off x="566928" y="1691639"/>
             <a:ext cx="9555480" cy="10972"/>
           </a:xfrm>
           <a:prstGeom prst="rect">
@@ -32960,7 +33052,7 @@
           <p:nvPr/>
         </p:nvGraphicFramePr>
         <p:xfrm>
-          <a:off x="566928" y="1664207"/>
+          <a:off x="566928" y="1892807"/>
           <a:ext cx="9555476" cy="1783080"/>
         </p:xfrm>
         <a:graphic>
@@ -33973,7 +34065,7 @@
         </p:nvSpPr>
         <p:spPr>
           <a:xfrm>
-            <a:off x="566928" y="3538728"/>
+            <a:off x="566928" y="3767327"/>
             <a:ext cx="9555480" cy="274320"/>
           </a:xfrm>
           <a:prstGeom prst="rect">
@@ -33999,7 +34091,7 @@
                 </a:solidFill>
                 <a:latin typeface="맑은 고딕"/>
               </a:rPr>
-              <a:t>비교 — 같은 「무조건」 조건에서 기본기는 점수 +25인데 물주는 +16이다. 9점의 차이가 골드 수입의 값이다.</a:t>
+              <a:t>비교. 같은 「무조건」 조건에서 기본기는 점수 +25인데 물주는 +16이다. 9점의 차이가 골드 수입의 값이다.</a:t>
             </a:r>
           </a:p>
         </p:txBody>
@@ -34012,7 +34104,7 @@
         </p:nvSpPr>
         <p:spPr>
           <a:xfrm>
-            <a:off x="566928" y="3899916"/>
+            <a:off x="566928" y="4128515"/>
             <a:ext cx="9555480" cy="617220"/>
           </a:xfrm>
           <a:prstGeom prst="rect">
@@ -34210,7 +34302,7 @@
                 </a:solidFill>
                 <a:latin typeface="맑은 고딕"/>
               </a:rPr>
-              <a:t>수치는 재서 넣었다</a:t>
+              <a:t>수치 측정 방법</a:t>
             </a:r>
           </a:p>
         </p:txBody>
@@ -34249,7 +34341,23 @@
                 </a:solidFill>
                 <a:latin typeface="맑은 고딕"/>
               </a:rPr>
-              <a:t>조건이 넓고 값이 작은 칩과 좁고 큰 칩을 같은 자로 재기 위해, 실제 판정 함수에 36만 발을 통과시켜 칩마다 두 수를 뽑았다.</a:t>
+              <a:t>조건이 넓고 값이 작은 칩과 좁고 큰 칩을 같은 자로 재기 위해, 실제 판정 함수에 36만 발을 통과시켜 칩마다 두 수를</a:t>
+            </a:r>
+          </a:p>
+          <a:p>
+            <a:pPr>
+              <a:lnSpc>
+                <a:spcPct val="128000"/>
+              </a:lnSpc>
+            </a:pPr>
+            <a:r>
+              <a:rPr sz="1150" b="0">
+                <a:solidFill>
+                  <a:srgbClr val="3D394A"/>
+                </a:solidFill>
+                <a:latin typeface="맑은 고딕"/>
+              </a:rPr>
+              <a:t>뽑았다.</a:t>
             </a:r>
           </a:p>
         </p:txBody>
@@ -34262,7 +34370,7 @@
         </p:nvSpPr>
         <p:spPr>
           <a:xfrm>
-            <a:off x="566928" y="1463039"/>
+            <a:off x="566928" y="1691639"/>
             <a:ext cx="9555480" cy="10972"/>
           </a:xfrm>
           <a:prstGeom prst="rect">
@@ -34307,7 +34415,7 @@
           <p:nvPr/>
         </p:nvGraphicFramePr>
         <p:xfrm>
-          <a:off x="566928" y="1664207"/>
+          <a:off x="566928" y="1892807"/>
           <a:ext cx="9555479" cy="891540"/>
         </p:xfrm>
         <a:graphic>
@@ -34500,7 +34608,7 @@
         </p:nvSpPr>
         <p:spPr>
           <a:xfrm>
-            <a:off x="566928" y="2647188"/>
+            <a:off x="566928" y="2875788"/>
             <a:ext cx="9555480" cy="274320"/>
           </a:xfrm>
           <a:prstGeom prst="rect">
@@ -34526,7 +34634,7 @@
                 </a:solidFill>
                 <a:latin typeface="맑은 고딕"/>
               </a:rPr>
-              <a:t>전제 셋 — 이 값들이 무엇을 가정하는가</a:t>
+              <a:t>이 값이 가정하는 것 셋</a:t>
             </a:r>
           </a:p>
           <a:p>
@@ -34545,7 +34653,7 @@
                 </a:solidFill>
                 <a:latin typeface="맑은 고딕"/>
               </a:rPr>
-              <a:t>1. 칩은 한 장만 든다. 조합 효과는 이 표에 안 들어 있다 2. 균등 조준. 착탄점이 조준 사각형 위에 고르게 분포한다고 본다 3. 기본 판.</a:t>
+              <a:t>· 칩은 한 장만 든다. 조합 효과는 이 표에 안 들어 있다</a:t>
             </a:r>
           </a:p>
           <a:p>
@@ -34564,7 +34672,26 @@
                 </a:solidFill>
                 <a:latin typeface="맑은 고딕"/>
               </a:rPr>
-              <a:t>개조가 하나도 안 붙은 상태다</a:t>
+              <a:t>· 균등 조준. 착탄점이 조준 사각형 위에 고르게 분포한다고 본다</a:t>
+            </a:r>
+          </a:p>
+          <a:p>
+            <a:pPr>
+              <a:lnSpc>
+                <a:spcPct val="128000"/>
+              </a:lnSpc>
+              <a:spcBef>
+                <a:spcPts val="600"/>
+              </a:spcBef>
+            </a:pPr>
+            <a:r>
+              <a:rPr sz="1100" b="0">
+                <a:solidFill>
+                  <a:srgbClr val="3D394A"/>
+                </a:solidFill>
+                <a:latin typeface="맑은 고딕"/>
+              </a:rPr>
+              <a:t>· 기본 판. 개조가 하나도 안 붙은 상태다</a:t>
             </a:r>
           </a:p>
           <a:p>
@@ -34737,7 +34864,7 @@
                 </a:solidFill>
                 <a:latin typeface="맑은 고딕"/>
               </a:rPr>
-              <a:t>조건이 겹치는 자리와 안 겹치는 자리</a:t>
+              <a:t>조건 간 교집합</a:t>
             </a:r>
           </a:p>
         </p:txBody>
@@ -34789,7 +34916,7 @@
         </p:nvSpPr>
         <p:spPr>
           <a:xfrm>
-            <a:off x="566928" y="1463039"/>
+            <a:off x="566928" y="1467612"/>
             <a:ext cx="9555480" cy="10972"/>
           </a:xfrm>
           <a:prstGeom prst="rect">
@@ -34834,7 +34961,7 @@
           <p:nvPr/>
         </p:nvGraphicFramePr>
         <p:xfrm>
-          <a:off x="566928" y="1664207"/>
+          <a:off x="566928" y="1668780"/>
           <a:ext cx="9555480" cy="1783080"/>
         </p:xfrm>
         <a:graphic>
@@ -35195,7 +35322,7 @@
         </p:nvSpPr>
         <p:spPr>
           <a:xfrm>
-            <a:off x="566928" y="3538728"/>
+            <a:off x="566928" y="3543300"/>
             <a:ext cx="9555480" cy="274320"/>
           </a:xfrm>
           <a:prstGeom prst="rect">
@@ -35235,7 +35362,7 @@
           <p:nvPr/>
         </p:nvGraphicFramePr>
         <p:xfrm>
-          <a:off x="566928" y="3899916"/>
+          <a:off x="566928" y="3904488"/>
           <a:ext cx="9555479" cy="1485900"/>
         </p:xfrm>
         <a:graphic>
@@ -35540,7 +35667,7 @@
         </p:nvSpPr>
         <p:spPr>
           <a:xfrm>
-            <a:off x="566928" y="5477256"/>
+            <a:off x="566928" y="5481828"/>
             <a:ext cx="9555480" cy="274320"/>
           </a:xfrm>
           <a:prstGeom prst="rect">
@@ -35585,7 +35712,7 @@
                 </a:solidFill>
                 <a:latin typeface="맑은 고딕"/>
               </a:rPr>
-              <a:t>쓴다. 그리고 큰 칸의 이웃은 작은 칸이다 — 20의 이웃은 1과 5다. 대물을 노리면 소물이 터진다.</a:t>
+              <a:t>쓴다. 그리고 큰 칸의 이웃은 작은 칸이다. 20의 이웃은 1과 5다. 대물을 노리면 소물이 터진다.</a:t>
             </a:r>
           </a:p>
         </p:txBody>
@@ -35772,7 +35899,7 @@
         </p:nvSpPr>
         <p:spPr>
           <a:xfrm>
-            <a:off x="566928" y="1463039"/>
+            <a:off x="566928" y="1467612"/>
             <a:ext cx="9555480" cy="10972"/>
           </a:xfrm>
           <a:prstGeom prst="rect">
@@ -35817,7 +35944,7 @@
           <p:nvPr/>
         </p:nvGraphicFramePr>
         <p:xfrm>
-          <a:off x="566928" y="1664207"/>
+          <a:off x="566928" y="1668780"/>
           <a:ext cx="9555478" cy="1783080"/>
         </p:xfrm>
         <a:graphic>
@@ -36830,7 +36957,7 @@
         </p:nvSpPr>
         <p:spPr>
           <a:xfrm>
-            <a:off x="566928" y="3538728"/>
+            <a:off x="566928" y="3543300"/>
             <a:ext cx="9555480" cy="274320"/>
           </a:xfrm>
           <a:prstGeom prst="rect">
@@ -36875,7 +37002,7 @@
                 </a:solidFill>
                 <a:latin typeface="맑은 고딕"/>
               </a:rPr>
-              <a:t>- 불은 최강이면서 위험이 아예 없다(빗나감 0.00%). 대신 역풍 하나가 761 → 308로 죽인다. 그리고 열 장이 이 축과 배타다 - 우측 대소는</a:t>
+              <a:t>· 불은 최강이면서 위험이 아예 없다(빗나감 0.00%). 대신 역풍 하나가 761 → 308로 죽인다. 그리고 열 장이 이 축과 배타다</a:t>
             </a:r>
           </a:p>
           <a:p>
@@ -36894,7 +37021,7 @@
                 </a:solidFill>
                 <a:latin typeface="맑은 고딕"/>
               </a:rPr>
-              <a:t>가장 싸고(40골드) 오차에 강하다. 18칸 양옆이 소물이라 빗맞아도 걸린다 - 무조건은 천장이 낮은 대신 어떤 제약도 안 무섭다. R6는 넘고</a:t>
+              <a:t>· 우측 대소는 가장 싸고(40골드) 오차에 강하다. 18칸 양옆이 소물이라 빗맞아도 걸린다</a:t>
             </a:r>
           </a:p>
           <a:p>
@@ -36913,7 +37040,7 @@
                 </a:solidFill>
                 <a:latin typeface="맑은 고딕"/>
               </a:rPr>
-              <a:t>R7에서 막힌다. 보험 축이다</a:t>
+              <a:t>· 무조건은 천장이 낮은 대신 어떤 제약도 안 무섭다. R6는 넘고 R7에서 막힌다. 보험 축이다</a:t>
             </a:r>
           </a:p>
           <a:p>
@@ -37086,7 +37213,7 @@
                 </a:solidFill>
                 <a:latin typeface="맑은 고딕"/>
               </a:rPr>
-              <a:t>같이 들면 안 되는 것</a:t>
+              <a:t>반시너지</a:t>
             </a:r>
           </a:p>
         </p:txBody>
@@ -37475,7 +37602,7 @@
                 </a:solidFill>
                 <a:latin typeface="맑은 고딕"/>
               </a:rPr>
-              <a:t>가장 큰 반시너지는 칩이 아니라 다트다. 6골드짜리 가벼운 다트 하나가 칸 축을 +83%, 무조건 축을 +195% 올리고 동시에 링 축을 −70% 낸다.</a:t>
+              <a:t>가장 큰 반시너지는 다트에서 나온다. 6골드짜리 가벼운 다트 하나가 칸 축을 +83%, 무조건 축을 +195% 올리고 동시에 링 축을 −70% 낸다. 칩</a:t>
             </a:r>
           </a:p>
           <a:p>
@@ -37494,7 +37621,7 @@
                 </a:solidFill>
                 <a:latin typeface="맑은 고딕"/>
               </a:rPr>
-              <a:t>칩 다섯 장 중 어느 한 장보다 크다.</a:t>
+              <a:t>다섯 장 중 어느 한 장보다 크다.</a:t>
             </a:r>
           </a:p>
         </p:txBody>
@@ -37760,7 +37887,7 @@
                 </a:solidFill>
                 <a:latin typeface="맑은 고딕"/>
               </a:rPr>
-              <a:t>간판에 불이 하나 나간 밤의 바, 하이톤. 안쪽 벽에 다트판이 하나 걸려 있고, 그 앞 펠트 테이블 뒤에 정장을 입은 딜러가 선다. 여기서</a:t>
+              <a:t>간판에 불이 하나 나간 밤의 바, 하이톤. 안쪽 벽에 다트판이 하나 걸려 있고, 그 앞 펠트 테이블 뒤에 정장을 입은 딜러가</a:t>
             </a:r>
           </a:p>
           <a:p>
@@ -37776,7 +37903,7 @@
                 </a:solidFill>
                 <a:latin typeface="맑은 고딕"/>
               </a:rPr>
-              <a:t>파는 것은 술이 아니라 판이다.</a:t>
+              <a:t>선다. 여기서 파는 것은 술이 아니다. 판이다.</a:t>
             </a:r>
           </a:p>
         </p:txBody>
@@ -37789,7 +37916,7 @@
         </p:nvSpPr>
         <p:spPr>
           <a:xfrm>
-            <a:off x="566928" y="1682495"/>
+            <a:off x="566928" y="1691639"/>
             <a:ext cx="9555480" cy="10972"/>
           </a:xfrm>
           <a:prstGeom prst="rect">
@@ -37833,7 +37960,7 @@
         </p:nvSpPr>
         <p:spPr>
           <a:xfrm>
-            <a:off x="566928" y="1883664"/>
+            <a:off x="566928" y="1892807"/>
             <a:ext cx="9555480" cy="274320"/>
           </a:xfrm>
           <a:prstGeom prst="rect">
@@ -37987,7 +38114,7 @@
           <p:nvPr/>
         </p:nvGraphicFramePr>
         <p:xfrm>
-          <a:off x="566928" y="3899916"/>
+          <a:off x="566928" y="3909060"/>
           <a:ext cx="9555479" cy="2080260"/>
         </p:xfrm>
         <a:graphic>
@@ -38526,7 +38653,7 @@
                 </a:solidFill>
                 <a:latin typeface="맑은 고딕"/>
               </a:rPr>
-              <a:t>상점의 자리는 정확히 넷이다</a:t>
+              <a:t>상점 구성</a:t>
             </a:r>
           </a:p>
         </p:txBody>
@@ -38578,7 +38705,7 @@
         </p:nvSpPr>
         <p:spPr>
           <a:xfrm>
-            <a:off x="566928" y="1463039"/>
+            <a:off x="566928" y="1467612"/>
             <a:ext cx="9555480" cy="10972"/>
           </a:xfrm>
           <a:prstGeom prst="rect">
@@ -38623,7 +38750,7 @@
           <p:nvPr/>
         </p:nvGraphicFramePr>
         <p:xfrm>
-          <a:off x="566928" y="1664207"/>
+          <a:off x="566928" y="1668780"/>
           <a:ext cx="9555480" cy="1357884"/>
         </p:xfrm>
         <a:graphic>
@@ -38872,7 +38999,7 @@
         </p:nvSpPr>
         <p:spPr>
           <a:xfrm>
-            <a:off x="566928" y="3113532"/>
+            <a:off x="566928" y="3118104"/>
             <a:ext cx="9555480" cy="274320"/>
           </a:xfrm>
           <a:prstGeom prst="rect">
@@ -39033,7 +39160,7 @@
                 </a:solidFill>
                 <a:latin typeface="맑은 고딕"/>
               </a:rPr>
-              <a:t>골드는 네 갈래로 들어오고, 전부 유인이 붙어 있다</a:t>
+              <a:t>골드 수입 구조</a:t>
             </a:r>
           </a:p>
         </p:txBody>
@@ -39085,7 +39212,7 @@
         </p:nvSpPr>
         <p:spPr>
           <a:xfrm>
-            <a:off x="566928" y="1463039"/>
+            <a:off x="566928" y="1467612"/>
             <a:ext cx="9555480" cy="10972"/>
           </a:xfrm>
           <a:prstGeom prst="rect">
@@ -39130,7 +39257,7 @@
           <p:nvPr/>
         </p:nvGraphicFramePr>
         <p:xfrm>
-          <a:off x="566928" y="1664207"/>
+          <a:off x="566928" y="1668780"/>
           <a:ext cx="9555478" cy="1485900"/>
         </p:xfrm>
         <a:graphic>
@@ -39571,7 +39698,7 @@
         </p:nvSpPr>
         <p:spPr>
           <a:xfrm>
-            <a:off x="566928" y="3241548"/>
+            <a:off x="566928" y="3246120"/>
             <a:ext cx="9555480" cy="274320"/>
           </a:xfrm>
           <a:prstGeom prst="rect">
@@ -39611,7 +39738,7 @@
           <p:nvPr/>
         </p:nvGraphicFramePr>
         <p:xfrm>
-          <a:off x="566928" y="3602736"/>
+          <a:off x="566928" y="3607308"/>
           <a:ext cx="9555472" cy="594360"/>
         </p:xfrm>
         <a:graphic>
@@ -40078,7 +40205,7 @@
         </p:nvSpPr>
         <p:spPr>
           <a:xfrm>
-            <a:off x="566928" y="4288536"/>
+            <a:off x="566928" y="4293108"/>
             <a:ext cx="9555480" cy="832103"/>
           </a:xfrm>
           <a:prstGeom prst="rect">
@@ -40292,7 +40419,7 @@
                 </a:solidFill>
                 <a:latin typeface="맑은 고딕"/>
               </a:rPr>
-              <a:t>희귀가 뜻을 갖게 하는 표</a:t>
+              <a:t>등급별 등장 가중치</a:t>
             </a:r>
           </a:p>
         </p:txBody>
@@ -40331,7 +40458,23 @@
                 </a:solidFill>
                 <a:latin typeface="맑은 고딕"/>
               </a:rPr>
-              <a:t>전에는 매대가 균등 추첨이라 14골드 희귀가 4골드 흔함과 같은 확률로 떴다. 「희귀」라는 말이 게임 안에서 아무 뜻이 없었다는 뜻이다.</a:t>
+              <a:t>전에는 매대가 균등 추첨이라 14골드 희귀가 4골드 흔함과 같은 확률로 떴다. 「희귀」라는 말이 게임 안에서 아무 뜻이</a:t>
+            </a:r>
+          </a:p>
+          <a:p>
+            <a:pPr>
+              <a:lnSpc>
+                <a:spcPct val="128000"/>
+              </a:lnSpc>
+            </a:pPr>
+            <a:r>
+              <a:rPr sz="1150" b="0">
+                <a:solidFill>
+                  <a:srgbClr val="3D394A"/>
+                </a:solidFill>
+                <a:latin typeface="맑은 고딕"/>
+              </a:rPr>
+              <a:t>없었다는 뜻이다.</a:t>
             </a:r>
           </a:p>
         </p:txBody>
@@ -40344,7 +40487,7 @@
         </p:nvSpPr>
         <p:spPr>
           <a:xfrm>
-            <a:off x="566928" y="1463039"/>
+            <a:off x="566928" y="1691639"/>
             <a:ext cx="9555480" cy="10972"/>
           </a:xfrm>
           <a:prstGeom prst="rect">
@@ -40389,7 +40532,7 @@
           <p:nvPr/>
         </p:nvGraphicFramePr>
         <p:xfrm>
-          <a:off x="566928" y="1664207"/>
+          <a:off x="566928" y="1892807"/>
           <a:ext cx="9555479" cy="1188720"/>
         </p:xfrm>
         <a:graphic>
@@ -40747,7 +40890,7 @@
         </p:nvSpPr>
         <p:spPr>
           <a:xfrm>
-            <a:off x="566928" y="2944368"/>
+            <a:off x="566928" y="3172968"/>
             <a:ext cx="9555480" cy="274320"/>
           </a:xfrm>
           <a:prstGeom prst="rect">
@@ -40965,7 +41108,7 @@
                 </a:solidFill>
                 <a:latin typeface="맑은 고딕"/>
               </a:rPr>
-              <a:t>개조는 판이 읽는 값을 바꾼다</a:t>
+              <a:t>보드 개조</a:t>
             </a:r>
           </a:p>
         </p:txBody>
@@ -41017,7 +41160,7 @@
         </p:nvSpPr>
         <p:spPr>
           <a:xfrm>
-            <a:off x="566928" y="1463039"/>
+            <a:off x="566928" y="1467612"/>
             <a:ext cx="9555480" cy="10972"/>
           </a:xfrm>
           <a:prstGeom prst="rect">
@@ -41062,7 +41205,7 @@
           <p:nvPr/>
         </p:nvGraphicFramePr>
         <p:xfrm>
-          <a:off x="566928" y="1664207"/>
+          <a:off x="566928" y="1668780"/>
           <a:ext cx="9555478" cy="2674620"/>
         </p:xfrm>
         <a:graphic>
@@ -41835,7 +41978,7 @@
         </p:nvSpPr>
         <p:spPr>
           <a:xfrm>
-            <a:off x="566928" y="4430268"/>
+            <a:off x="566928" y="4434840"/>
             <a:ext cx="9555480" cy="274320"/>
           </a:xfrm>
           <a:prstGeom prst="rect">
@@ -42053,7 +42196,7 @@
                 </a:solidFill>
                 <a:latin typeface="맑은 고딕"/>
               </a:rPr>
-              <a:t>다트 다섯은 던지는 감각을 바꾼다</a:t>
+              <a:t>다트와 탄창</a:t>
             </a:r>
           </a:p>
         </p:txBody>
@@ -42092,7 +42235,23 @@
                 </a:solidFill>
                 <a:latin typeface="맑은 고딕"/>
               </a:rPr>
-              <a:t>탄창 여섯 발을 어떤 자루로 채울지가 세 번째 성장 축이다. 한 발마다 어느 자루를 쓸지 고르므로, 구성 자체가 순서 설계가 된다.</a:t>
+              <a:t>탄창 여섯 발을 어떤 자루로 채울지가 세 번째 성장 축이다. 한 발마다 어느 자루를 쓸지 고르므로, 구성 자체가 순서</a:t>
+            </a:r>
+          </a:p>
+          <a:p>
+            <a:pPr>
+              <a:lnSpc>
+                <a:spcPct val="128000"/>
+              </a:lnSpc>
+            </a:pPr>
+            <a:r>
+              <a:rPr sz="1150" b="0">
+                <a:solidFill>
+                  <a:srgbClr val="3D394A"/>
+                </a:solidFill>
+                <a:latin typeface="맑은 고딕"/>
+              </a:rPr>
+              <a:t>설계가 된다.</a:t>
             </a:r>
           </a:p>
         </p:txBody>
@@ -42105,7 +42264,7 @@
         </p:nvSpPr>
         <p:spPr>
           <a:xfrm>
-            <a:off x="566928" y="1463039"/>
+            <a:off x="566928" y="1691639"/>
             <a:ext cx="9555480" cy="10972"/>
           </a:xfrm>
           <a:prstGeom prst="rect">
@@ -42150,7 +42309,7 @@
           <p:nvPr/>
         </p:nvGraphicFramePr>
         <p:xfrm>
-          <a:off x="566928" y="1664207"/>
+          <a:off x="566928" y="1892807"/>
           <a:ext cx="9555478" cy="1783080"/>
         </p:xfrm>
         <a:graphic>
@@ -43000,7 +43159,7 @@
         </p:nvSpPr>
         <p:spPr>
           <a:xfrm>
-            <a:off x="566928" y="3538728"/>
+            <a:off x="566928" y="3767327"/>
             <a:ext cx="9555480" cy="274320"/>
           </a:xfrm>
           <a:prstGeom prst="rect">
@@ -43064,7 +43223,7 @@
                 </a:solidFill>
                 <a:latin typeface="맑은 고딕"/>
               </a:rPr>
-              <a:t>탄창은 벽에 꽂힌 여섯 자루다. 남은 다트를 목록이 아니라 물건으로 보여준다. 라운드가 시작되면 오른쪽에서 날아와 벽에 꽂히고, 던진 것만</a:t>
+              <a:t>탄창은 벽에 꽂힌 여섯 자루다. 남은 다트를 물건으로 보여준다. 라운드가 시작되면 오른쪽에서 날아와 벽에 꽂히고, 던진 것만 사라진다.</a:t>
             </a:r>
           </a:p>
           <a:p>
@@ -43083,7 +43242,7 @@
                 </a:solidFill>
                 <a:latin typeface="맑은 고딕"/>
               </a:rPr>
-              <a:t>사라진다. 자루가 빠져도 남은 것이 자리를 다시 맞추지 않는다 — 한 칸이 비는 것이 맞다.</a:t>
+              <a:t>자루가 빠져도 남은 것이 자리를 다시 맞추지 않는다. 빈 칸은 그대로 둔다.</a:t>
             </a:r>
           </a:p>
         </p:txBody>
@@ -43218,7 +43377,7 @@
                 </a:solidFill>
                 <a:latin typeface="맑은 고딕"/>
               </a:rPr>
-              <a:t>아직 안 채운 설계 격자</a:t>
+              <a:t>설계 격자의 빈칸</a:t>
             </a:r>
           </a:p>
         </p:txBody>
@@ -43270,7 +43429,7 @@
         </p:nvSpPr>
         <p:spPr>
           <a:xfrm>
-            <a:off x="566928" y="1463039"/>
+            <a:off x="566928" y="1467612"/>
             <a:ext cx="9555480" cy="10972"/>
           </a:xfrm>
           <a:prstGeom prst="rect">
@@ -43315,7 +43474,7 @@
           <p:nvPr/>
         </p:nvGraphicFramePr>
         <p:xfrm>
-          <a:off x="566928" y="1664207"/>
+          <a:off x="566928" y="1668780"/>
           <a:ext cx="9555479" cy="1485900"/>
         </p:xfrm>
         <a:graphic>
@@ -43620,7 +43779,7 @@
         </p:nvSpPr>
         <p:spPr>
           <a:xfrm>
-            <a:off x="566928" y="3241548"/>
+            <a:off x="566928" y="3246120"/>
             <a:ext cx="9555480" cy="274320"/>
           </a:xfrm>
           <a:prstGeom prst="rect">
@@ -43852,7 +44011,7 @@
         </p:nvSpPr>
         <p:spPr>
           <a:xfrm>
-            <a:off x="566928" y="1463039"/>
+            <a:off x="566928" y="1467612"/>
             <a:ext cx="9555480" cy="10972"/>
           </a:xfrm>
           <a:prstGeom prst="rect">
@@ -43897,7 +44056,7 @@
           <p:nvPr/>
         </p:nvGraphicFramePr>
         <p:xfrm>
-          <a:off x="566928" y="1664207"/>
+          <a:off x="566928" y="1668780"/>
           <a:ext cx="9555478" cy="3264408"/>
         </p:xfrm>
         <a:graphic>
@@ -43907,10 +44066,10 @@
                 <a:tableStyleId>{2D5ABB26-0587-4C30-8999-92F81FD0307C}</a:tableStyleId>
               </a:tblPr>
               <a:tblGrid>
-                <a:gridCol w="1171953"/>
-                <a:gridCol w="657315"/>
-                <a:gridCol w="4557596"/>
-                <a:gridCol w="3168614"/>
+                <a:gridCol w="1183476"/>
+                <a:gridCol w="657487"/>
+                <a:gridCol w="4602410"/>
+                <a:gridCol w="3112105"/>
               </a:tblGrid>
               <a:tr h="297180">
                 <a:tc>
@@ -44671,7 +44830,7 @@
                           </a:solidFill>
                           <a:latin typeface="맑은 고딕"/>
                         </a:rPr>
-                        <a:t>사람 플레이 로그를 남긴다 — 라운드별 클리어율, 사망 분포, 실제 조준 분포</a:t>
+                        <a:t>사람 플레이 로그를 남긴다. 라운드별 클리어율, 사망 분포, 실제 조준 분포</a:t>
                       </a:r>
                     </a:p>
                   </a:txBody>
@@ -44816,7 +44975,7 @@
                 </a:solidFill>
                 <a:latin typeface="맑은 고딕"/>
               </a:rPr>
-              <a:t>이미지 파일이 한 장도 없다</a:t>
+              <a:t>아트 · 코드 렌더링</a:t>
             </a:r>
           </a:p>
         </p:txBody>
@@ -44855,7 +45014,7 @@
                 </a:solidFill>
                 <a:latin typeface="맑은 고딕"/>
               </a:rPr>
-              <a:t>보드 · 칩 · 다트 · 카지노 테이블. 글자를 뺀 모든 것이 코드로 그려진다. 씬은 노드 하나이고, 그리는 함수 하나가 화면 전체를 매</a:t>
+              <a:t>보드 · 칩 · 다트 · 카지노 테이블. 글자를 뺀 모든 것이 코드로 그려진다. 씬은 노드 하나이고, 그리는 함수 하나가 화면</a:t>
             </a:r>
           </a:p>
           <a:p>
@@ -44871,7 +45030,7 @@
                 </a:solidFill>
                 <a:latin typeface="맑은 고딕"/>
               </a:rPr>
-              <a:t>프레임 다시 그린다.</a:t>
+              <a:t>전체를 매 프레임 다시 그린다.</a:t>
             </a:r>
           </a:p>
         </p:txBody>
@@ -44884,7 +45043,7 @@
         </p:nvSpPr>
         <p:spPr>
           <a:xfrm>
-            <a:off x="566928" y="1682495"/>
+            <a:off x="566928" y="1691639"/>
             <a:ext cx="9555480" cy="10972"/>
           </a:xfrm>
           <a:prstGeom prst="rect">
@@ -44928,7 +45087,7 @@
         </p:nvSpPr>
         <p:spPr>
           <a:xfrm>
-            <a:off x="566928" y="1883664"/>
+            <a:off x="566928" y="1892807"/>
             <a:ext cx="9555480" cy="274320"/>
           </a:xfrm>
           <a:prstGeom prst="rect">
@@ -45006,7 +45165,7 @@
           <p:nvPr/>
         </p:nvGraphicFramePr>
         <p:xfrm>
-          <a:off x="566928" y="2766060"/>
+          <a:off x="566928" y="2775203"/>
           <a:ext cx="9555476" cy="594360"/>
         </p:xfrm>
         <a:graphic>
@@ -45418,7 +45577,7 @@
         </p:nvSpPr>
         <p:spPr>
           <a:xfrm>
-            <a:off x="566928" y="3451860"/>
+            <a:off x="566928" y="3461003"/>
             <a:ext cx="9555480" cy="274320"/>
           </a:xfrm>
           <a:prstGeom prst="rect">
@@ -45617,7 +45776,7 @@
                 </a:solidFill>
                 <a:latin typeface="맑은 고딕"/>
               </a:rPr>
-              <a:t>소리도 파일이 없다</a:t>
+              <a:t>사운드 · 절차적 합성</a:t>
             </a:r>
           </a:p>
         </p:txBody>
@@ -45669,7 +45828,7 @@
         </p:nvSpPr>
         <p:spPr>
           <a:xfrm>
-            <a:off x="566928" y="1463039"/>
+            <a:off x="566928" y="1467612"/>
             <a:ext cx="9555480" cy="10972"/>
           </a:xfrm>
           <a:prstGeom prst="rect">
@@ -45713,7 +45872,7 @@
         </p:nvSpPr>
         <p:spPr>
           <a:xfrm>
-            <a:off x="566928" y="1664207"/>
+            <a:off x="566928" y="1668780"/>
             <a:ext cx="9555480" cy="274320"/>
           </a:xfrm>
           <a:prstGeom prst="rect">
@@ -45772,7 +45931,7 @@
           <p:nvPr/>
         </p:nvGraphicFramePr>
         <p:xfrm>
-          <a:off x="566928" y="2240279"/>
+          <a:off x="566928" y="2244852"/>
           <a:ext cx="9555479" cy="1485900"/>
         </p:xfrm>
         <a:graphic>
@@ -46077,7 +46236,7 @@
         </p:nvSpPr>
         <p:spPr>
           <a:xfrm>
-            <a:off x="566928" y="3817619"/>
+            <a:off x="566928" y="3822191"/>
             <a:ext cx="9555480" cy="274320"/>
           </a:xfrm>
           <a:prstGeom prst="rect">
@@ -47561,7 +47720,7 @@
                 </a:solidFill>
                 <a:latin typeface="맑은 고딕"/>
               </a:rPr>
-              <a:t>개발 궤적 — 1주차 컨셉·조준·판정·득점 연출 → 2주차 칩과 상점·클리어 정산·스테이지 선택 → 3주차 상점을 물리 테이블로·인게임 UI·탄창</a:t>
+              <a:t>개발 궤적. 1주차 컨셉·조준·판정·득점 연출 → 2주차 칩과 상점·클리어 정산·스테이지 선택 → 3주차 상점을 물리 테이블로·인게임 UI·탄창 →</a:t>
             </a:r>
           </a:p>
           <a:p>
@@ -47580,7 +47739,7 @@
                 </a:solidFill>
                 <a:latin typeface="맑은 고딕"/>
               </a:rPr>
-              <a:t>→ 4주차 아이콘 체계·데이터 테이블·기획서</a:t>
+              <a:t>4주차 아이콘 체계·데이터 테이블·기획서</a:t>
             </a:r>
           </a:p>
         </p:txBody>
@@ -47715,7 +47874,7 @@
                 </a:solidFill>
                 <a:latin typeface="맑은 고딕"/>
               </a:rPr>
-              <a:t>점수는 칩 × 배수다</a:t>
+              <a:t>점수 계산</a:t>
             </a:r>
           </a:p>
         </p:txBody>
@@ -47767,7 +47926,7 @@
         </p:nvSpPr>
         <p:spPr>
           <a:xfrm>
-            <a:off x="566928" y="1463039"/>
+            <a:off x="566928" y="1467612"/>
             <a:ext cx="9555480" cy="10972"/>
           </a:xfrm>
           <a:prstGeom prst="rect">
@@ -47811,7 +47970,7 @@
         </p:nvSpPr>
         <p:spPr>
           <a:xfrm>
-            <a:off x="886968" y="1664207"/>
+            <a:off x="886968" y="1668780"/>
             <a:ext cx="8915400" cy="274320"/>
           </a:xfrm>
           <a:prstGeom prst="rect">
@@ -47914,7 +48073,7 @@
         </p:nvSpPr>
         <p:spPr>
           <a:xfrm>
-            <a:off x="566928" y="2532887"/>
+            <a:off x="566928" y="2537460"/>
             <a:ext cx="9555480" cy="274320"/>
           </a:xfrm>
           <a:prstGeom prst="rect">
@@ -47940,7 +48099,7 @@
                 </a:solidFill>
                 <a:latin typeface="맑은 고딕"/>
               </a:rPr>
-              <a:t>예시 — 20번 칸 트리플에 꽂힌다. 칸 20이 칩 20을, 트리플 링이 배수 3을 준다. 여기에 칩 「삼중고」(트리플 명중 시 배수 +4)가 붙으면</a:t>
+              <a:t>예시. 20번 칸 트리플에 꽂힌다. 칸 20이 칩 20을, 트리플 링이 배수 3을 준다. 여기에 칩 「삼중고」(트리플 명중 시 배수 +4)가 붙으면</a:t>
             </a:r>
           </a:p>
           <a:p>
@@ -47992,7 +48151,7 @@
           <p:nvPr/>
         </p:nvGraphicFramePr>
         <p:xfrm>
-          <a:off x="566928" y="3415283"/>
+          <a:off x="566928" y="3419856"/>
           <a:ext cx="9555479" cy="891540"/>
         </p:xfrm>
         <a:graphic>
@@ -48185,8 +48344,8 @@
         </p:nvSpPr>
         <p:spPr>
           <a:xfrm>
-            <a:off x="566928" y="4398263"/>
-            <a:ext cx="9555480" cy="832103"/>
+            <a:off x="566928" y="4402836"/>
+            <a:ext cx="9555480" cy="617220"/>
           </a:xfrm>
           <a:prstGeom prst="rect">
             <a:avLst/>
@@ -48248,23 +48407,7 @@
                 </a:solidFill>
                 <a:latin typeface="맑은 고딕"/>
               </a:rPr>
-              <a:t>덧셈이 아니라 곱셈으로 묶은 것은, 두 축 중 하나만 파는 플레이를 구조로 막기 위해서다. 더하기였다면 조준을 포기하고 칩만 모으는</a:t>
-            </a:r>
-          </a:p>
-          <a:p>
-            <a:pPr algn="l">
-              <a:lnSpc>
-                <a:spcPct val="132000"/>
-              </a:lnSpc>
-            </a:pPr>
-            <a:r>
-              <a:rPr sz="1050" b="0">
-                <a:solidFill>
-                  <a:srgbClr val="1A1822"/>
-                </a:solidFill>
-                <a:latin typeface="맑은 고딕"/>
-              </a:rPr>
-              <a:t>길이 열린다.</a:t>
+              <a:t>두 수를 곱한 이유는 하나다. 한 축만 파는 플레이를 막고 싶었다. 더하기였다면 조준을 포기하고 칩만 모으는 길이 열린다.</a:t>
             </a:r>
           </a:p>
         </p:txBody>
@@ -48438,7 +48581,7 @@
                 </a:solidFill>
                 <a:latin typeface="맑은 고딕"/>
               </a:rPr>
-              <a:t>여덟 라운드가 끝까지 돌고, 밸런스 수치는 CSV 여덟 장에서 나온다. 발동률과 기여도는 36만 발을 실제 판정 함수에 통과시켜 쟀다. 아직</a:t>
+              <a:t>여덟 라운드가 끝까지 돌고, 밸런스 수치는 CSV 여덟 장에서 나온다. 발동률과 기여도는 36만 발을 실제 판정 함수에</a:t>
             </a:r>
           </a:p>
           <a:p>
@@ -48454,7 +48597,7 @@
                 </a:solidFill>
                 <a:latin typeface="맑은 고딕"/>
               </a:rPr>
-              <a:t>사람이 플레이한 기록은 0건이다. 다음 작업은 그 기록을 남기는 것이다.</a:t>
+              <a:t>통과시켜 쟀다. 아직 사람이 플레이한 기록은 0건이다. 다음 작업은 그 기록을 남기는 것이다.</a:t>
             </a:r>
           </a:p>
         </p:txBody>
@@ -48467,7 +48610,7 @@
         </p:nvSpPr>
         <p:spPr>
           <a:xfrm>
-            <a:off x="566928" y="1682495"/>
+            <a:off x="566928" y="1691639"/>
             <a:ext cx="9555480" cy="10972"/>
           </a:xfrm>
           <a:prstGeom prst="rect">
@@ -48511,7 +48654,7 @@
         </p:nvSpPr>
         <p:spPr>
           <a:xfrm>
-            <a:off x="566928" y="1883664"/>
+            <a:off x="566928" y="1892807"/>
             <a:ext cx="9555480" cy="274320"/>
           </a:xfrm>
           <a:prstGeom prst="rect">
@@ -48537,7 +48680,7 @@
                 </a:solidFill>
                 <a:latin typeface="맑은 고딕"/>
               </a:rPr>
-              <a:t>먼저 할 것 — 근거를 실측으로 옮긴다</a:t>
+              <a:t>먼저 할 것. 근거를 실측으로 옮긴다</a:t>
             </a:r>
           </a:p>
         </p:txBody>
@@ -48551,7 +48694,7 @@
           <p:nvPr/>
         </p:nvGraphicFramePr>
         <p:xfrm>
-          <a:off x="566928" y="2244852"/>
+          <a:off x="566928" y="2253996"/>
           <a:ext cx="9555479" cy="1485900"/>
         </p:xfrm>
         <a:graphic>
@@ -48856,7 +48999,7 @@
         </p:nvSpPr>
         <p:spPr>
           <a:xfrm>
-            <a:off x="566928" y="3822191"/>
+            <a:off x="566928" y="3831335"/>
             <a:ext cx="9555480" cy="274320"/>
           </a:xfrm>
           <a:prstGeom prst="rect">
@@ -48882,7 +49025,7 @@
                 </a:solidFill>
                 <a:latin typeface="맑은 고딕"/>
               </a:rPr>
-              <a:t>나중에 할 것 — 아직 안 정한 것</a:t>
+              <a:t>나중에 할 것. 아직 안 정했다</a:t>
             </a:r>
           </a:p>
         </p:txBody>
@@ -48896,7 +49039,7 @@
           <p:nvPr/>
         </p:nvGraphicFramePr>
         <p:xfrm>
-          <a:off x="566928" y="4183379"/>
+          <a:off x="566928" y="4192523"/>
           <a:ext cx="9555479" cy="1485900"/>
         </p:xfrm>
         <a:graphic>
@@ -49201,7 +49344,7 @@
         </p:nvSpPr>
         <p:spPr>
           <a:xfrm>
-            <a:off x="566928" y="5760719"/>
+            <a:off x="566928" y="5769863"/>
             <a:ext cx="9555480" cy="274320"/>
           </a:xfrm>
           <a:prstGeom prst="rect">
@@ -49362,7 +49505,7 @@
                 </a:solidFill>
                 <a:latin typeface="맑은 고딕"/>
               </a:rPr>
-              <a:t>배수는 숫자가 아니라 면적이다</a:t>
+              <a:t>배수가 면적일 때 생기는 일</a:t>
             </a:r>
           </a:p>
         </p:txBody>
@@ -49401,7 +49544,7 @@
                 </a:solidFill>
                 <a:latin typeface="맑은 고딕"/>
               </a:rPr>
-              <a:t>카드 게임에서 배수는 카드에 적힌 수다. 다트판에서 배수는 판 위의 띠이고, 띠는 넓이를 가진다. 이 차이가 이 게임이 다트 위에 서는</a:t>
+              <a:t>카드 게임에서 배수는 카드에 적힌 수다. 다트판에서 배수는 판 위의 띠이고, 띠는 넓이를 가진다. 이 차이가 이 게임이</a:t>
             </a:r>
           </a:p>
           <a:p>
@@ -49417,7 +49560,7 @@
                 </a:solidFill>
                 <a:latin typeface="맑은 고딕"/>
               </a:rPr>
-              <a:t>유일한 이유다.</a:t>
+              <a:t>다트 위에 서는 유일한 이유다.</a:t>
             </a:r>
           </a:p>
         </p:txBody>
@@ -49430,7 +49573,7 @@
         </p:nvSpPr>
         <p:spPr>
           <a:xfrm>
-            <a:off x="566928" y="1682495"/>
+            <a:off x="566928" y="1691639"/>
             <a:ext cx="9555480" cy="10972"/>
           </a:xfrm>
           <a:prstGeom prst="rect">
@@ -49475,7 +49618,7 @@
           <p:nvPr/>
         </p:nvGraphicFramePr>
         <p:xfrm>
-          <a:off x="566928" y="1883664"/>
+          <a:off x="566928" y="1892807"/>
           <a:ext cx="9555478" cy="1188720"/>
         </p:xfrm>
         <a:graphic>
@@ -49833,7 +49976,7 @@
         </p:nvSpPr>
         <p:spPr>
           <a:xfrm>
-            <a:off x="566928" y="3163824"/>
+            <a:off x="566928" y="3172968"/>
             <a:ext cx="9555480" cy="274320"/>
           </a:xfrm>
           <a:prstGeom prst="rect">
@@ -49878,7 +50021,7 @@
                 </a:solidFill>
                 <a:latin typeface="맑은 고딕"/>
               </a:rPr>
-              <a:t>- 개조 「속살」 한 장이 트리플 띠를 0.06 넓히면, 칩을 한 장도 안 사고 배수 3의 기대값이 절반 가까이 오른다. 카드 게임에는 이 축이</a:t>
+              <a:t>· 개조 「속살」 한 장이 트리플 띠를 0.06 넓히면, 칩을 한 장도 안 사고 배수 3의 기대값이 절반 가까이 오른다. 카드 게임에는 이 축이</a:t>
             </a:r>
           </a:p>
           <a:p>
@@ -49897,7 +50040,7 @@
                 </a:solidFill>
                 <a:latin typeface="맑은 고딕"/>
               </a:rPr>
-              <a:t>없다. - 조준이 배수에 직접 닿는다. 같은 칩 다섯 장이라도 어디를 노리느냐로 값이 달라진다. - 빗나감이 설계 재료가 된다. 판 밖은 배수</a:t>
+              <a:t>없다.</a:t>
             </a:r>
           </a:p>
           <a:p>
@@ -49916,7 +50059,26 @@
                 </a:solidFill>
                 <a:latin typeface="맑은 고딕"/>
               </a:rPr>
-              <a:t>0이 아니라 「빗나감」이라는 조건이다.</a:t>
+              <a:t>· 조준이 배수에 직접 닿는다. 같은 칩 다섯 장이라도 어디를 노리느냐로 값이 달라진다.</a:t>
+            </a:r>
+          </a:p>
+          <a:p>
+            <a:pPr>
+              <a:lnSpc>
+                <a:spcPct val="128000"/>
+              </a:lnSpc>
+              <a:spcBef>
+                <a:spcPts val="600"/>
+              </a:spcBef>
+            </a:pPr>
+            <a:r>
+              <a:rPr sz="1100" b="0">
+                <a:solidFill>
+                  <a:srgbClr val="3D394A"/>
+                </a:solidFill>
+                <a:latin typeface="맑은 고딕"/>
+              </a:rPr>
+              <a:t>· 빗나감이 설계 재료가 된다. 판 밖은 배수 0으로 처리하지 않고 「빗나감」이라는 조건으로 잡았다.</a:t>
             </a:r>
           </a:p>
         </p:txBody>
@@ -49929,7 +50091,7 @@
         </p:nvSpPr>
         <p:spPr>
           <a:xfrm>
-            <a:off x="566928" y="4261104"/>
+            <a:off x="566928" y="4668012"/>
             <a:ext cx="9555480" cy="617220"/>
           </a:xfrm>
           <a:prstGeom prst="rect">
@@ -50166,7 +50328,7 @@
                 </a:solidFill>
                 <a:latin typeface="맑은 고딕"/>
               </a:rPr>
-              <a:t>이 게임은 발라트로의 정산 구조를 명시적으로 참조한다. 감추는 것보다 무엇을 가져왔고 어디서 갈라지는지 적는 편이 설계를 설명하는 데</a:t>
+              <a:t>이 게임은 발라트로의 정산 구조를 명시적으로 참조한다. 감추는 것보다 무엇을 가져왔고 어디서 갈라지는지 적는 편이</a:t>
             </a:r>
           </a:p>
           <a:p>
@@ -50182,7 +50344,7 @@
                 </a:solidFill>
                 <a:latin typeface="맑은 고딕"/>
               </a:rPr>
-              <a:t>낫다.</a:t>
+              <a:t>설계를 설명하는 데 낫다.</a:t>
             </a:r>
           </a:p>
         </p:txBody>
@@ -50195,7 +50357,7 @@
         </p:nvSpPr>
         <p:spPr>
           <a:xfrm>
-            <a:off x="566928" y="1682495"/>
+            <a:off x="566928" y="1691639"/>
             <a:ext cx="9555480" cy="10972"/>
           </a:xfrm>
           <a:prstGeom prst="rect">
@@ -50240,7 +50402,7 @@
           <p:nvPr/>
         </p:nvGraphicFramePr>
         <p:xfrm>
-          <a:off x="566928" y="1883664"/>
+          <a:off x="566928" y="1892807"/>
           <a:ext cx="9555479" cy="1655064"/>
         </p:xfrm>
         <a:graphic>
@@ -50492,7 +50654,7 @@
                           </a:solidFill>
                           <a:latin typeface="맑은 고딕"/>
                         </a:rPr>
-                        <a:t>501도 크리켓도 없다. 규칙이 아니라 판의 형태만 빌렸다</a:t>
+                        <a:t>501도 크리켓도 없다. 빌린 것은 판의 형태뿐이다</a:t>
                       </a:r>
                     </a:p>
                   </a:txBody>
@@ -50681,7 +50843,7 @@
         </p:nvSpPr>
         <p:spPr>
           <a:xfrm>
-            <a:off x="566928" y="3630168"/>
+            <a:off x="566928" y="3639312"/>
             <a:ext cx="9555480" cy="274320"/>
           </a:xfrm>
           <a:prstGeom prst="rect">
@@ -50726,7 +50888,7 @@
                 </a:solidFill>
                 <a:latin typeface="맑은 고딕"/>
               </a:rPr>
-              <a:t>1. 조준과 착탄에 난수가 0이다. 게이지는 주기 1.0의 삼각파이고, 멈춘 시점이 그대로 착탄점이다. 2. 밸런스 통화가 기하다.</a:t>
+              <a:t>· 조준과 착탄에 난수가 0이다. 게이지는 주기 1.0의 삼각파이고, 멈춘 시점이 그대로 착탄점이다.</a:t>
             </a:r>
           </a:p>
           <a:p>
@@ -50745,7 +50907,7 @@
                 </a:solidFill>
                 <a:latin typeface="맑은 고딕"/>
               </a:rPr>
-              <a:t>판값(board_val)이 균등 조준 다트당 기대 점수를 면적 적분 하나로 낸다. 칩·개조·다트가 「다트당 몇 점」이라는 같은 자로 재진다. 3.</a:t>
+              <a:t>· 밸런스 통화가 기하다. 판값(board_val)이 균등 조준 다트당 기대 점수를 면적 적분 하나로 낸다. 칩·개조·다트가 「다트당 몇 점」이라는</a:t>
             </a:r>
           </a:p>
           <a:p>
@@ -50764,7 +50926,7 @@
                 </a:solidFill>
                 <a:latin typeface="맑은 고딕"/>
               </a:rPr>
-              <a:t>슬롯이 아니라 판값이 조합을 막는다. 칩은 5칸이 상한이지만 개조는 슬롯을 안 먹는다. 대신 판값이 기본의 1.50배를 넘기는 개조는 매대에</a:t>
+              <a:t>같은 자로 재진다.</a:t>
             </a:r>
           </a:p>
           <a:p>
@@ -50783,7 +50945,26 @@
                 </a:solidFill>
                 <a:latin typeface="맑은 고딕"/>
               </a:rPr>
-              <a:t>아예 안 뜬다.</a:t>
+              <a:t>· 조합을 막는 것은 슬롯이 아니다. 판값이다. 칩은 5칸이 상한이지만 개조는 슬롯을 안 먹는다. 대신 판값이 기본의 1.50배를 넘기는 개조는</a:t>
+            </a:r>
+          </a:p>
+          <a:p>
+            <a:pPr>
+              <a:lnSpc>
+                <a:spcPct val="128000"/>
+              </a:lnSpc>
+              <a:spcBef>
+                <a:spcPts val="600"/>
+              </a:spcBef>
+            </a:pPr>
+            <a:r>
+              <a:rPr sz="1100" b="0">
+                <a:solidFill>
+                  <a:srgbClr val="3D394A"/>
+                </a:solidFill>
+                <a:latin typeface="맑은 고딕"/>
+              </a:rPr>
+              <a:t>매대에 아예 안 뜬다.</a:t>
             </a:r>
           </a:p>
         </p:txBody>
@@ -51249,7 +51430,7 @@
         </p:nvGraphicFramePr>
         <p:xfrm>
           <a:off x="566928" y="3493008"/>
-          <a:ext cx="9555479" cy="1485900"/>
+          <a:ext cx="9555480" cy="1485900"/>
         </p:xfrm>
         <a:graphic>
           <a:graphicData uri="http://schemas.openxmlformats.org/drawingml/2006/table">
@@ -51258,8 +51439,8 @@
                 <a:tableStyleId>{2D5ABB26-0587-4C30-8999-92F81FD0307C}</a:tableStyleId>
               </a:tblPr>
               <a:tblGrid>
-                <a:gridCol w="2774171"/>
-                <a:gridCol w="6781308"/>
+                <a:gridCol w="2548128"/>
+                <a:gridCol w="7007352"/>
               </a:tblGrid>
               <a:tr h="297180">
                 <a:tc>
@@ -51391,7 +51572,7 @@
                           </a:solidFill>
                           <a:latin typeface="맑은 고딕"/>
                         </a:rPr>
-                        <a:t>"빗나간 건 판 탓이 아니라 내 탓이다"</a:t>
+                        <a:t>"빗나간 건 내 탓이다"</a:t>
                       </a:r>
                     </a:p>
                   </a:txBody>
@@ -51579,7 +51760,7 @@
                 </a:solidFill>
                 <a:latin typeface="맑은 고딕"/>
               </a:rPr>
-              <a:t>전제하는 리스크 — 조준 실력을 요구하는 덱빌더는 두 유저층의 교집합이라 좁다. 이 리스크를 줄이는 손잡이가 「난수 없는 조준」이다.</a:t>
+              <a:t>전제하는 리스크. 조준 실력을 요구하는 덱빌더는 두 유저층의 교집합이라 좁다. 이 리스크를 줄이는 손잡이가 「난수 없는 조준」이다.</a:t>
             </a:r>
           </a:p>
           <a:p>
@@ -51785,7 +51966,7 @@
         </p:nvSpPr>
         <p:spPr>
           <a:xfrm>
-            <a:off x="566928" y="1463039"/>
+            <a:off x="566928" y="1467612"/>
             <a:ext cx="9555480" cy="10972"/>
           </a:xfrm>
           <a:prstGeom prst="rect">
@@ -51830,7 +52011,7 @@
           <p:nvPr/>
         </p:nvGraphicFramePr>
         <p:xfrm>
-          <a:off x="566928" y="1664207"/>
+          <a:off x="566928" y="1668780"/>
           <a:ext cx="9555479" cy="1527048"/>
         </p:xfrm>
         <a:graphic>
@@ -52188,7 +52369,7 @@
         </p:nvSpPr>
         <p:spPr>
           <a:xfrm>
-            <a:off x="566928" y="3282696"/>
+            <a:off x="566928" y="3287268"/>
             <a:ext cx="9555480" cy="274320"/>
           </a:xfrm>
           <a:prstGeom prst="rect">

--- a/docs/기획서.pptx
+++ b/docs/기획서.pptx
@@ -6314,7 +6314,7 @@
                 </a:solidFill>
                 <a:latin typeface="맑은 고딕"/>
               </a:rPr>
-              <a:t>무개조 판의 다트당 기대 점수는 9.59점이다. 오른쪽 열은 그 기준선의 몇 배가 필요한가를 적었다.</a:t>
+              <a:t>무개조 판의 다트당 기대 점수는 9.59점이다. 오른쪽 열이 그 기준선의 몇 배다.</a:t>
             </a:r>
           </a:p>
         </p:txBody>
@@ -7684,7 +7684,7 @@
                 </a:solidFill>
                 <a:latin typeface="맑은 고딕"/>
               </a:rPr>
-              <a:t>hit_info()는 착탄점 하나를 받아 칩 값과 배수를 돌려준다. 아래 순서대로 묻는다.</a:t>
+              <a:t>hit_info()는 착탄점 하나를 받아 칩 값과 배수를 돌려준다. 판정은 다섯 번 묻는다.</a:t>
             </a:r>
           </a:p>
         </p:txBody>
@@ -8504,7 +8504,7 @@
                 </a:solidFill>
                 <a:latin typeface="맑은 고딕"/>
               </a:rPr>
-              <a:t>띠와 칸의 넓이를 수치로 적은 표다. 개조와 제약이 바꾸는 것이 오른쪽 두 열이다.</a:t>
+              <a:t>개조와 제약이 바꾸는 것은 오른쪽 두 열이다.</a:t>
             </a:r>
           </a:p>
         </p:txBody>
@@ -11948,7 +11948,7 @@
                 </a:solidFill>
                 <a:latin typeface="맑은 고딕"/>
               </a:rPr>
-              <a:t>개조가 자유롭게 판을 바꾸면 판정의 if 사슬이 전제하는 순서가 깨진다. 판을 굽는 매 단계마다 아래 부등식을 검사한다.</a:t>
+              <a:t>개조가 자유롭게 판을 바꾸면 판정의 if 사슬이 전제하는 순서가 깨진다. 판을 굽는 매 단계마다 부등식을 검사한다.</a:t>
             </a:r>
           </a:p>
         </p:txBody>
@@ -21249,7 +21249,7 @@
         <p:spPr>
           <a:xfrm>
             <a:off x="566928" y="2948940"/>
-            <a:ext cx="9555480" cy="832103"/>
+            <a:ext cx="9555480" cy="617220"/>
           </a:xfrm>
           <a:prstGeom prst="rect">
             <a:avLst/>
@@ -21311,23 +21311,7 @@
                 </a:solidFill>
                 <a:latin typeface="맑은 고딕"/>
               </a:rPr>
-              <a:t>상점을 물리 테이블로 만든 이유. 목록에서 고르면 매대가 그냥 목록이지만, 판 위에 떨어뜨리면 자리가 생긴다. 목록에서 고르는 것과</a:t>
-            </a:r>
-          </a:p>
-          <a:p>
-            <a:pPr algn="l">
-              <a:lnSpc>
-                <a:spcPct val="132000"/>
-              </a:lnSpc>
-            </a:pPr>
-            <a:r>
-              <a:rPr sz="1050" b="0">
-                <a:solidFill>
-                  <a:srgbClr val="1A1822"/>
-                </a:solidFill>
-                <a:latin typeface="맑은 고딕"/>
-              </a:rPr>
-              <a:t>판 위에서 집어 미는 것은 같은 구매가 아니다. 라운드마다 배치가 달라지는 것도 그래서 값이 있다.</a:t>
+              <a:t>목록에서 고르면 매대가 그냥 목록이다. 판 위에 떨어뜨리면 자리가 생긴다. 라운드마다 배치가 달라지는 것도 그래서 값이 있다.</a:t>
             </a:r>
           </a:p>
         </p:txBody>
@@ -26755,7 +26739,7 @@
                 </a:solidFill>
                 <a:latin typeface="맑은 고딕"/>
               </a:rPr>
-              <a:t>이 표에서 확인한 네 가지</a:t>
+              <a:t>확인한 네 가지</a:t>
             </a:r>
           </a:p>
           <a:p>
@@ -34660,7 +34644,7 @@
                 </a:solidFill>
                 <a:latin typeface="맑은 고딕"/>
               </a:rPr>
-              <a:t>세 전제가 모두 실제 플레이와 다르다. 이 표는 칩끼리 비교할 때만 쓴다. 다음 장의 시너지가 이 한계에서 출발한다.</a:t>
+              <a:t>세 전제가 모두 실제 플레이와 다르다. 이 표는 칩끼리 비교할 때만 쓴다.</a:t>
             </a:r>
           </a:p>
         </p:txBody>
@@ -37628,7 +37612,7 @@
                 </a:solidFill>
                 <a:latin typeface="맑은 고딕"/>
               </a:rPr>
-              <a:t>배타를 없애지 않고 남긴 것은, 「무엇을 같이 못 드는가」를 아는 것 자체가 이 게임의 학습 대상이기 때문이다. 다만 그 정보가 화면에</a:t>
+              <a:t>배타를 없애지 않고 남겼다. 「무엇을 같이 못 드는가」를 아는 것도 이 게임에서 배울 것이다. 다만 그 정보가 화면에 안 나온다.</a:t>
             </a:r>
           </a:p>
           <a:p>
@@ -37644,7 +37628,7 @@
                 </a:solidFill>
                 <a:latin typeface="맑은 고딕"/>
               </a:rPr>
-              <a:t>안 나와 있는 것은 알려진 문제다.</a:t>
+              <a:t>알려진 문제로 적어 뒀다.</a:t>
             </a:r>
           </a:p>
         </p:txBody>
@@ -43258,7 +43242,7 @@
                 </a:solidFill>
                 <a:latin typeface="맑은 고딕"/>
               </a:rPr>
-              <a:t>조건 19 × 효과 4 = 76칸 중 21칸이 찼다(28%). 어디가 비었는지 적어 두면 다음 칩이 빈칸에서 나온다.</a:t>
+              <a:t>조건 19 × 효과 4 = 76칸 중 21칸이 찼다(28%).</a:t>
             </a:r>
           </a:p>
         </p:txBody>
@@ -43840,7 +43824,7 @@
                 </a:solidFill>
                 <a:latin typeface="맑은 고딕"/>
               </a:rPr>
-              <a:t>지금 빌드에서 확인된 것만 적는다. 고친 척하지 않는다.</a:t>
+              <a:t>아래 여섯 건은 지금 빌드에서 실제로 확인했다.</a:t>
             </a:r>
           </a:p>
         </p:txBody>
@@ -49958,7 +49942,7 @@
                 </a:solidFill>
                 <a:latin typeface="맑은 고딕"/>
               </a:rPr>
-              <a:t>「왜 다트판인가」에 대한 답이 이 한 쪽이다. 소재를 카드나 주사위로 바꾸면 넓이 축이 통째로 빠진다.</a:t>
+              <a:t>소재를 카드나 주사위로 바꾸면 넓이 축이 통째로 빠진다.</a:t>
             </a:r>
           </a:p>
         </p:txBody>
@@ -50132,7 +50116,7 @@
                 </a:solidFill>
                 <a:latin typeface="맑은 고딕"/>
               </a:rPr>
-              <a:t>이 게임은 발라트로의 정산 구조를 참조한다. 무엇을 가져왔고 어디서 갈라지는지 아래에 적는다.</a:t>
+              <a:t>발라트로의 정산 구조를 참조했다.</a:t>
             </a:r>
           </a:p>
         </p:txBody>
@@ -51741,7 +51725,7 @@
                 </a:solidFill>
                 <a:latin typeface="맑은 고딕"/>
               </a:rPr>
-              <a:t>무엇을 재미로 삼을지 먼저 정하고, 그 셋에 보태지 않는 기능은 넣지 않았다.</a:t>
+              <a:t>재미의 축을 셋으로 먼저 정했다. 거기 보태지 않는 기능은 넣지 않았다.</a:t>
             </a:r>
           </a:p>
         </p:txBody>

--- a/docs/기획서.pptx
+++ b/docs/기획서.pptx
@@ -3965,9 +3965,9 @@
                 <a:tableStyleId>{2D5ABB26-0587-4C30-8999-92F81FD0307C}</a:tableStyleId>
               </a:tblPr>
               <a:tblGrid>
-                <a:gridCol w="1719986"/>
-                <a:gridCol w="1337767"/>
-                <a:gridCol w="6497726"/>
+                <a:gridCol w="2300393"/>
+                <a:gridCol w="1238673"/>
+                <a:gridCol w="6016413"/>
               </a:tblGrid>
               <a:tr h="297180">
                 <a:tc>
@@ -4586,7 +4586,7 @@
         </p:nvGraphicFramePr>
         <p:xfrm>
           <a:off x="566928" y="1280160"/>
-          <a:ext cx="9555478" cy="1485900"/>
+          <a:ext cx="9555479" cy="1485900"/>
         </p:xfrm>
         <a:graphic>
           <a:graphicData uri="http://schemas.openxmlformats.org/drawingml/2006/table">
@@ -4595,9 +4595,9 @@
                 <a:tableStyleId>{2D5ABB26-0587-4C30-8999-92F81FD0307C}</a:tableStyleId>
               </a:tblPr>
               <a:tblGrid>
-                <a:gridCol w="652696"/>
-                <a:gridCol w="861559"/>
-                <a:gridCol w="8041223"/>
+                <a:gridCol w="676653"/>
+                <a:gridCol w="823808"/>
+                <a:gridCol w="8055018"/>
               </a:tblGrid>
               <a:tr h="297180">
                 <a:tc>
@@ -4754,7 +4754,25 @@
                           </a:solidFill>
                           <a:latin typeface="맑은 고딕"/>
                         </a:rPr>
-                        <a:t>제약 카드 셋 중 하나를 고른다. 스킵이 없어서 매 라운드 하나는 반드시 안고 던진다</a:t>
+                        <a:t>제약 카드 셋 중 하나를 고른다. </a:t>
+                      </a:r>
+                      <a:r>
+                        <a:rPr sz="1000" b="1">
+                          <a:solidFill>
+                            <a:srgbClr val="1A1822"/>
+                          </a:solidFill>
+                          <a:latin typeface="맑은 고딕"/>
+                        </a:rPr>
+                        <a:t>스킵이 없어서</a:t>
+                      </a:r>
+                      <a:r>
+                        <a:rPr sz="1000" b="0">
+                          <a:solidFill>
+                            <a:srgbClr val="3D394A"/>
+                          </a:solidFill>
+                          <a:latin typeface="맑은 고딕"/>
+                        </a:rPr>
+                        <a:t> 매 라운드 하나는 반드시 안고 던진다</a:t>
                       </a:r>
                     </a:p>
                   </a:txBody>
@@ -4837,7 +4855,16 @@
                           </a:solidFill>
                           <a:latin typeface="맑은 고딕"/>
                         </a:rPr>
-                        <a:t>다트 여섯 발. 한 발마다 자루를 고르고 두 축을 조준해 던진다. 목표를 넘긴 순간 끝난다</a:t>
+                        <a:t>다트 여섯 발. 한 발마다 자루를 고르고 두 축을 조준해 던진다. </a:t>
+                      </a:r>
+                      <a:r>
+                        <a:rPr sz="1000" b="1">
+                          <a:solidFill>
+                            <a:srgbClr val="1A1822"/>
+                          </a:solidFill>
+                          <a:latin typeface="맑은 고딕"/>
+                        </a:rPr>
+                        <a:t>목표를 넘긴 순간 끝난다</a:t>
                       </a:r>
                     </a:p>
                   </a:txBody>
@@ -5046,9 +5073,9 @@
               </a:lnSpc>
             </a:pPr>
             <a:r>
-              <a:rPr sz="1100" b="0">
-                <a:solidFill>
-                  <a:srgbClr val="3D394A"/>
+              <a:rPr sz="1100" b="1">
+                <a:solidFill>
+                  <a:srgbClr val="1A1822"/>
                 </a:solidFill>
                 <a:latin typeface="맑은 고딕"/>
               </a:rPr>
@@ -5071,7 +5098,25 @@
                 </a:solidFill>
                 <a:latin typeface="맑은 고딕"/>
               </a:rPr>
-              <a:t>· 목표를 넘긴 순간 라운드가 끝나므로, 과잉 조준이 손해가 된다. 남은 다트 한 발이 골드 1이다.</a:t>
+              <a:t>· 목표를 넘긴 순간 라운드가 끝나므로, </a:t>
+            </a:r>
+            <a:r>
+              <a:rPr sz="1100" b="1">
+                <a:solidFill>
+                  <a:srgbClr val="1A1822"/>
+                </a:solidFill>
+                <a:latin typeface="맑은 고딕"/>
+              </a:rPr>
+              <a:t>과잉 조준이 손해가 된다.</a:t>
+            </a:r>
+            <a:r>
+              <a:rPr sz="1100" b="0">
+                <a:solidFill>
+                  <a:srgbClr val="3D394A"/>
+                </a:solidFill>
+                <a:latin typeface="맑은 고딕"/>
+              </a:rPr>
+              <a:t> 남은 다트 한 발이 골드 1이다.</a:t>
             </a:r>
           </a:p>
           <a:p>
@@ -5479,9 +5524,9 @@
                 <a:tableStyleId>{2D5ABB26-0587-4C30-8999-92F81FD0307C}</a:tableStyleId>
               </a:tblPr>
               <a:tblGrid>
-                <a:gridCol w="868680"/>
-                <a:gridCol w="2233748"/>
-                <a:gridCol w="6453051"/>
+                <a:gridCol w="1236591"/>
+                <a:gridCol w="2023513"/>
+                <a:gridCol w="6295375"/>
               </a:tblGrid>
               <a:tr h="297180">
                 <a:tc>
@@ -5887,7 +5932,25 @@
                           </a:solidFill>
                           <a:latin typeface="맑은 고딕"/>
                         </a:rPr>
-                        <a:t>0.45초. 본 것을 확인하는 시간이지 고칠 시간이 아니다</a:t>
+                        <a:t>0.45초. </a:t>
+                      </a:r>
+                      <a:r>
+                        <a:rPr sz="1000" b="1">
+                          <a:solidFill>
+                            <a:srgbClr val="1A1822"/>
+                          </a:solidFill>
+                          <a:latin typeface="맑은 고딕"/>
+                        </a:rPr>
+                        <a:t>본 것을 확인하는 시간</a:t>
+                      </a:r>
+                      <a:r>
+                        <a:rPr sz="1000" b="0">
+                          <a:solidFill>
+                            <a:srgbClr val="3D394A"/>
+                          </a:solidFill>
+                          <a:latin typeface="맑은 고딕"/>
+                        </a:rPr>
+                        <a:t>이지 고칠 시간이 아니다</a:t>
                       </a:r>
                     </a:p>
                   </a:txBody>
@@ -6096,9 +6159,9 @@
               </a:lnSpc>
             </a:pPr>
             <a:r>
-              <a:rPr sz="1100" b="0">
-                <a:solidFill>
-                  <a:srgbClr val="3D394A"/>
+              <a:rPr sz="1100" b="1">
+                <a:solidFill>
+                  <a:srgbClr val="1A1822"/>
                 </a:solidFill>
                 <a:latin typeface="맑은 고딕"/>
               </a:rPr>
@@ -6236,7 +6299,7 @@
                 </a:solidFill>
                 <a:latin typeface="맑은 고딕"/>
               </a:rPr>
-              <a:t>3장 · 주요 시스템 및 규칙</a:t>
+              <a:t>2장 · 핵심 재미 요소</a:t>
             </a:r>
           </a:p>
         </p:txBody>
@@ -6314,7 +6377,25 @@
                 </a:solidFill>
                 <a:latin typeface="맑은 고딕"/>
               </a:rPr>
-              <a:t>무개조 판의 다트당 기대 점수는 9.59점이다. 오른쪽 열이 그 기준선의 몇 배다.</a:t>
+              <a:t>무개조 판의 다트당 기대 점수는 </a:t>
+            </a:r>
+            <a:r>
+              <a:rPr sz="1150" b="1">
+                <a:solidFill>
+                  <a:srgbClr val="1A1822"/>
+                </a:solidFill>
+                <a:latin typeface="맑은 고딕"/>
+              </a:rPr>
+              <a:t>9.59점</a:t>
+            </a:r>
+            <a:r>
+              <a:rPr sz="1150" b="0">
+                <a:solidFill>
+                  <a:srgbClr val="3D394A"/>
+                </a:solidFill>
+                <a:latin typeface="맑은 고딕"/>
+              </a:rPr>
+              <a:t>이다. 오른쪽 열이 그 기준선의 몇 배다.</a:t>
             </a:r>
           </a:p>
         </p:txBody>
@@ -7360,9 +7441,9 @@
                         </a:lnSpc>
                       </a:pPr>
                       <a:r>
-                        <a:rPr sz="1000" b="0">
-                          <a:solidFill>
-                            <a:srgbClr val="3D394A"/>
+                        <a:rPr sz="1000" b="1">
+                          <a:solidFill>
+                            <a:srgbClr val="1A1822"/>
                           </a:solidFill>
                           <a:latin typeface="맑은 고딕"/>
                         </a:rPr>
@@ -7409,9 +7490,9 @@
               </a:lnSpc>
             </a:pPr>
             <a:r>
-              <a:rPr sz="1100" b="0">
-                <a:solidFill>
-                  <a:srgbClr val="3D394A"/>
+              <a:rPr sz="1100" b="1">
+                <a:solidFill>
+                  <a:srgbClr val="1A1822"/>
                 </a:solidFill>
                 <a:latin typeface="맑은 고딕"/>
               </a:rPr>
@@ -7434,7 +7515,25 @@
                 </a:solidFill>
                 <a:latin typeface="맑은 고딕"/>
               </a:rPr>
-              <a:t>· 공비 약 1.775의 등비수열을 반올림했다.</a:t>
+              <a:t>· 공비 약 </a:t>
+            </a:r>
+            <a:r>
+              <a:rPr sz="1100" b="1">
+                <a:solidFill>
+                  <a:srgbClr val="1A1822"/>
+                </a:solidFill>
+                <a:latin typeface="맑은 고딕"/>
+              </a:rPr>
+              <a:t>1.775</a:t>
+            </a:r>
+            <a:r>
+              <a:rPr sz="1100" b="0">
+                <a:solidFill>
+                  <a:srgbClr val="3D394A"/>
+                </a:solidFill>
+                <a:latin typeface="맑은 고딕"/>
+              </a:rPr>
+              <a:t>의 등비수열을 반올림했다.</a:t>
             </a:r>
           </a:p>
           <a:p>
@@ -7453,7 +7552,25 @@
                 </a:solidFill>
                 <a:latin typeface="맑은 고딕"/>
               </a:rPr>
-              <a:t>· R1(45)만 실측 근거가 있다. 칩 없이 넘도록 잡은 값이라 1라운드가 사실상 튜토리얼 구간이 된다.</a:t>
+              <a:t>· </a:t>
+            </a:r>
+            <a:r>
+              <a:rPr sz="1100" b="1">
+                <a:solidFill>
+                  <a:srgbClr val="1A1822"/>
+                </a:solidFill>
+                <a:latin typeface="맑은 고딕"/>
+              </a:rPr>
+              <a:t>R1(45)만 실측 근거가 있다.</a:t>
+            </a:r>
+            <a:r>
+              <a:rPr sz="1100" b="0">
+                <a:solidFill>
+                  <a:srgbClr val="3D394A"/>
+                </a:solidFill>
+                <a:latin typeface="맑은 고딕"/>
+              </a:rPr>
+              <a:t> 칩 없이 넘도록 잡은 값이라 1라운드가 튜토리얼 구간이 된다.</a:t>
             </a:r>
           </a:p>
           <a:p>
@@ -7472,7 +7589,43 @@
                 </a:solidFill>
                 <a:latin typeface="맑은 고딕"/>
               </a:rPr>
-              <a:t>· 무장 없는 한 발 상한은 60점(칸 20 × 배수 3)이다. 6발이면 360점이므로 R5(470)부터는 조준만으로 못 넘는다. 곱셈 층이 여기서부터</a:t>
+              <a:t>· 무장 없는 한 발 상한은 </a:t>
+            </a:r>
+            <a:r>
+              <a:rPr sz="1100" b="1">
+                <a:solidFill>
+                  <a:srgbClr val="1A1822"/>
+                </a:solidFill>
+                <a:latin typeface="맑은 고딕"/>
+              </a:rPr>
+              <a:t>60점</a:t>
+            </a:r>
+            <a:r>
+              <a:rPr sz="1100" b="0">
+                <a:solidFill>
+                  <a:srgbClr val="3D394A"/>
+                </a:solidFill>
+                <a:latin typeface="맑은 고딕"/>
+              </a:rPr>
+              <a:t>(칸 20 × 배수 3)이다. 6발이면 360점이므로 </a:t>
+            </a:r>
+            <a:r>
+              <a:rPr sz="1100" b="1">
+                <a:solidFill>
+                  <a:srgbClr val="1A1822"/>
+                </a:solidFill>
+                <a:latin typeface="맑은 고딕"/>
+              </a:rPr>
+              <a:t>R5(470)부터는 조준만으로 못 넘는다.</a:t>
+            </a:r>
+            <a:r>
+              <a:rPr sz="1100" b="0">
+                <a:solidFill>
+                  <a:srgbClr val="3D394A"/>
+                </a:solidFill>
+                <a:latin typeface="맑은 고딕"/>
+              </a:rPr>
+              <a:t> 곱셈 층이</a:t>
             </a:r>
           </a:p>
           <a:p>
@@ -7491,7 +7644,7 @@
                 </a:solidFill>
                 <a:latin typeface="맑은 고딕"/>
               </a:rPr>
-              <a:t>필요해진다.</a:t>
+              <a:t>여기서부터 필요해진다.</a:t>
             </a:r>
           </a:p>
           <a:p>
@@ -8286,13 +8439,22 @@
               </a:lnSpc>
             </a:pPr>
             <a:r>
+              <a:rPr sz="1100" b="1">
+                <a:solidFill>
+                  <a:srgbClr val="1A1822"/>
+                </a:solidFill>
+                <a:latin typeface="맑은 고딕"/>
+              </a:rPr>
+              <a:t>반환 치역이 계약이다.</a:t>
+            </a:r>
+            <a:r>
               <a:rPr sz="1100" b="0">
                 <a:solidFill>
                   <a:srgbClr val="3D394A"/>
                 </a:solidFill>
                 <a:latin typeface="맑은 고딕"/>
               </a:rPr>
-              <a:t>반환 치역이 계약이다. 배수 ∈ {0, 1, 2, 3} · 칸 ∈ {−1} ∪ [1, 20] ∪ {25, 50}</a:t>
+              <a:t> 배수 ∈ {0, 1, 2, 3} · 칸 ∈ {−1} ∪ [1, 20] ∪ {25, 50}</a:t>
             </a:r>
           </a:p>
           <a:p>
@@ -8563,7 +8725,7 @@
         </p:nvGraphicFramePr>
         <p:xfrm>
           <a:off x="566928" y="1668780"/>
-          <a:ext cx="9555478" cy="2377440"/>
+          <a:ext cx="9555477" cy="2377440"/>
         </p:xfrm>
         <a:graphic>
           <a:graphicData uri="http://schemas.openxmlformats.org/drawingml/2006/table">
@@ -8572,11 +8734,11 @@
                 <a:tableStyleId>{2D5ABB26-0587-4C30-8999-92F81FD0307C}</a:tableStyleId>
               </a:tblPr>
               <a:tblGrid>
-                <a:gridCol w="1563624"/>
-                <a:gridCol w="2084831"/>
-                <a:gridCol w="2432303"/>
-                <a:gridCol w="1737360"/>
-                <a:gridCol w="1737360"/>
+                <a:gridCol w="1971765"/>
+                <a:gridCol w="1820091"/>
+                <a:gridCol w="2730137"/>
+                <a:gridCol w="1516742"/>
+                <a:gridCol w="1516742"/>
               </a:tblGrid>
               <a:tr h="297180">
                 <a:tc>
@@ -9198,7 +9360,16 @@
                           </a:solidFill>
                           <a:latin typeface="맑은 고딕"/>
                         </a:rPr>
-                        <a:t>칸 값 · 배수 3</a:t>
+                        <a:t>칸 값 · </a:t>
+                      </a:r>
+                      <a:r>
+                        <a:rPr sz="1000" b="1">
+                          <a:solidFill>
+                            <a:srgbClr val="1A1822"/>
+                          </a:solidFill>
+                          <a:latin typeface="맑은 고딕"/>
+                        </a:rPr>
+                        <a:t>배수 3</a:t>
                       </a:r>
                     </a:p>
                   </a:txBody>
@@ -9219,9 +9390,9 @@
                         </a:lnSpc>
                       </a:pPr>
                       <a:r>
-                        <a:rPr sz="1000" b="0">
-                          <a:solidFill>
-                            <a:srgbClr val="3D394A"/>
+                        <a:rPr sz="1000" b="1">
+                          <a:solidFill>
+                            <a:srgbClr val="1A1822"/>
                           </a:solidFill>
                           <a:latin typeface="맑은 고딕"/>
                         </a:rPr>
@@ -9472,7 +9643,16 @@
                           </a:solidFill>
                           <a:latin typeface="맑은 고딕"/>
                         </a:rPr>
-                        <a:t>칸 값 · 배수 2</a:t>
+                        <a:t>칸 값 · </a:t>
+                      </a:r>
+                      <a:r>
+                        <a:rPr sz="1000" b="1">
+                          <a:solidFill>
+                            <a:srgbClr val="1A1822"/>
+                          </a:solidFill>
+                          <a:latin typeface="맑은 고딕"/>
+                        </a:rPr>
+                        <a:t>배수 2</a:t>
                       </a:r>
                     </a:p>
                   </a:txBody>
@@ -9657,9 +9837,9 @@
                         </a:lnSpc>
                       </a:pPr>
                       <a:r>
-                        <a:rPr sz="1000" b="0">
-                          <a:solidFill>
-                            <a:srgbClr val="3D394A"/>
+                        <a:rPr sz="1000" b="1">
+                          <a:solidFill>
+                            <a:srgbClr val="1A1822"/>
                           </a:solidFill>
                           <a:latin typeface="맑은 고딕"/>
                         </a:rPr>
@@ -10037,7 +10217,7 @@
         </p:nvGraphicFramePr>
         <p:xfrm>
           <a:off x="566928" y="1668780"/>
-          <a:ext cx="9555478" cy="1783080"/>
+          <a:ext cx="9555479" cy="1783080"/>
         </p:xfrm>
         <a:graphic>
           <a:graphicData uri="http://schemas.openxmlformats.org/drawingml/2006/table">
@@ -10046,9 +10226,9 @@
                 <a:tableStyleId>{2D5ABB26-0587-4C30-8999-92F81FD0307C}</a:tableStyleId>
               </a:tblPr>
               <a:tblGrid>
-                <a:gridCol w="647724"/>
-                <a:gridCol w="1054865"/>
-                <a:gridCol w="7852889"/>
+                <a:gridCol w="678981"/>
+                <a:gridCol w="1051164"/>
+                <a:gridCol w="7825334"/>
               </a:tblGrid>
               <a:tr h="297180">
                 <a:tc>
@@ -10365,13 +10545,22 @@
                         </a:lnSpc>
                       </a:pPr>
                       <a:r>
-                        <a:rPr sz="1000" b="0">
-                          <a:solidFill>
-                            <a:srgbClr val="3D394A"/>
-                          </a:solidFill>
-                          <a:latin typeface="맑은 고딕"/>
-                        </a:rPr>
-                        <a:t>랙에 꽂힌 순서대로 한 장씩. 조건이 걸리면 효과를 얹는다</a:t>
+                        <a:rPr sz="1000" b="1">
+                          <a:solidFill>
+                            <a:srgbClr val="1A1822"/>
+                          </a:solidFill>
+                          <a:latin typeface="맑은 고딕"/>
+                        </a:rPr>
+                        <a:t>랙에 꽂힌 순서대로</a:t>
+                      </a:r>
+                      <a:r>
+                        <a:rPr sz="1000" b="0">
+                          <a:solidFill>
+                            <a:srgbClr val="3D394A"/>
+                          </a:solidFill>
+                          <a:latin typeface="맑은 고딕"/>
+                        </a:rPr>
+                        <a:t> 한 장씩. 조건이 걸리면 효과를 얹는다</a:t>
                       </a:r>
                     </a:p>
                   </a:txBody>
@@ -10580,13 +10769,22 @@
               </a:lnSpc>
             </a:pPr>
             <a:r>
+              <a:rPr sz="1100" b="1">
+                <a:solidFill>
+                  <a:srgbClr val="1A1822"/>
+                </a:solidFill>
+                <a:latin typeface="맑은 고딕"/>
+              </a:rPr>
+              <a:t>곱셈이 두 겹이 되는 순간</a:t>
+            </a:r>
+            <a:r>
               <a:rPr sz="1100" b="0">
                 <a:solidFill>
                   <a:srgbClr val="3D394A"/>
                 </a:solidFill>
                 <a:latin typeface="맑은 고딕"/>
               </a:rPr>
-              <a:t>곱셈이 두 겹이 되는 순간 후반 라운드의 목표가 넘어갈 수 있는 수가 된다. R8 목표 2,500은 다트당 417점이고, 무개조 기본값 9.59점의</a:t>
+              <a:t> 후반 라운드의 목표가 넘어갈 수 있는 수가 된다. R8 목표 2,500은 다트당 417점이고, 무개조 기본값 9.59점의</a:t>
             </a:r>
           </a:p>
           <a:p>
@@ -10618,13 +10816,22 @@
               </a:spcBef>
             </a:pPr>
             <a:r>
+              <a:rPr sz="1100" b="1">
+                <a:solidFill>
+                  <a:srgbClr val="1A1822"/>
+                </a:solidFill>
+                <a:latin typeface="맑은 고딕"/>
+              </a:rPr>
+              <a:t>주의. 발동 순서가 값을 바꾼다.</a:t>
+            </a:r>
+            <a:r>
               <a:rPr sz="1100" b="0">
                 <a:solidFill>
                   <a:srgbClr val="3D394A"/>
                 </a:solidFill>
                 <a:latin typeface="맑은 고딕"/>
               </a:rPr>
-              <a:t>주의. 발동 순서가 값을 바꾼다. 정산은 배수 +N을 다 더한 뒤 ×N을 곱하는 것이 아니다. 랙 순서대로 하나씩 처리하므로, 곱셈 칩이 덧셈</a:t>
+              <a:t> 정산은 배수 +N을 다 더한 뒤 ×N을 곱하는 것이 아니다. 랙 순서대로 하나씩 처리하므로, 곱셈 칩이 덧셈</a:t>
             </a:r>
           </a:p>
           <a:p>
@@ -10885,10 +11092,10 @@
                 <a:tableStyleId>{2D5ABB26-0587-4C30-8999-92F81FD0307C}</a:tableStyleId>
               </a:tblPr>
               <a:tblGrid>
-                <a:gridCol w="1048772"/>
-                <a:gridCol w="1048772"/>
-                <a:gridCol w="2563665"/>
-                <a:gridCol w="4894270"/>
+                <a:gridCol w="1444433"/>
+                <a:gridCol w="999992"/>
+                <a:gridCol w="2444425"/>
+                <a:gridCol w="4666629"/>
               </a:tblGrid>
               <a:tr h="297180">
                 <a:tc>
@@ -11712,7 +11919,7 @@
         <p:spPr>
           <a:xfrm>
             <a:off x="566928" y="4201667"/>
-            <a:ext cx="9555480" cy="617220"/>
+            <a:ext cx="9555480" cy="832103"/>
           </a:xfrm>
           <a:prstGeom prst="rect">
             <a:avLst/>
@@ -11774,7 +11981,41 @@
                 </a:solidFill>
                 <a:latin typeface="맑은 고딕"/>
               </a:rPr>
-              <a:t>스킵을 없앤 이유. 스킵이 있으면 플레이어는 제약을 그냥 넘긴다. 없애면 「어느 쪽이 내 빌드에 덜 아픈가」를 매 라운드 따져야 한다.</a:t>
+              <a:t>스킵을 없앤 이유. 스킵이 있으면 플레이어는 제약을 그냥 넘긴다. 없애면 </a:t>
+            </a:r>
+            <a:r>
+              <a:rPr sz="1050" b="1">
+                <a:solidFill>
+                  <a:srgbClr val="1A1822"/>
+                </a:solidFill>
+                <a:latin typeface="맑은 고딕"/>
+              </a:rPr>
+              <a:t>「어느 쪽이 내 빌드에 덜 아픈가」</a:t>
+            </a:r>
+            <a:r>
+              <a:rPr sz="1050" b="0">
+                <a:solidFill>
+                  <a:srgbClr val="1A1822"/>
+                </a:solidFill>
+                <a:latin typeface="맑은 고딕"/>
+              </a:rPr>
+              <a:t>를 매 라운드 따져야</a:t>
+            </a:r>
+          </a:p>
+          <a:p>
+            <a:pPr algn="l">
+              <a:lnSpc>
+                <a:spcPct val="132000"/>
+              </a:lnSpc>
+            </a:pPr>
+            <a:r>
+              <a:rPr sz="1050" b="0">
+                <a:solidFill>
+                  <a:srgbClr val="1A1822"/>
+                </a:solidFill>
+                <a:latin typeface="맑은 고딕"/>
+              </a:rPr>
+              <a:t>한다.</a:t>
             </a:r>
           </a:p>
         </p:txBody>
@@ -12080,13 +12321,13 @@
               </a:lnSpc>
             </a:pPr>
             <a:r>
-              <a:rPr sz="1100" b="0">
-                <a:solidFill>
-                  <a:srgbClr val="3D394A"/>
+              <a:rPr sz="1100" b="1">
+                <a:solidFill>
+                  <a:srgbClr val="1A1822"/>
                 </a:solidFill>
                 <a:latin typeface="맑은 고딕"/>
               </a:rPr>
-              <a:t>지켜야 하는 것</a:t>
+              <a:t>세 가지 상한</a:t>
             </a:r>
           </a:p>
         </p:txBody>
@@ -12101,7 +12342,7 @@
         </p:nvGraphicFramePr>
         <p:xfrm>
           <a:off x="566928" y="2487168"/>
-          <a:ext cx="9555479" cy="1188720"/>
+          <a:ext cx="9555478" cy="1188720"/>
         </p:xfrm>
         <a:graphic>
           <a:graphicData uri="http://schemas.openxmlformats.org/drawingml/2006/table">
@@ -12110,9 +12351,9 @@
                 <a:tableStyleId>{2D5ABB26-0587-4C30-8999-92F81FD0307C}</a:tableStyleId>
               </a:tblPr>
               <a:tblGrid>
-                <a:gridCol w="955547"/>
-                <a:gridCol w="2866644"/>
-                <a:gridCol w="5733288"/>
+                <a:gridCol w="918796"/>
+                <a:gridCol w="3123906"/>
+                <a:gridCol w="5512776"/>
               </a:tblGrid>
               <a:tr h="297180">
                 <a:tc>
@@ -12408,7 +12649,25 @@
                           </a:solidFill>
                           <a:latin typeface="맑은 고딕"/>
                         </a:rPr>
-                        <a:t>기본의 1.50배 (15.43 → 23.15)</a:t>
+                        <a:t>기본의 </a:t>
+                      </a:r>
+                      <a:r>
+                        <a:rPr sz="1000" b="1">
+                          <a:solidFill>
+                            <a:srgbClr val="1A1822"/>
+                          </a:solidFill>
+                          <a:latin typeface="맑은 고딕"/>
+                        </a:rPr>
+                        <a:t>1.50배</a:t>
+                      </a:r>
+                      <a:r>
+                        <a:rPr sz="1000" b="0">
+                          <a:solidFill>
+                            <a:srgbClr val="3D394A"/>
+                          </a:solidFill>
+                          <a:latin typeface="맑은 고딕"/>
+                        </a:rPr>
+                        <a:t> (15.43 → 23.15)</a:t>
                       </a:r>
                     </a:p>
                   </a:txBody>
@@ -12742,8 +13001,8 @@
                 <a:tableStyleId>{2D5ABB26-0587-4C30-8999-92F81FD0307C}</a:tableStyleId>
               </a:tblPr>
               <a:tblGrid>
-                <a:gridCol w="1130218"/>
-                <a:gridCol w="8425261"/>
+                <a:gridCol w="1477651"/>
+                <a:gridCol w="8077828"/>
               </a:tblGrid>
               <a:tr h="297180">
                 <a:tc>
@@ -13175,7 +13434,25 @@
                 </a:solidFill>
                 <a:latin typeface="맑은 고딕"/>
               </a:rPr>
-              <a:t>검증은 첫 오류에서 안 멈춘다. 전부 모아 한 번에 출력한다. 지금은 오류 0 · 경고 2이고, 둘 다 의도된 완전분할 짝이다.</a:t>
+              <a:t>검증은 첫 오류에서 안 멈춘다. 전부 모아 한 번에 출력한다. </a:t>
+            </a:r>
+            <a:r>
+              <a:rPr sz="1100" b="1">
+                <a:solidFill>
+                  <a:srgbClr val="1A1822"/>
+                </a:solidFill>
+                <a:latin typeface="맑은 고딕"/>
+              </a:rPr>
+              <a:t>지금은 오류 0 · 경고 2</a:t>
+            </a:r>
+            <a:r>
+              <a:rPr sz="1100" b="0">
+                <a:solidFill>
+                  <a:srgbClr val="3D394A"/>
+                </a:solidFill>
+                <a:latin typeface="맑은 고딕"/>
+              </a:rPr>
+              <a:t>이고, 둘 다 의도된 완전분할 짝이다.</a:t>
             </a:r>
           </a:p>
         </p:txBody>
@@ -13310,7 +13587,7 @@
                 </a:solidFill>
                 <a:latin typeface="맑은 고딕"/>
               </a:rPr>
-              <a:t>이 문서를 읽는 법</a:t>
+              <a:t>수치의 출처</a:t>
             </a:r>
           </a:p>
         </p:txBody>
@@ -13387,13 +13664,22 @@
               </a:lnSpc>
             </a:pPr>
             <a:r>
+              <a:rPr sz="1100" b="1">
+                <a:solidFill>
+                  <a:srgbClr val="1A1822"/>
+                </a:solidFill>
+                <a:latin typeface="맑은 고딕"/>
+              </a:rPr>
+              <a:t>모든 수치는 지금 도는 빌드에서 나왔다.</a:t>
+            </a:r>
+            <a:r>
               <a:rPr sz="1100" b="0">
                 <a:solidFill>
                   <a:srgbClr val="3D394A"/>
                 </a:solidFill>
                 <a:latin typeface="맑은 고딕"/>
               </a:rPr>
-              <a:t>수치는 전부 지금 도는 빌드에서 나온 값이다. 표에 적힌 숫자와 게임 안의 숫자가 다를 수 없도록, 이 문서의 데이터 표는 프로젝트의 CSV</a:t>
+              <a:t> 데이터 표는 프로젝트의 CSV 파일에서 그대로 뽑았다. 발동률과 기여도는 실제 판정 함수에 36만</a:t>
             </a:r>
           </a:p>
           <a:p>
@@ -13412,7 +13698,7 @@
                 </a:solidFill>
                 <a:latin typeface="맑은 고딕"/>
               </a:rPr>
-              <a:t>파일에서 그대로 뽑았다. 발동률과 기여도는 실제 판정 함수에 36만 발을 통과시켜 잰 값이다.</a:t>
+              <a:t>발을 통과시켜 쟀다.</a:t>
             </a:r>
           </a:p>
         </p:txBody>
@@ -13427,7 +13713,7 @@
         </p:nvGraphicFramePr>
         <p:xfrm>
           <a:off x="566928" y="1856231"/>
-          <a:ext cx="9555479" cy="2290572"/>
+          <a:ext cx="9555479" cy="1783080"/>
         </p:xfrm>
         <a:graphic>
           <a:graphicData uri="http://schemas.openxmlformats.org/drawingml/2006/table">
@@ -13436,8 +13722,8 @@
                 <a:tableStyleId>{2D5ABB26-0587-4C30-8999-92F81FD0307C}</a:tableStyleId>
               </a:tblPr>
               <a:tblGrid>
-                <a:gridCol w="790302"/>
-                <a:gridCol w="8765177"/>
+                <a:gridCol w="1462573"/>
+                <a:gridCol w="8092906"/>
               </a:tblGrid>
               <a:tr h="297180">
                 <a:tc>
@@ -13457,146 +13743,34 @@
                           </a:solidFill>
                           <a:latin typeface="맑은 고딕"/>
                         </a:rPr>
-                        <a:t>구성</a:t>
-                      </a:r>
-                    </a:p>
-                  </a:txBody>
-                  <a:tcPr marL="64008" marR="64008" marT="27432" marB="27432" anchor="t">
-                    <a:solidFill>
-                      <a:srgbClr val="FFFFFF"/>
-                    </a:solidFill>
-                  </a:tcPr>
-                </a:tc>
-                <a:tc>
-                  <a:txBody>
-                    <a:bodyPr wrap="square"/>
-                    <a:lstStyle/>
-                    <a:p>
-                      <a:pPr>
-                        <a:lnSpc>
-                          <a:spcPct val="114000"/>
-                        </a:lnSpc>
-                      </a:pPr>
-                      <a:r>
-                        <a:rPr sz="1000" b="0">
-                          <a:solidFill>
-                            <a:srgbClr val="3D394A"/>
-                          </a:solidFill>
-                          <a:latin typeface="맑은 고딕"/>
-                        </a:rPr>
-                        <a:t>여섯 장으로 나눈다. 개요 → 핵심 재미 → 시스템과 규칙 → 조작과 UI → 아이템 → 성장과 경제. 앞 장이 뒷 장의 전제가 된다.</a:t>
-                      </a:r>
-                    </a:p>
-                  </a:txBody>
-                  <a:tcPr marL="64008" marR="64008" marT="27432" marB="27432" anchor="t">
-                    <a:solidFill>
-                      <a:srgbClr val="FFFFFF"/>
-                    </a:solidFill>
-                  </a:tcPr>
-                </a:tc>
-              </a:tr>
-              <a:tr h="466344">
-                <a:tc>
-                  <a:txBody>
-                    <a:bodyPr wrap="square"/>
-                    <a:lstStyle/>
-                    <a:p>
-                      <a:pPr>
-                        <a:lnSpc>
-                          <a:spcPct val="114000"/>
-                        </a:lnSpc>
-                      </a:pPr>
-                      <a:r>
-                        <a:rPr sz="1000" b="1">
-                          <a:solidFill>
-                            <a:srgbClr val="1A1822"/>
-                          </a:solidFill>
-                          <a:latin typeface="맑은 고딕"/>
-                        </a:rPr>
-                        <a:t>수치의 출처</a:t>
-                      </a:r>
-                    </a:p>
-                  </a:txBody>
-                  <a:tcPr marL="64008" marR="64008" marT="27432" marB="27432" anchor="t">
-                    <a:solidFill>
-                      <a:srgbClr val="F3F1F6"/>
-                    </a:solidFill>
-                  </a:tcPr>
-                </a:tc>
-                <a:tc>
-                  <a:txBody>
-                    <a:bodyPr wrap="square"/>
-                    <a:lstStyle/>
-                    <a:p>
-                      <a:pPr>
-                        <a:lnSpc>
-                          <a:spcPct val="114000"/>
-                        </a:lnSpc>
-                      </a:pPr>
-                      <a:r>
-                        <a:rPr sz="1000" b="0">
-                          <a:solidFill>
-                            <a:srgbClr val="3D394A"/>
-                          </a:solidFill>
-                          <a:latin typeface="맑은 고딕"/>
-                        </a:rPr>
-                        <a:t>밸런스 상수는 scripts/data.gd, 아이템 표는 data/.csv 한 곳에만 있다. 코드에 복제본이 없다.</a:t>
-                      </a:r>
-                    </a:p>
-                  </a:txBody>
-                  <a:tcPr marL="64008" marR="64008" marT="27432" marB="27432" anchor="t">
-                    <a:solidFill>
-                      <a:srgbClr val="F3F1F6"/>
-                    </a:solidFill>
-                  </a:tcPr>
-                </a:tc>
-              </a:tr>
-              <a:tr h="466344">
-                <a:tc>
-                  <a:txBody>
-                    <a:bodyPr wrap="square"/>
-                    <a:lstStyle/>
-                    <a:p>
-                      <a:pPr>
-                        <a:lnSpc>
-                          <a:spcPct val="114000"/>
-                        </a:lnSpc>
-                      </a:pPr>
-                      <a:r>
-                        <a:rPr sz="1000" b="1">
-                          <a:solidFill>
-                            <a:srgbClr val="1A1822"/>
-                          </a:solidFill>
-                          <a:latin typeface="맑은 고딕"/>
-                        </a:rPr>
-                        <a:t>미정 표시</a:t>
-                      </a:r>
-                    </a:p>
-                  </a:txBody>
-                  <a:tcPr marL="64008" marR="64008" marT="27432" marB="27432" anchor="t">
-                    <a:solidFill>
-                      <a:srgbClr val="FFFFFF"/>
-                    </a:solidFill>
-                  </a:tcPr>
-                </a:tc>
-                <a:tc>
-                  <a:txBody>
-                    <a:bodyPr wrap="square"/>
-                    <a:lstStyle/>
-                    <a:p>
-                      <a:pPr>
-                        <a:lnSpc>
-                          <a:spcPct val="114000"/>
-                        </a:lnSpc>
-                      </a:pPr>
-                      <a:r>
-                        <a:rPr sz="1000" b="0">
-                          <a:solidFill>
-                            <a:srgbClr val="3D394A"/>
-                          </a:solidFill>
-                          <a:latin typeface="맑은 고딕"/>
-                        </a:rPr>
-                        <a:t>아직 안 정한 것은 「미정」이라 적었다.</a:t>
+                        <a:t>밸런스 상수</a:t>
+                      </a:r>
+                    </a:p>
+                  </a:txBody>
+                  <a:tcPr marL="64008" marR="64008" marT="27432" marB="27432" anchor="t">
+                    <a:solidFill>
+                      <a:srgbClr val="FFFFFF"/>
+                    </a:solidFill>
+                  </a:tcPr>
+                </a:tc>
+                <a:tc>
+                  <a:txBody>
+                    <a:bodyPr wrap="square"/>
+                    <a:lstStyle/>
+                    <a:p>
+                      <a:pPr>
+                        <a:lnSpc>
+                          <a:spcPct val="114000"/>
+                        </a:lnSpc>
+                      </a:pPr>
+                      <a:r>
+                        <a:rPr sz="1000" b="0">
+                          <a:solidFill>
+                            <a:srgbClr val="3D394A"/>
+                          </a:solidFill>
+                          <a:latin typeface="맑은 고딕"/>
+                        </a:rPr>
+                        <a:t>scripts/data.gd 한 곳에만 있다. 코드에 복제본이 없다.</a:t>
                       </a:r>
                     </a:p>
                   </a:txBody>
@@ -13625,7 +13799,7 @@
                           </a:solidFill>
                           <a:latin typeface="맑은 고딕"/>
                         </a:rPr>
-                        <a:t>용어</a:t>
+                        <a:t>아이템 표</a:t>
                       </a:r>
                     </a:p>
                   </a:txBody>
@@ -13652,7 +13826,7 @@
                           </a:solidFill>
                           <a:latin typeface="맑은 고딕"/>
                         </a:rPr>
-                        <a:t>칩 = 아이템, 개조 = 보드 변형, 탄창 = 다트 구성. 게임 안에서 쓰는 말을 그대로 쓴다.</a:t>
+                        <a:t>data/*.csv 여덟 장. 게임과 이 문서가 같은 파일을 읽는다.</a:t>
                       </a:r>
                     </a:p>
                   </a:txBody>
@@ -13681,6 +13855,118 @@
                           </a:solidFill>
                           <a:latin typeface="맑은 고딕"/>
                         </a:rPr>
+                        <a:t>미정 표시</a:t>
+                      </a:r>
+                    </a:p>
+                  </a:txBody>
+                  <a:tcPr marL="64008" marR="64008" marT="27432" marB="27432" anchor="t">
+                    <a:solidFill>
+                      <a:srgbClr val="FFFFFF"/>
+                    </a:solidFill>
+                  </a:tcPr>
+                </a:tc>
+                <a:tc>
+                  <a:txBody>
+                    <a:bodyPr wrap="square"/>
+                    <a:lstStyle/>
+                    <a:p>
+                      <a:pPr>
+                        <a:lnSpc>
+                          <a:spcPct val="114000"/>
+                        </a:lnSpc>
+                      </a:pPr>
+                      <a:r>
+                        <a:rPr sz="1000" b="0">
+                          <a:solidFill>
+                            <a:srgbClr val="3D394A"/>
+                          </a:solidFill>
+                          <a:latin typeface="맑은 고딕"/>
+                        </a:rPr>
+                        <a:t>아직 안 정한 칸은 「미정」으로 비워 뒀다.</a:t>
+                      </a:r>
+                    </a:p>
+                  </a:txBody>
+                  <a:tcPr marL="64008" marR="64008" marT="27432" marB="27432" anchor="t">
+                    <a:solidFill>
+                      <a:srgbClr val="FFFFFF"/>
+                    </a:solidFill>
+                  </a:tcPr>
+                </a:tc>
+              </a:tr>
+              <a:tr h="297180">
+                <a:tc>
+                  <a:txBody>
+                    <a:bodyPr wrap="square"/>
+                    <a:lstStyle/>
+                    <a:p>
+                      <a:pPr>
+                        <a:lnSpc>
+                          <a:spcPct val="114000"/>
+                        </a:lnSpc>
+                      </a:pPr>
+                      <a:r>
+                        <a:rPr sz="1000" b="1">
+                          <a:solidFill>
+                            <a:srgbClr val="1A1822"/>
+                          </a:solidFill>
+                          <a:latin typeface="맑은 고딕"/>
+                        </a:rPr>
+                        <a:t>용어</a:t>
+                      </a:r>
+                    </a:p>
+                  </a:txBody>
+                  <a:tcPr marL="64008" marR="64008" marT="27432" marB="27432" anchor="t">
+                    <a:solidFill>
+                      <a:srgbClr val="F3F1F6"/>
+                    </a:solidFill>
+                  </a:tcPr>
+                </a:tc>
+                <a:tc>
+                  <a:txBody>
+                    <a:bodyPr wrap="square"/>
+                    <a:lstStyle/>
+                    <a:p>
+                      <a:pPr>
+                        <a:lnSpc>
+                          <a:spcPct val="114000"/>
+                        </a:lnSpc>
+                      </a:pPr>
+                      <a:r>
+                        <a:rPr sz="1000" b="0">
+                          <a:solidFill>
+                            <a:srgbClr val="3D394A"/>
+                          </a:solidFill>
+                          <a:latin typeface="맑은 고딕"/>
+                        </a:rPr>
+                        <a:t>칩 = 아이템, 개조 = 보드 변형, 탄창 = 다트 구성. 게임 안에서 쓰는 말을 그대로 쓴다.</a:t>
+                      </a:r>
+                    </a:p>
+                  </a:txBody>
+                  <a:tcPr marL="64008" marR="64008" marT="27432" marB="27432" anchor="t">
+                    <a:solidFill>
+                      <a:srgbClr val="F3F1F6"/>
+                    </a:solidFill>
+                  </a:tcPr>
+                </a:tc>
+              </a:tr>
+              <a:tr h="297180">
+                <a:tc>
+                  <a:txBody>
+                    <a:bodyPr wrap="square"/>
+                    <a:lstStyle/>
+                    <a:p>
+                      <a:pPr>
+                        <a:lnSpc>
+                          <a:spcPct val="114000"/>
+                        </a:lnSpc>
+                      </a:pPr>
+                      <a:r>
+                        <a:rPr sz="1000" b="1">
+                          <a:solidFill>
+                            <a:srgbClr val="1A1822"/>
+                          </a:solidFill>
+                          <a:latin typeface="맑은 고딕"/>
+                        </a:rPr>
                         <a:t>세계관</a:t>
                       </a:r>
                     </a:p>
@@ -13708,7 +13994,7 @@
                           </a:solidFill>
                           <a:latin typeface="맑은 고딕"/>
                         </a:rPr>
-                        <a:t>이 게임에는 대사도 컷신도 없다. 세계관은 화면과 물건의 이름으로만 말한다.</a:t>
+                        <a:t>대사도 컷신도 없다. 화면과 물건의 이름이 배경을 말한다.</a:t>
                       </a:r>
                     </a:p>
                   </a:txBody>
@@ -13719,7 +14005,7 @@
                   </a:tcPr>
                 </a:tc>
               </a:tr>
-              <a:tr h="466344">
+              <a:tr h="297180">
                 <a:tc>
                   <a:txBody>
                     <a:bodyPr wrap="square"/>
@@ -13764,7 +14050,7 @@
                           </a:solidFill>
                           <a:latin typeface="맑은 고딕"/>
                         </a:rPr>
-                        <a:t>이 문서는 상업 출시 계획을 다루지 않는다.</a:t>
+                        <a:t>없다. 가격도 출시 일정도 정하지 않았다.</a:t>
                       </a:r>
                     </a:p>
                   </a:txBody>
@@ -13870,7 +14156,7 @@
                 </a:solidFill>
                 <a:latin typeface="맑은 고딕"/>
               </a:rPr>
-              <a:t>4장 · 조작 방법 및 UI/UX 콘셉트</a:t>
+              <a:t>3장 · 주요 시스템 및 규칙</a:t>
             </a:r>
           </a:p>
         </p:txBody>
@@ -14247,7 +14533,7 @@
         </p:nvGraphicFramePr>
         <p:xfrm>
           <a:off x="566928" y="3657600"/>
-          <a:ext cx="9555478" cy="1060704"/>
+          <a:ext cx="9555479" cy="1229868"/>
         </p:xfrm>
         <a:graphic>
           <a:graphicData uri="http://schemas.openxmlformats.org/drawingml/2006/table">
@@ -14256,8 +14542,8 @@
                 <a:tableStyleId>{2D5ABB26-0587-4C30-8999-92F81FD0307C}</a:tableStyleId>
               </a:tblPr>
               <a:tblGrid>
-                <a:gridCol w="1459864"/>
-                <a:gridCol w="8095614"/>
+                <a:gridCol w="1678665"/>
+                <a:gridCol w="7876814"/>
               </a:tblGrid>
               <a:tr h="297180">
                 <a:tc>
@@ -14371,7 +14657,7 @@
                   </a:tcPr>
                 </a:tc>
               </a:tr>
-              <a:tr h="297180">
+              <a:tr h="466344">
                 <a:tc>
                   <a:txBody>
                     <a:bodyPr wrap="square"/>
@@ -14439,7 +14725,7 @@
         </p:nvSpPr>
         <p:spPr>
           <a:xfrm>
-            <a:off x="566928" y="4809744"/>
+            <a:off x="566928" y="4978907"/>
             <a:ext cx="9555480" cy="274320"/>
           </a:xfrm>
           <a:prstGeom prst="rect">
@@ -14459,13 +14745,40 @@
               </a:lnSpc>
             </a:pPr>
             <a:r>
+              <a:rPr sz="1100" b="1">
+                <a:solidFill>
+                  <a:srgbClr val="1A1822"/>
+                </a:solidFill>
+                <a:latin typeface="맑은 고딕"/>
+              </a:rPr>
+              <a:t>추가 예정.</a:t>
+            </a:r>
+            <a:r>
               <a:rPr sz="1100" b="0">
                 <a:solidFill>
                   <a:srgbClr val="3D394A"/>
                 </a:solidFill>
                 <a:latin typeface="맑은 고딕"/>
               </a:rPr>
-              <a:t>추가 예정. 타이틀 화면(TITLE)과 일시정지 판. 지금은 실행하면 곧바로 STAGE로 들어간다. 다음 작업 1순위로 잡아 뒀다.</a:t>
+              <a:t> 타이틀 화면(TITLE)과 일시정지 판. 지금은 실행하면 곧바로 STAGE로 들어간다. </a:t>
+            </a:r>
+            <a:r>
+              <a:rPr sz="1100" b="1">
+                <a:solidFill>
+                  <a:srgbClr val="1A1822"/>
+                </a:solidFill>
+                <a:latin typeface="맑은 고딕"/>
+              </a:rPr>
+              <a:t>다음 작업 1순위</a:t>
+            </a:r>
+            <a:r>
+              <a:rPr sz="1100" b="0">
+                <a:solidFill>
+                  <a:srgbClr val="3D394A"/>
+                </a:solidFill>
+                <a:latin typeface="맑은 고딕"/>
+              </a:rPr>
+              <a:t>로 잡아 뒀다.</a:t>
             </a:r>
           </a:p>
         </p:txBody>
@@ -14707,9 +15020,9 @@
                 <a:tableStyleId>{2D5ABB26-0587-4C30-8999-92F81FD0307C}</a:tableStyleId>
               </a:tblPr>
               <a:tblGrid>
-                <a:gridCol w="1267563"/>
-                <a:gridCol w="7215362"/>
-                <a:gridCol w="1072553"/>
+                <a:gridCol w="1217855"/>
+                <a:gridCol w="7307131"/>
+                <a:gridCol w="1030492"/>
               </a:tblGrid>
               <a:tr h="297180">
                 <a:tc>
@@ -14922,7 +15235,25 @@
                           </a:solidFill>
                           <a:latin typeface="맑은 고딕"/>
                         </a:rPr>
-                        <a:t>판 중심 반경 129px 안을 누르면 높이 확정. 벽의 다른 자루를 누르면 갈아타기</a:t>
+                        <a:t>판 중심 반경 129px 안을 누르면 </a:t>
+                      </a:r>
+                      <a:r>
+                        <a:rPr sz="1000" b="1">
+                          <a:solidFill>
+                            <a:srgbClr val="1A1822"/>
+                          </a:solidFill>
+                          <a:latin typeface="맑은 고딕"/>
+                        </a:rPr>
+                        <a:t>높이 확정</a:t>
+                      </a:r>
+                      <a:r>
+                        <a:rPr sz="1000" b="0">
+                          <a:solidFill>
+                            <a:srgbClr val="3D394A"/>
+                          </a:solidFill>
+                          <a:latin typeface="맑은 고딕"/>
+                        </a:rPr>
+                        <a:t>. 벽의 다른 자루를 누르면 갈아타기</a:t>
                       </a:r>
                     </a:p>
                   </a:txBody>
@@ -15005,7 +15336,16 @@
                           </a:solidFill>
                           <a:latin typeface="맑은 고딕"/>
                         </a:rPr>
-                        <a:t>같은 규칙으로 좌우 확정</a:t>
+                        <a:t>같은 규칙으로 </a:t>
+                      </a:r>
+                      <a:r>
+                        <a:rPr sz="1000" b="1">
+                          <a:solidFill>
+                            <a:srgbClr val="1A1822"/>
+                          </a:solidFill>
+                          <a:latin typeface="맑은 고딕"/>
+                        </a:rPr>
+                        <a:t>좌우 확정</a:t>
                       </a:r>
                     </a:p>
                   </a:txBody>
@@ -15573,13 +15913,22 @@
               </a:lnSpc>
             </a:pPr>
             <a:r>
+              <a:rPr sz="1100" b="1">
+                <a:solidFill>
+                  <a:srgbClr val="1A1822"/>
+                </a:solidFill>
+                <a:latin typeface="맑은 고딕"/>
+              </a:rPr>
+              <a:t>한 발을 던지는 손동작은 클릭 두 번</a:t>
+            </a:r>
+            <a:r>
               <a:rPr sz="1100" b="0">
                 <a:solidFill>
                   <a:srgbClr val="3D394A"/>
                 </a:solidFill>
                 <a:latin typeface="맑은 고딕"/>
               </a:rPr>
-              <a:t>한 발을 던지는 손동작은 클릭 두 번이다. 첫 클릭이 높이, 둘째 클릭이 좌우. 확인 · 비행 · 정산은 입력을 안 받는다.</a:t>
+              <a:t>이다. 첫 클릭이 높이, 둘째 클릭이 좌우. 확인 · 비행 · 정산은 입력을 안 받는다.</a:t>
             </a:r>
           </a:p>
           <a:p>
@@ -15592,13 +15941,22 @@
               </a:spcBef>
             </a:pPr>
             <a:r>
+              <a:rPr sz="1100" b="1">
+                <a:solidFill>
+                  <a:srgbClr val="1A1822"/>
+                </a:solidFill>
+                <a:latin typeface="맑은 고딕"/>
+              </a:rPr>
+              <a:t>지금 없는 것.</a:t>
+            </a:r>
+            <a:r>
               <a:rPr sz="1100" b="0">
                 <a:solidFill>
                   <a:srgbClr val="3D394A"/>
                 </a:solidFill>
                 <a:latin typeface="맑은 고딕"/>
               </a:rPr>
-              <a:t>지금 없는 것. 키 재설정 · 게임패드 · 터치 · 우클릭 취소. 마우스만으로는 완주할 수 있고, 키보드만으로는 못 한다.</a:t>
+              <a:t> 키 재설정 · 게임패드 · 터치 · 우클릭 취소. 마우스만으로는 완주할 수 있고, 키보드만으로는 못 한다.</a:t>
             </a:r>
           </a:p>
         </p:txBody>
@@ -16414,7 +16772,16 @@
                           </a:solidFill>
                           <a:latin typeface="맑은 고딕"/>
                         </a:rPr>
-                        <a:t>구매로 안 친다. 「지금 세운다」</a:t>
+                        <a:t>구매로 안 친다. </a:t>
+                      </a:r>
+                      <a:r>
+                        <a:rPr sz="1000" b="1">
+                          <a:solidFill>
+                            <a:srgbClr val="1A1822"/>
+                          </a:solidFill>
+                          <a:latin typeface="맑은 고딕"/>
+                        </a:rPr>
+                        <a:t>「지금 세운다」</a:t>
                       </a:r>
                     </a:p>
                   </a:txBody>
@@ -16623,13 +16990,22 @@
               </a:lnSpc>
             </a:pPr>
             <a:r>
+              <a:rPr sz="1100" b="1">
+                <a:solidFill>
+                  <a:srgbClr val="1A1822"/>
+                </a:solidFill>
+                <a:latin typeface="맑은 고딕"/>
+              </a:rPr>
+              <a:t>미는 방향으로 사고판다.</a:t>
+            </a:r>
+            <a:r>
               <a:rPr sz="1100" b="0">
                 <a:solidFill>
                   <a:srgbClr val="3D394A"/>
                 </a:solidFill>
                 <a:latin typeface="맑은 고딕"/>
               </a:rPr>
-              <a:t>미는 방향으로 사고판다. 왼쪽 끝에 밀면 판매, 오른쪽 끝에 밀면 구매다. 라벨을 안 읽어도 방향으로 안다. 드래그로도 사고 두 번 클릭으로도</a:t>
+              <a:t> 왼쪽 끝에 밀면 판매, 오른쪽 끝에 밀면 구매다. 라벨을 안 읽어도 방향으로 안다. 드래그로도 사고 두 번</a:t>
             </a:r>
           </a:p>
           <a:p>
@@ -16648,7 +17024,26 @@
                 </a:solidFill>
                 <a:latin typeface="맑은 고딕"/>
               </a:rPr>
-              <a:t>사는데, 두 경로가 마지막 한 함수에서 만나므로 「끌어서 산 것」과 「눌러서 산 것」이 다르게 처리될 길이 없다. 판매도 같은 구조다.</a:t>
+              <a:t>클릭으로도 사는데, 두 경로가 마지막 한 함수에서 만나므로 「끌어서 산 것」과 「눌러서 산 것」이 다르게 처리될 길이 없다. 판매도 같은</a:t>
+            </a:r>
+          </a:p>
+          <a:p>
+            <a:pPr>
+              <a:lnSpc>
+                <a:spcPct val="128000"/>
+              </a:lnSpc>
+              <a:spcBef>
+                <a:spcPts val="600"/>
+              </a:spcBef>
+            </a:pPr>
+            <a:r>
+              <a:rPr sz="1100" b="0">
+                <a:solidFill>
+                  <a:srgbClr val="3D394A"/>
+                </a:solidFill>
+                <a:latin typeface="맑은 고딕"/>
+              </a:rPr>
+              <a:t>구조다.</a:t>
             </a:r>
           </a:p>
         </p:txBody>
@@ -17613,13 +18008,22 @@
               </a:lnSpc>
             </a:pPr>
             <a:r>
+              <a:rPr sz="1100" b="1">
+                <a:solidFill>
+                  <a:srgbClr val="1A1822"/>
+                </a:solidFill>
+                <a:latin typeface="맑은 고딕"/>
+              </a:rPr>
+              <a:t>이 값들은 손으로 맞췄다. 실측이 아니다.</a:t>
+            </a:r>
+            <a:r>
               <a:rPr sz="1100" b="0">
                 <a:solidFill>
                   <a:srgbClr val="3D394A"/>
                 </a:solidFill>
                 <a:latin typeface="맑은 고딕"/>
               </a:rPr>
-              <a:t>이 값들은 손으로 맞췄다. 실측이 아니다. 대신 게임 안에서 키로 바꿔 가며 맞출 수 있게 열어 뒀고, 현재 값이 화면 우하단에 항상 표시된다.</a:t>
+              <a:t> 대신 게임 안에서 키로 바꿔 가며 맞출 수 있게 열어 뒀고, 현재 값이 화면 우하단에 항상</a:t>
             </a:r>
           </a:p>
           <a:p>
@@ -17638,7 +18042,7 @@
                 </a:solidFill>
                 <a:latin typeface="맑은 고딕"/>
               </a:rPr>
-              <a:t>감으로 맞춘 값이라는 것은 인정한다. 대신 맞추는 방법은 만들어 뒀다.</a:t>
+              <a:t>표시된다. 감으로 맞춘 값이라는 것은 인정한다. 대신 맞추는 방법은 만들어 뒀다.</a:t>
             </a:r>
           </a:p>
         </p:txBody>
@@ -17956,9 +18360,9 @@
                 <a:tableStyleId>{2D5ABB26-0587-4C30-8999-92F81FD0307C}</a:tableStyleId>
               </a:tblPr>
               <a:tblGrid>
-                <a:gridCol w="670130"/>
-                <a:gridCol w="6023965"/>
-                <a:gridCol w="2861383"/>
+                <a:gridCol w="680169"/>
+                <a:gridCol w="6017159"/>
+                <a:gridCol w="2858150"/>
               </a:tblGrid>
               <a:tr h="297180">
                 <a:tc>
@@ -18115,7 +18519,25 @@
                           </a:solidFill>
                           <a:latin typeface="맑은 고딕"/>
                         </a:rPr>
-                        <a:t>강조색 글자는 화면에 한 줄뿐이다</a:t>
+                        <a:t>강조색 글자는 화면에 </a:t>
+                      </a:r>
+                      <a:r>
+                        <a:rPr sz="1000" b="1">
+                          <a:solidFill>
+                            <a:srgbClr val="1A1822"/>
+                          </a:solidFill>
+                          <a:latin typeface="맑은 고딕"/>
+                        </a:rPr>
+                        <a:t>한 줄뿐</a:t>
+                      </a:r>
+                      <a:r>
+                        <a:rPr sz="1000" b="0">
+                          <a:solidFill>
+                            <a:srgbClr val="3D394A"/>
+                          </a:solidFill>
+                          <a:latin typeface="맑은 고딕"/>
+                        </a:rPr>
+                        <a:t>이다</a:t>
                       </a:r>
                     </a:p>
                   </a:txBody>
@@ -18324,9 +18746,9 @@
               </a:lnSpc>
             </a:pPr>
             <a:r>
-              <a:rPr sz="1100" b="0">
-                <a:solidFill>
-                  <a:srgbClr val="3D394A"/>
+              <a:rPr sz="1100" b="1">
+                <a:solidFill>
+                  <a:srgbClr val="1A1822"/>
                 </a:solidFill>
                 <a:latin typeface="맑은 고딕"/>
               </a:rPr>
@@ -18349,7 +18771,25 @@
                 </a:solidFill>
                 <a:latin typeface="맑은 고딕"/>
               </a:rPr>
-              <a:t>· 조준선. 배경 위에서 가장 밝고 채도가 높다</a:t>
+              <a:t>· </a:t>
+            </a:r>
+            <a:r>
+              <a:rPr sz="1100" b="1">
+                <a:solidFill>
+                  <a:srgbClr val="1A1822"/>
+                </a:solidFill>
+                <a:latin typeface="맑은 고딕"/>
+              </a:rPr>
+              <a:t>조준선.</a:t>
+            </a:r>
+            <a:r>
+              <a:rPr sz="1100" b="0">
+                <a:solidFill>
+                  <a:srgbClr val="3D394A"/>
+                </a:solidFill>
+                <a:latin typeface="맑은 고딕"/>
+              </a:rPr>
+              <a:t> 배경 위에서 가장 밝고 채도가 높다</a:t>
             </a:r>
           </a:p>
           <a:p>
@@ -18368,7 +18808,25 @@
                 </a:solidFill>
                 <a:latin typeface="맑은 고딕"/>
               </a:rPr>
-              <a:t>· 잠긴 축은 즉시 내려앉는다. 좌우를 조준하는 동안 이미 잠근 가로선이 55% 어두워진다. 「이 축은 끝났다」가 밝기 하나로 말해진다</a:t>
+              <a:t>· </a:t>
+            </a:r>
+            <a:r>
+              <a:rPr sz="1100" b="1">
+                <a:solidFill>
+                  <a:srgbClr val="1A1822"/>
+                </a:solidFill>
+                <a:latin typeface="맑은 고딕"/>
+              </a:rPr>
+              <a:t>잠긴 축은 즉시 내려앉는다.</a:t>
+            </a:r>
+            <a:r>
+              <a:rPr sz="1100" b="0">
+                <a:solidFill>
+                  <a:srgbClr val="3D394A"/>
+                </a:solidFill>
+                <a:latin typeface="맑은 고딕"/>
+              </a:rPr>
+              <a:t> 좌우를 조준하는 동안 이미 잠근 가로선이 55% 어두워진다. 「이 축은 끝났다」가 밝기 하나로 말해진다</a:t>
             </a:r>
           </a:p>
           <a:p>
@@ -18387,7 +18845,25 @@
                 </a:solidFill>
                 <a:latin typeface="맑은 고딕"/>
               </a:rPr>
-              <a:t>· 고른 자루. 뽑아 든 것만 밝고 26px 앞으로 나온다. 나머지는 26% 어둡다</a:t>
+              <a:t>· </a:t>
+            </a:r>
+            <a:r>
+              <a:rPr sz="1100" b="1">
+                <a:solidFill>
+                  <a:srgbClr val="1A1822"/>
+                </a:solidFill>
+                <a:latin typeface="맑은 고딕"/>
+              </a:rPr>
+              <a:t>고른 자루.</a:t>
+            </a:r>
+            <a:r>
+              <a:rPr sz="1100" b="0">
+                <a:solidFill>
+                  <a:srgbClr val="3D394A"/>
+                </a:solidFill>
+                <a:latin typeface="맑은 고딕"/>
+              </a:rPr>
+              <a:t> 뽑아 든 것만 밝고 26px 앞으로 나온다. 나머지는 26% 어둡다</a:t>
             </a:r>
           </a:p>
           <a:p>
@@ -18400,13 +18876,22 @@
               </a:spcBef>
             </a:pPr>
             <a:r>
+              <a:rPr sz="1100" b="1">
+                <a:solidFill>
+                  <a:srgbClr val="1A1822"/>
+                </a:solidFill>
+                <a:latin typeface="맑은 고딕"/>
+              </a:rPr>
+              <a:t>안 보이게 눌러 놓은 것.</a:t>
+            </a:r>
+            <a:r>
               <a:rPr sz="1100" b="0">
                 <a:solidFill>
                   <a:srgbClr val="3D394A"/>
                 </a:solidFill>
                 <a:latin typeface="맑은 고딕"/>
               </a:rPr>
-              <a:t>안 보이게 눌러 놓은 것. 칸 숫자 스무 개, 「목표」 라벨, 랙의 조건 태그. 전부 보조색이거나 9~12pt다. 판 위에 있어도 어둡다.</a:t>
+              <a:t> 칸 숫자 스무 개, 「목표」 라벨, 랙의 조건 태그. 전부 보조색이거나 9~12pt다. 판 위에 있어도 어둡다.</a:t>
             </a:r>
           </a:p>
         </p:txBody>
@@ -18857,9 +19342,9 @@
                         </a:lnSpc>
                       </a:pPr>
                       <a:r>
-                        <a:rPr sz="1000" b="0">
-                          <a:solidFill>
-                            <a:srgbClr val="3D394A"/>
+                        <a:rPr sz="1000" b="1">
+                          <a:solidFill>
+                            <a:srgbClr val="1A1822"/>
                           </a:solidFill>
                           <a:latin typeface="맑은 고딕"/>
                         </a:rPr>
@@ -18940,9 +19425,9 @@
                         </a:lnSpc>
                       </a:pPr>
                       <a:r>
-                        <a:rPr sz="1000" b="0">
-                          <a:solidFill>
-                            <a:srgbClr val="3D394A"/>
+                        <a:rPr sz="1000" b="1">
+                          <a:solidFill>
+                            <a:srgbClr val="1A1822"/>
                           </a:solidFill>
                           <a:latin typeface="맑은 고딕"/>
                         </a:rPr>
@@ -19099,9 +19584,9 @@
               </a:lnSpc>
             </a:pPr>
             <a:r>
-              <a:rPr sz="1100" b="0">
-                <a:solidFill>
-                  <a:srgbClr val="3D394A"/>
+              <a:rPr sz="1100" b="1">
+                <a:solidFill>
+                  <a:srgbClr val="1A1822"/>
                 </a:solidFill>
                 <a:latin typeface="맑은 고딕"/>
               </a:rPr>
@@ -19606,9 +20091,9 @@
               </a:lnSpc>
             </a:pPr>
             <a:r>
-              <a:rPr sz="1100" b="0">
-                <a:solidFill>
-                  <a:srgbClr val="3D394A"/>
+              <a:rPr sz="1100" b="1">
+                <a:solidFill>
+                  <a:srgbClr val="1A1822"/>
                 </a:solidFill>
                 <a:latin typeface="맑은 고딕"/>
               </a:rPr>
@@ -19902,13 +20387,22 @@
                         </a:lnSpc>
                       </a:pPr>
                       <a:r>
-                        <a:rPr sz="1000" b="0">
-                          <a:solidFill>
-                            <a:srgbClr val="3D394A"/>
-                          </a:solidFill>
-                          <a:latin typeface="맑은 고딕"/>
-                        </a:rPr>
-                        <a:t>바탕 없이 획과 덩어리만</a:t>
+                        <a:rPr sz="1000" b="1">
+                          <a:solidFill>
+                            <a:srgbClr val="1A1822"/>
+                          </a:solidFill>
+                          <a:latin typeface="맑은 고딕"/>
+                        </a:rPr>
+                        <a:t>바탕 없이</a:t>
+                      </a:r>
+                      <a:r>
+                        <a:rPr sz="1000" b="0">
+                          <a:solidFill>
+                            <a:srgbClr val="3D394A"/>
+                          </a:solidFill>
+                          <a:latin typeface="맑은 고딕"/>
+                        </a:rPr>
+                        <a:t> 획과 덩어리만</a:t>
                       </a:r>
                     </a:p>
                   </a:txBody>
@@ -20014,13 +20508,22 @@
                         </a:lnSpc>
                       </a:pPr>
                       <a:r>
-                        <a:rPr sz="1000" b="0">
-                          <a:solidFill>
-                            <a:srgbClr val="3D394A"/>
-                          </a:solidFill>
-                          <a:latin typeface="맑은 고딕"/>
-                        </a:rPr>
-                        <a:t>직사각 플라크</a:t>
+                        <a:rPr sz="1000" b="1">
+                          <a:solidFill>
+                            <a:srgbClr val="1A1822"/>
+                          </a:solidFill>
+                          <a:latin typeface="맑은 고딕"/>
+                        </a:rPr>
+                        <a:t>직사각</a:t>
+                      </a:r>
+                      <a:r>
+                        <a:rPr sz="1000" b="0">
+                          <a:solidFill>
+                            <a:srgbClr val="3D394A"/>
+                          </a:solidFill>
+                          <a:latin typeface="맑은 고딕"/>
+                        </a:rPr>
+                        <a:t> 플라크</a:t>
                       </a:r>
                     </a:p>
                   </a:txBody>
@@ -20082,13 +20585,22 @@
               </a:spcBef>
             </a:pPr>
             <a:r>
+              <a:rPr sz="1100" b="1">
+                <a:solidFill>
+                  <a:srgbClr val="1A1822"/>
+                </a:solidFill>
+                <a:latin typeface="맑은 고딕"/>
+              </a:rPr>
+              <a:t>서른여덟의 내역.</a:t>
+            </a:r>
+            <a:r>
               <a:rPr sz="1100" b="0">
                 <a:solidFill>
                   <a:srgbClr val="3D394A"/>
                 </a:solidFill>
                 <a:latin typeface="맑은 고딕"/>
               </a:rPr>
-              <a:t>서른여덟의 내역. 조건 도형 19 + 제약 아이콘 6 + 개조 아이콘 8 + 다트 아이콘 5. 칩 26장이 조건 열아홉을 하나도 안 남기고 전부 쓴다.</a:t>
+              <a:t> 조건 도형 19 + 제약 아이콘 6 + 개조 아이콘 8 + 다트 아이콘 5. 칩 26장이 조건 열아홉을 하나도 안 남기고 전부 쓴다.</a:t>
             </a:r>
           </a:p>
           <a:p>
@@ -20101,13 +20613,22 @@
               </a:spcBef>
             </a:pPr>
             <a:r>
+              <a:rPr sz="1100" b="1">
+                <a:solidFill>
+                  <a:srgbClr val="1A1822"/>
+                </a:solidFill>
+                <a:latin typeface="맑은 고딕"/>
+              </a:rPr>
+              <a:t>두 세트가 반대 극성이다.</a:t>
+            </a:r>
+            <a:r>
               <a:rPr sz="1100" b="0">
                 <a:solidFill>
                   <a:srgbClr val="3D394A"/>
                 </a:solidFill>
                 <a:latin typeface="맑은 고딕"/>
               </a:rPr>
-              <a:t>두 세트가 반대 극성이다. 개조 아이콘은 좋아진 곳을 강조색으로 덮고, 제약 아이콘은 나빠진 곳만 손실색으로 칠한다. 제약 세트에는</a:t>
+              <a:t> 개조 아이콘은 좋아진 곳을 강조색으로 덮고, 제약 아이콘은 나빠진 곳만 손실색으로 칠한다. 제약 세트에는</a:t>
             </a:r>
           </a:p>
           <a:p>
@@ -20338,7 +20859,25 @@
                 </a:solidFill>
                 <a:latin typeface="맑은 고딕"/>
               </a:rPr>
-              <a:t>되돌리기가 거의 없는 게임이다. 그래서 실수가 성립하지 않게 만드는 쪽에 붙였다.</a:t>
+              <a:t>되돌리기가 거의 없는 게임이다. 그래서 </a:t>
+            </a:r>
+            <a:r>
+              <a:rPr sz="1150" b="1">
+                <a:solidFill>
+                  <a:srgbClr val="1A1822"/>
+                </a:solidFill>
+                <a:latin typeface="맑은 고딕"/>
+              </a:rPr>
+              <a:t>실수가 성립하지 않게</a:t>
+            </a:r>
+            <a:r>
+              <a:rPr sz="1150" b="0">
+                <a:solidFill>
+                  <a:srgbClr val="3D394A"/>
+                </a:solidFill>
+                <a:latin typeface="맑은 고딕"/>
+              </a:rPr>
+              <a:t> 만드는 쪽에 붙였다.</a:t>
             </a:r>
           </a:p>
         </p:txBody>
@@ -20415,9 +20954,9 @@
               </a:lnSpc>
             </a:pPr>
             <a:r>
-              <a:rPr sz="1100" b="0">
-                <a:solidFill>
-                  <a:srgbClr val="3D394A"/>
+              <a:rPr sz="1100" b="1">
+                <a:solidFill>
+                  <a:srgbClr val="1A1822"/>
                 </a:solidFill>
                 <a:latin typeface="맑은 고딕"/>
               </a:rPr>
@@ -20704,13 +21243,22 @@
               </a:lnSpc>
             </a:pPr>
             <a:r>
+              <a:rPr sz="1100" b="1">
+                <a:solidFill>
+                  <a:srgbClr val="1A1822"/>
+                </a:solidFill>
+                <a:latin typeface="맑은 고딕"/>
+              </a:rPr>
+              <a:t>움직이는 것은 못 누른다.</a:t>
+            </a:r>
+            <a:r>
               <a:rPr sz="1100" b="0">
                 <a:solidFill>
                   <a:srgbClr val="3D394A"/>
                 </a:solidFill>
                 <a:latin typeface="맑은 고딕"/>
               </a:rPr>
-              <a:t>움직이는 것은 못 누른다. 매물이 낙하 중이면 첫 클릭은 「지금 세운다」다. 스테이지 카드는 0.56초 딜링이 끝날 때까지 클릭을 무시한다.</a:t>
+              <a:t> 매물이 낙하 중이면 첫 클릭은 「지금 세운다」다. 스테이지 카드는 0.56초 딜링이 끝날 때까지 클릭을</a:t>
             </a:r>
           </a:p>
           <a:p>
@@ -20729,7 +21277,7 @@
                 </a:solidFill>
                 <a:latin typeface="맑은 고딕"/>
               </a:rPr>
-              <a:t>히트박스는 그림이 앞으로 나와도 제자리에 둔다. 따라가면 커서 끝에서 60Hz로 떤다.</a:t>
+              <a:t>무시한다. 히트박스는 그림이 앞으로 나와도 제자리에 둔다. 따라가면 커서 끝에서 60Hz로 떤다.</a:t>
             </a:r>
           </a:p>
           <a:p>
@@ -20742,13 +21290,40 @@
               </a:spcBef>
             </a:pPr>
             <a:r>
+              <a:rPr sz="1100" b="1">
+                <a:solidFill>
+                  <a:srgbClr val="1A1822"/>
+                </a:solidFill>
+                <a:latin typeface="맑은 고딕"/>
+              </a:rPr>
+              <a:t>탭과 드래그를 가르는 5px.</a:t>
+            </a:r>
+            <a:r>
               <a:rPr sz="1100" b="0">
                 <a:solidFill>
                   <a:srgbClr val="3D394A"/>
                 </a:solidFill>
                 <a:latin typeface="맑은 고딕"/>
               </a:rPr>
-              <a:t>탭과 드래그를 가르는 5px. 판정에 쓰는 값은 현재 거리가 아니다. 누적 최대 거리를 본다. 이 한 줄이 「끌고 갔다 돌아와서 뗌 → 탭</a:t>
+              <a:t> 판정에 쓰는 값은 현재 거리가 아니다. </a:t>
+            </a:r>
+            <a:r>
+              <a:rPr sz="1100" b="1">
+                <a:solidFill>
+                  <a:srgbClr val="1A1822"/>
+                </a:solidFill>
+                <a:latin typeface="맑은 고딕"/>
+              </a:rPr>
+              <a:t>누적 최대 거리</a:t>
+            </a:r>
+            <a:r>
+              <a:rPr sz="1100" b="0">
+                <a:solidFill>
+                  <a:srgbClr val="3D394A"/>
+                </a:solidFill>
+                <a:latin typeface="맑은 고딕"/>
+              </a:rPr>
+              <a:t>를 본다. 이 한 줄이 「끌고 갔다 돌아와서 뗌 → 탭</a:t>
             </a:r>
           </a:p>
           <a:p>
@@ -20863,7 +21438,7 @@
                 </a:solidFill>
                 <a:latin typeface="맑은 고딕"/>
               </a:rPr>
-              <a:t>5장 · 캐릭터 · 유닛 · 아이템 기획</a:t>
+              <a:t>4장 · 조작 방법 및 UI/UX 콘셉트</a:t>
             </a:r>
           </a:p>
         </p:txBody>
@@ -21009,8 +21584,8 @@
                 <a:tableStyleId>{2D5ABB26-0587-4C30-8999-92F81FD0307C}</a:tableStyleId>
               </a:tblPr>
               <a:tblGrid>
-                <a:gridCol w="1990725"/>
-                <a:gridCol w="7564754"/>
+                <a:gridCol w="2234749"/>
+                <a:gridCol w="7320730"/>
               </a:tblGrid>
               <a:tr h="297180">
                 <a:tc>
@@ -21311,7 +21886,25 @@
                 </a:solidFill>
                 <a:latin typeface="맑은 고딕"/>
               </a:rPr>
-              <a:t>목록에서 고르면 매대가 그냥 목록이다. 판 위에 떨어뜨리면 자리가 생긴다. 라운드마다 배치가 달라지는 것도 그래서 값이 있다.</a:t>
+              <a:t>목록에서 고르면 매대가 그냥 목록이다. 판 위에 떨어뜨리면 </a:t>
+            </a:r>
+            <a:r>
+              <a:rPr sz="1050" b="1">
+                <a:solidFill>
+                  <a:srgbClr val="1A1822"/>
+                </a:solidFill>
+                <a:latin typeface="맑은 고딕"/>
+              </a:rPr>
+              <a:t>자리</a:t>
+            </a:r>
+            <a:r>
+              <a:rPr sz="1050" b="0">
+                <a:solidFill>
+                  <a:srgbClr val="1A1822"/>
+                </a:solidFill>
+                <a:latin typeface="맑은 고딕"/>
+              </a:rPr>
+              <a:t>가 생긴다. 라운드마다 배치가 달라지는 것도 그래서 값이 있다.</a:t>
             </a:r>
           </a:p>
         </p:txBody>
@@ -21505,7 +22098,7 @@
         </p:nvGraphicFramePr>
         <p:xfrm>
           <a:off x="566928" y="1280160"/>
-          <a:ext cx="9555479" cy="1485900"/>
+          <a:ext cx="9555478" cy="1485900"/>
         </p:xfrm>
         <a:graphic>
           <a:graphicData uri="http://schemas.openxmlformats.org/drawingml/2006/table">
@@ -21514,9 +22107,9 @@
                 <a:tableStyleId>{2D5ABB26-0587-4C30-8999-92F81FD0307C}</a:tableStyleId>
               </a:tblPr>
               <a:tblGrid>
-                <a:gridCol w="1820091"/>
-                <a:gridCol w="5801541"/>
-                <a:gridCol w="1933847"/>
+                <a:gridCol w="2171700"/>
+                <a:gridCol w="5537834"/>
+                <a:gridCol w="1845944"/>
               </a:tblGrid>
               <a:tr h="297180">
                 <a:tc>
@@ -21965,13 +22558,22 @@
               </a:lnSpc>
             </a:pPr>
             <a:r>
+              <a:rPr sz="1100" b="1">
+                <a:solidFill>
+                  <a:srgbClr val="1A1822"/>
+                </a:solidFill>
+                <a:latin typeface="맑은 고딕"/>
+              </a:rPr>
+              <a:t>딜러의 얼굴은 화면에 안 들어간다.</a:t>
+            </a:r>
+            <a:r>
               <a:rPr sz="1100" b="0">
                 <a:solidFill>
                   <a:srgbClr val="3D394A"/>
                 </a:solidFill>
                 <a:latin typeface="맑은 고딕"/>
               </a:rPr>
-              <a:t>딜러의 얼굴은 화면에 안 들어간다. 화면에서 딜러가 그려질 수 있는 세로는 73px뿐이다. 그 위는 칩 랙이 덮는다. 640×360에서 73px에 얼굴을</a:t>
+              <a:t> 화면에서 딜러가 그려질 수 있는 세로는 73px뿐이다. 그 위는 칩 랙이 덮는다. 640×360에서 73px에</a:t>
             </a:r>
           </a:p>
           <a:p>
@@ -21990,7 +22592,25 @@
                 </a:solidFill>
                 <a:latin typeface="맑은 고딕"/>
               </a:rPr>
-              <a:t>넣으면 눈코입이 각각 1~2px이 되어 얼룩으로 보인다. 그래서 목 위를 랙 뒤로 넣었다. 제약이 그대로 인상이 된다. 손과 몸만 보이는 딜러는</a:t>
+              <a:t>얼굴을 넣으면 눈코입이 각각 1~2px이 되어 얼룩으로 보인다. 그래서 목 위를 랙 뒤로 넣었다. </a:t>
+            </a:r>
+            <a:r>
+              <a:rPr sz="1100" b="1">
+                <a:solidFill>
+                  <a:srgbClr val="1A1822"/>
+                </a:solidFill>
+                <a:latin typeface="맑은 고딕"/>
+              </a:rPr>
+              <a:t>제약이 그대로 인상이 된다.</a:t>
+            </a:r>
+            <a:r>
+              <a:rPr sz="1100" b="0">
+                <a:solidFill>
+                  <a:srgbClr val="3D394A"/>
+                </a:solidFill>
+                <a:latin typeface="맑은 고딕"/>
+              </a:rPr>
+              <a:t> 손과 몸만</a:t>
             </a:r>
           </a:p>
           <a:p>
@@ -22009,7 +22629,7 @@
                 </a:solidFill>
                 <a:latin typeface="맑은 고딕"/>
               </a:rPr>
-              <a:t>표정을 읽을 수 없다.</a:t>
+              <a:t>보이는 딜러는 표정을 읽을 수 없다.</a:t>
             </a:r>
           </a:p>
           <a:p>
@@ -22022,13 +22642,22 @@
               </a:spcBef>
             </a:pPr>
             <a:r>
+              <a:rPr sz="1100" b="1">
+                <a:solidFill>
+                  <a:srgbClr val="1A1822"/>
+                </a:solidFill>
+                <a:latin typeface="맑은 고딕"/>
+              </a:rPr>
+              <a:t>플레이어 캐릭터를 안 만든 이유.</a:t>
+            </a:r>
+            <a:r>
               <a:rPr sz="1100" b="0">
                 <a:solidFill>
                   <a:srgbClr val="3D394A"/>
                 </a:solidFill>
                 <a:latin typeface="맑은 고딕"/>
               </a:rPr>
-              <a:t>플레이어 캐릭터를 안 만든 이유. 이 게임에서 플레이어의 정체는 아무 규칙에도 안 걸린다. 손 하나면 충분하고, 캐릭터를 세우면 그 순간</a:t>
+              <a:t> 이 게임에서 플레이어의 정체는 아무 규칙에도 안 걸린다. 손 하나면 충분하고, 캐릭터를 세우면 그 순간</a:t>
             </a:r>
           </a:p>
           <a:p>
@@ -22143,7 +22772,7 @@
                 </a:solidFill>
                 <a:latin typeface="맑은 고딕"/>
               </a:rPr>
-              <a:t>1장 · 게임 개요</a:t>
+              <a:t>문서</a:t>
             </a:r>
           </a:p>
         </p:txBody>
@@ -22250,9 +22879,9 @@
                 <a:tableStyleId>{2D5ABB26-0587-4C30-8999-92F81FD0307C}</a:tableStyleId>
               </a:tblPr>
               <a:tblGrid>
-                <a:gridCol w="3046674"/>
-                <a:gridCol w="830911"/>
-                <a:gridCol w="5677893"/>
+                <a:gridCol w="3403321"/>
+                <a:gridCol w="785381"/>
+                <a:gridCol w="5366776"/>
               </a:tblGrid>
               <a:tr h="297180">
                 <a:tc>
@@ -23233,7 +23862,7 @@
         </p:nvGraphicFramePr>
         <p:xfrm>
           <a:off x="566928" y="1668780"/>
-          <a:ext cx="9555479" cy="1188720"/>
+          <a:ext cx="9555478" cy="1188720"/>
         </p:xfrm>
         <a:graphic>
           <a:graphicData uri="http://schemas.openxmlformats.org/drawingml/2006/table">
@@ -23242,10 +23871,10 @@
                 <a:tableStyleId>{2D5ABB26-0587-4C30-8999-92F81FD0307C}</a:tableStyleId>
               </a:tblPr>
               <a:tblGrid>
-                <a:gridCol w="652821"/>
-                <a:gridCol w="652821"/>
-                <a:gridCol w="5394124"/>
-                <a:gridCol w="2855713"/>
+                <a:gridCol w="790146"/>
+                <a:gridCol w="666331"/>
+                <a:gridCol w="5432257"/>
+                <a:gridCol w="2666744"/>
               </a:tblGrid>
               <a:tr h="297180">
                 <a:tc>
@@ -23423,13 +24052,22 @@
                         </a:lnSpc>
                       </a:pPr>
                       <a:r>
-                        <a:rPr sz="1000" b="0">
-                          <a:solidFill>
-                            <a:srgbClr val="3D394A"/>
-                          </a:solidFill>
-                          <a:latin typeface="맑은 고딕"/>
-                        </a:rPr>
-                        <a:t>어디를 노릴지를 바꾼다. 조건과 효과의 짝이다</a:t>
+                        <a:rPr sz="1000" b="1">
+                          <a:solidFill>
+                            <a:srgbClr val="1A1822"/>
+                          </a:solidFill>
+                          <a:latin typeface="맑은 고딕"/>
+                        </a:rPr>
+                        <a:t>어디를 노릴지</a:t>
+                      </a:r>
+                      <a:r>
+                        <a:rPr sz="1000" b="0">
+                          <a:solidFill>
+                            <a:srgbClr val="3D394A"/>
+                          </a:solidFill>
+                          <a:latin typeface="맑은 고딕"/>
+                        </a:rPr>
+                        <a:t>를 바꾼다. 조건과 효과의 짝이다</a:t>
                       </a:r>
                     </a:p>
                   </a:txBody>
@@ -23533,13 +24171,22 @@
                         </a:lnSpc>
                       </a:pPr>
                       <a:r>
-                        <a:rPr sz="1000" b="0">
-                          <a:solidFill>
-                            <a:srgbClr val="3D394A"/>
-                          </a:solidFill>
-                          <a:latin typeface="맑은 고딕"/>
-                        </a:rPr>
-                        <a:t>판이 읽는 값 자체를 바꾼다. 판의 모양이 달라진다</a:t>
+                        <a:rPr sz="1000" b="1">
+                          <a:solidFill>
+                            <a:srgbClr val="1A1822"/>
+                          </a:solidFill>
+                          <a:latin typeface="맑은 고딕"/>
+                        </a:rPr>
+                        <a:t>판이 읽는 값 자체</a:t>
+                      </a:r>
+                      <a:r>
+                        <a:rPr sz="1000" b="0">
+                          <a:solidFill>
+                            <a:srgbClr val="3D394A"/>
+                          </a:solidFill>
+                          <a:latin typeface="맑은 고딕"/>
+                        </a:rPr>
+                        <a:t>를 바꾼다. 판의 모양이 달라진다</a:t>
                       </a:r>
                     </a:p>
                   </a:txBody>
@@ -23643,13 +24290,22 @@
                         </a:lnSpc>
                       </a:pPr>
                       <a:r>
-                        <a:rPr sz="1000" b="0">
-                          <a:solidFill>
-                            <a:srgbClr val="3D394A"/>
-                          </a:solidFill>
-                          <a:latin typeface="맑은 고딕"/>
-                        </a:rPr>
-                        <a:t>던지는 감각을 바꾼다. 게이지 속도와 배수를 맞바꾼다</a:t>
+                        <a:rPr sz="1000" b="1">
+                          <a:solidFill>
+                            <a:srgbClr val="1A1822"/>
+                          </a:solidFill>
+                          <a:latin typeface="맑은 고딕"/>
+                        </a:rPr>
+                        <a:t>던지는 감각</a:t>
+                      </a:r>
+                      <a:r>
+                        <a:rPr sz="1000" b="0">
+                          <a:solidFill>
+                            <a:srgbClr val="3D394A"/>
+                          </a:solidFill>
+                          <a:latin typeface="맑은 고딕"/>
+                        </a:rPr>
+                        <a:t>을 바꾼다. 게이지 속도와 배수를 맞바꾼다</a:t>
                       </a:r>
                     </a:p>
                   </a:txBody>
@@ -23719,13 +24375,22 @@
               </a:lnSpc>
             </a:pPr>
             <a:r>
+              <a:rPr sz="1100" b="1">
+                <a:solidFill>
+                  <a:srgbClr val="1A1822"/>
+                </a:solidFill>
+                <a:latin typeface="맑은 고딕"/>
+              </a:rPr>
+              <a:t>세 축을 같은 자로 잰다.</a:t>
+            </a:r>
+            <a:r>
               <a:rPr sz="1100" b="0">
                 <a:solidFill>
                   <a:srgbClr val="3D394A"/>
                 </a:solidFill>
                 <a:latin typeface="맑은 고딕"/>
               </a:rPr>
-              <a:t>세 축을 같은 자로 잰다. 판값(board_val)이 균등 조준 다트당 기대 점수를 면적 적분으로 낸다. 개조 하나를 사면 칩 26종의 값어치가 전부</a:t>
+              <a:t> 판값(board_val)이 균등 조준 다트당 기대 점수를 면적 적분으로 낸다. 개조 하나를 사면 칩 26종의 값어치가</a:t>
             </a:r>
           </a:p>
           <a:p>
@@ -23744,7 +24409,7 @@
                 </a:solidFill>
                 <a:latin typeface="맑은 고딕"/>
               </a:rPr>
-              <a:t>조금씩 움직인다. 이 값이 이 게임의 밸런스 통화다.</a:t>
+              <a:t>전부 조금씩 움직인다. 이 값이 이 게임의 밸런스 통화다.</a:t>
             </a:r>
           </a:p>
         </p:txBody>
@@ -23759,7 +24424,7 @@
         </p:nvGraphicFramePr>
         <p:xfrm>
           <a:off x="566928" y="3525012"/>
-          <a:ext cx="9555478" cy="594360"/>
+          <a:ext cx="9555479" cy="594360"/>
         </p:xfrm>
         <a:graphic>
           <a:graphicData uri="http://schemas.openxmlformats.org/drawingml/2006/table">
@@ -23768,9 +24433,9 @@
                 <a:tableStyleId>{2D5ABB26-0587-4C30-8999-92F81FD0307C}</a:tableStyleId>
               </a:tblPr>
               <a:tblGrid>
-                <a:gridCol w="1592579"/>
-                <a:gridCol w="2787014"/>
-                <a:gridCol w="5175885"/>
+                <a:gridCol w="1274064"/>
+                <a:gridCol w="2866644"/>
+                <a:gridCol w="5414771"/>
               </a:tblGrid>
               <a:tr h="297180">
                 <a:tc>
@@ -23894,9 +24559,9 @@
                         </a:lnSpc>
                       </a:pPr>
                       <a:r>
-                        <a:rPr sz="1000" b="0">
-                          <a:solidFill>
-                            <a:srgbClr val="3D394A"/>
+                        <a:rPr sz="1000" b="1">
+                          <a:solidFill>
+                            <a:srgbClr val="1A1822"/>
                           </a:solidFill>
                           <a:latin typeface="맑은 고딕"/>
                         </a:rPr>
@@ -23921,13 +24586,22 @@
                         </a:lnSpc>
                       </a:pPr>
                       <a:r>
-                        <a:rPr sz="1000" b="0">
-                          <a:solidFill>
-                            <a:srgbClr val="3D394A"/>
-                          </a:solidFill>
-                          <a:latin typeface="맑은 고딕"/>
-                        </a:rPr>
-                        <a:t>23.15 (×1.50)</a:t>
+                        <a:rPr sz="1000" b="1">
+                          <a:solidFill>
+                            <a:srgbClr val="1A1822"/>
+                          </a:solidFill>
+                          <a:latin typeface="맑은 고딕"/>
+                        </a:rPr>
+                        <a:t>23.15</a:t>
+                      </a:r>
+                      <a:r>
+                        <a:rPr sz="1000" b="0">
+                          <a:solidFill>
+                            <a:srgbClr val="3D394A"/>
+                          </a:solidFill>
+                          <a:latin typeface="맑은 고딕"/>
+                        </a:rPr>
+                        <a:t> (×1.50)</a:t>
                       </a:r>
                     </a:p>
                   </a:txBody>
@@ -24111,7 +24785,43 @@
                 </a:solidFill>
                 <a:latin typeface="맑은 고딕"/>
               </a:rPr>
-              <a:t>칩 한 장은 「언제 걸리는가」와 「무엇을 하는가」 두 조각이다.</a:t>
+              <a:t>칩 한 장은 </a:t>
+            </a:r>
+            <a:r>
+              <a:rPr sz="1150" b="1">
+                <a:solidFill>
+                  <a:srgbClr val="1A1822"/>
+                </a:solidFill>
+                <a:latin typeface="맑은 고딕"/>
+              </a:rPr>
+              <a:t>「언제 걸리는가」</a:t>
+            </a:r>
+            <a:r>
+              <a:rPr sz="1150" b="0">
+                <a:solidFill>
+                  <a:srgbClr val="3D394A"/>
+                </a:solidFill>
+                <a:latin typeface="맑은 고딕"/>
+              </a:rPr>
+              <a:t>와 </a:t>
+            </a:r>
+            <a:r>
+              <a:rPr sz="1150" b="1">
+                <a:solidFill>
+                  <a:srgbClr val="1A1822"/>
+                </a:solidFill>
+                <a:latin typeface="맑은 고딕"/>
+              </a:rPr>
+              <a:t>「무엇을 하는가」</a:t>
+            </a:r>
+            <a:r>
+              <a:rPr sz="1150" b="0">
+                <a:solidFill>
+                  <a:srgbClr val="3D394A"/>
+                </a:solidFill>
+                <a:latin typeface="맑은 고딕"/>
+              </a:rPr>
+              <a:t> 두 조각이다.</a:t>
             </a:r>
           </a:p>
         </p:txBody>
@@ -24323,9 +25033,9 @@
               </a:lnSpc>
             </a:pPr>
             <a:r>
-              <a:rPr sz="1100" b="0">
-                <a:solidFill>
-                  <a:srgbClr val="3D394A"/>
+              <a:rPr sz="1100" b="1">
+                <a:solidFill>
+                  <a:srgbClr val="1A1822"/>
                 </a:solidFill>
                 <a:latin typeface="맑은 고딕"/>
               </a:rPr>
@@ -24780,9 +25490,9 @@
               </a:lnSpc>
             </a:pPr>
             <a:r>
-              <a:rPr sz="1100" b="0">
-                <a:solidFill>
-                  <a:srgbClr val="3D394A"/>
+              <a:rPr sz="1100" b="1">
+                <a:solidFill>
+                  <a:srgbClr val="1A1822"/>
                 </a:solidFill>
                 <a:latin typeface="맑은 고딕"/>
               </a:rPr>
@@ -24810,9 +25520,9 @@
                 <a:tableStyleId>{2D5ABB26-0587-4C30-8999-92F81FD0307C}</a:tableStyleId>
               </a:tblPr>
               <a:tblGrid>
-                <a:gridCol w="2627757"/>
-                <a:gridCol w="5972175"/>
-                <a:gridCol w="955547"/>
+                <a:gridCol w="2388870"/>
+                <a:gridCol w="6297929"/>
+                <a:gridCol w="868680"/>
               </a:tblGrid>
               <a:tr h="297180">
                 <a:tc>
@@ -25108,7 +25818,25 @@
                           </a:solidFill>
                           <a:latin typeface="맑은 고딕"/>
                         </a:rPr>
-                        <a:t>배수에 곱한다. 두 번째 층</a:t>
+                        <a:t>배수에 </a:t>
+                      </a:r>
+                      <a:r>
+                        <a:rPr sz="1000" b="1">
+                          <a:solidFill>
+                            <a:srgbClr val="1A1822"/>
+                          </a:solidFill>
+                          <a:latin typeface="맑은 고딕"/>
+                        </a:rPr>
+                        <a:t>곱한다.</a:t>
+                      </a:r>
+                      <a:r>
+                        <a:rPr sz="1000" b="0">
+                          <a:solidFill>
+                            <a:srgbClr val="3D394A"/>
+                          </a:solidFill>
+                          <a:latin typeface="맑은 고딕"/>
+                        </a:rPr>
+                        <a:t> 두 번째 층</a:t>
                       </a:r>
                     </a:p>
                   </a:txBody>
@@ -25402,7 +26130,7 @@
                 </a:solidFill>
                 <a:latin typeface="맑은 고딕"/>
               </a:rPr>
-              <a:t>판정 함수가 아는 술어 전부다. 오른쪽 수치는 기본 판에서 다트 한 발이 그 조건에 걸릴 확률이다. 36만 발을 실제 판정</a:t>
+              <a:t>판정 함수가 아는 술어 전부다. 오른쪽 수치는 기본 판에서 다트 한 발이 그 조건에 걸릴 확률이다. **36만 발을 실제 판정</a:t>
             </a:r>
           </a:p>
           <a:p>
@@ -25418,7 +26146,7 @@
                 </a:solidFill>
                 <a:latin typeface="맑은 고딕"/>
               </a:rPr>
-              <a:t>함수로 돌려 잰 값이다.</a:t>
+              <a:t>함수로 돌려 잰 값이다.**</a:t>
             </a:r>
           </a:p>
         </p:txBody>
@@ -26733,9 +27461,9 @@
               </a:lnSpc>
             </a:pPr>
             <a:r>
-              <a:rPr sz="1100" b="0">
-                <a:solidFill>
-                  <a:srgbClr val="3D394A"/>
+              <a:rPr sz="1100" b="1">
+                <a:solidFill>
+                  <a:srgbClr val="1A1822"/>
                 </a:solidFill>
                 <a:latin typeface="맑은 고딕"/>
               </a:rPr>
@@ -26758,7 +27486,25 @@
                 </a:solidFill>
                 <a:latin typeface="맑은 고딕"/>
               </a:rPr>
-              <a:t>· 왼쪽 31.05 + 오른쪽 31.19 = 62.24. 「무조건」과 소수점까지 같은 값이다. 두 장을 같이 사면 조건 없는 칩 두 장이 된다</a:t>
+              <a:t>· 왼쪽 31.05 + 오른쪽 31.19 = 62.24. </a:t>
+            </a:r>
+            <a:r>
+              <a:rPr sz="1100" b="1">
+                <a:solidFill>
+                  <a:srgbClr val="1A1822"/>
+                </a:solidFill>
+                <a:latin typeface="맑은 고딕"/>
+              </a:rPr>
+              <a:t>「무조건」과 소수점까지 같은 값이다.</a:t>
+            </a:r>
+            <a:r>
+              <a:rPr sz="1100" b="0">
+                <a:solidFill>
+                  <a:srgbClr val="3D394A"/>
+                </a:solidFill>
+                <a:latin typeface="맑은 고딕"/>
+              </a:rPr>
+              <a:t> 두 장을 같이 사면 조건 없는 칩 두 장이 된다</a:t>
             </a:r>
           </a:p>
           <a:p>
@@ -26777,7 +27523,25 @@
                 </a:solidFill>
                 <a:latin typeface="맑은 고딕"/>
               </a:rPr>
-              <a:t>· 홀수 30.57 + 짝수 30.50 = 61.07. 무조건보다 1.17%p 낮은 것은 불(25·50)이 홀수도 짝수도 아니기 때문이다</a:t>
+              <a:t>· 홀수 30.57 + 짝수 30.50 = 61.07. 무조건보다 1.17%p 낮은 것은 </a:t>
+            </a:r>
+            <a:r>
+              <a:rPr sz="1100" b="1">
+                <a:solidFill>
+                  <a:srgbClr val="1A1822"/>
+                </a:solidFill>
+                <a:latin typeface="맑은 고딕"/>
+              </a:rPr>
+              <a:t>불(25·50)이 홀수도 짝수도 아니기 때문</a:t>
+            </a:r>
+            <a:r>
+              <a:rPr sz="1100" b="0">
+                <a:solidFill>
+                  <a:srgbClr val="3D394A"/>
+                </a:solidFill>
+                <a:latin typeface="맑은 고딕"/>
+              </a:rPr>
+              <a:t>이다</a:t>
             </a:r>
           </a:p>
           <a:p>
@@ -26796,7 +27560,25 @@
                 </a:solidFill>
                 <a:latin typeface="맑은 고딕"/>
               </a:rPr>
-              <a:t>· 조건 열아홉 중 죽은 것이 하나도 없다. 26장이 열아홉을 나눠 쓴다</a:t>
+              <a:t>· </a:t>
+            </a:r>
+            <a:r>
+              <a:rPr sz="1100" b="1">
+                <a:solidFill>
+                  <a:srgbClr val="1A1822"/>
+                </a:solidFill>
+                <a:latin typeface="맑은 고딕"/>
+              </a:rPr>
+              <a:t>조건 열아홉 중 죽은 것이 하나도 없다.</a:t>
+            </a:r>
+            <a:r>
+              <a:rPr sz="1100" b="0">
+                <a:solidFill>
+                  <a:srgbClr val="3D394A"/>
+                </a:solidFill>
+                <a:latin typeface="맑은 고딕"/>
+              </a:rPr>
+              <a:t> 26장이 열아홉을 나눠 쓴다</a:t>
             </a:r>
           </a:p>
           <a:p>
@@ -26815,7 +27597,25 @@
                 </a:solidFill>
                 <a:latin typeface="맑은 고딕"/>
               </a:rPr>
-              <a:t>· 「같은 칸 연속」과 「연속 명중」은 같은 술어다. 포함관계 표에 서로를 담는다고 적혀 있고, 발동률도 둘 다 1.58%다. 그런데 값이 7골드와</a:t>
+              <a:t>· 「같은 칸 연속」과 「연속 명중」은 </a:t>
+            </a:r>
+            <a:r>
+              <a:rPr sz="1100" b="1">
+                <a:solidFill>
+                  <a:srgbClr val="1A1822"/>
+                </a:solidFill>
+                <a:latin typeface="맑은 고딕"/>
+              </a:rPr>
+              <a:t>같은 술어다.</a:t>
+            </a:r>
+            <a:r>
+              <a:rPr sz="1100" b="0">
+                <a:solidFill>
+                  <a:srgbClr val="3D394A"/>
+                </a:solidFill>
+                <a:latin typeface="맑은 고딕"/>
+              </a:rPr>
+              <a:t> 포함관계 표에 서로를 담는다고 적혀 있고, 발동률도 둘 다 1.58%다. 그런데 값이</a:t>
             </a:r>
           </a:p>
           <a:p>
@@ -26834,7 +27634,7 @@
                 </a:solidFill>
                 <a:latin typeface="맑은 고딕"/>
               </a:rPr>
-              <a:t>11골드다</a:t>
+              <a:t>7골드와 11골드다</a:t>
             </a:r>
           </a:p>
         </p:txBody>
@@ -32713,13 +33513,22 @@
               </a:lnSpc>
             </a:pPr>
             <a:r>
+              <a:rPr sz="1100" b="1">
+                <a:solidFill>
+                  <a:srgbClr val="1A1822"/>
+                </a:solidFill>
+                <a:latin typeface="맑은 고딕"/>
+              </a:rPr>
+              <a:t>정밀(기여 0.52)과 기본기(22.31)는 43배 차이다.</a:t>
+            </a:r>
+            <a:r>
               <a:rPr sz="1100" b="0">
                 <a:solidFill>
                   <a:srgbClr val="3D394A"/>
                 </a:solidFill>
                 <a:latin typeface="맑은 고딕"/>
               </a:rPr>
-              <a:t>정밀(기여 0.52)과 기본기(22.31)는 43배 차이다. 밸런스가 깨진 값은 아니다. 측정 모형의 한계다. 「연속 명중」은 균등 조준이 같은 칸을</a:t>
+              <a:t> 밸런스가 깨진 값은 아니다. 측정 모형의 한계다. 「연속 명중」은 균등 조준이 같은</a:t>
             </a:r>
           </a:p>
           <a:p>
@@ -32738,7 +33547,7 @@
                 </a:solidFill>
                 <a:latin typeface="맑은 고딕"/>
               </a:rPr>
-              <a:t>연달아 못 맞히기 때문에 거의 안 걸린다. 한 섹터를 겨냥하는 실제 플레이에서는 값이 완전히 달라진다.</a:t>
+              <a:t>칸을 연달아 못 맞히기 때문에 거의 안 걸린다. 한 섹터를 겨냥하는 실제 플레이에서는 값이 완전히 달라진다.</a:t>
             </a:r>
           </a:p>
         </p:txBody>
@@ -32912,7 +33721,7 @@
                 </a:solidFill>
                 <a:latin typeface="맑은 고딕"/>
               </a:rPr>
-              <a:t>득점 반쪽을 깎고 정산에서 골드를 받는다. 다섯 장 모두 같은 조건의 다른 칩보다 득점이 낮고, 그 차액이 골드의</a:t>
+              <a:t>득점 반쪽을 깎고 정산에서 골드를 받는다. 다섯 장 모두 같은 조건의 다른 칩보다 득점이 낮고, **그 차액이 골드의</a:t>
             </a:r>
           </a:p>
           <a:p>
@@ -32928,7 +33737,7 @@
                 </a:solidFill>
                 <a:latin typeface="맑은 고딕"/>
               </a:rPr>
-              <a:t>가격이다.</a:t>
+              <a:t>가격이다.**</a:t>
             </a:r>
           </a:p>
         </p:txBody>
@@ -34019,13 +34828,22 @@
               </a:lnSpc>
             </a:pPr>
             <a:r>
+              <a:rPr sz="1100" b="1">
+                <a:solidFill>
+                  <a:srgbClr val="1A1822"/>
+                </a:solidFill>
+                <a:latin typeface="맑은 고딕"/>
+              </a:rPr>
+              <a:t>비교.</a:t>
+            </a:r>
+            <a:r>
               <a:rPr sz="1100" b="0">
                 <a:solidFill>
                   <a:srgbClr val="3D394A"/>
                 </a:solidFill>
                 <a:latin typeface="맑은 고딕"/>
               </a:rPr>
-              <a:t>비교. 같은 「무조건」 조건에서 기본기는 점수 +25인데 물주는 +16이다. 9점의 차이가 골드 수입의 값이다.</a:t>
+              <a:t> 같은 「무조건」 조건에서 기본기는 점수 +25인데 물주는 +16이다. 9점의 차이가 골드 수입의 값이다.</a:t>
             </a:r>
           </a:p>
         </p:txBody>
@@ -34275,7 +35093,25 @@
                 </a:solidFill>
                 <a:latin typeface="맑은 고딕"/>
               </a:rPr>
-              <a:t>조건이 넓고 값이 작은 칩과 좁고 큰 칩을 같은 자로 재기 위해, 실제 판정 함수에 36만 발을 통과시켜 칩마다 두 수를</a:t>
+              <a:t>조건이 넓고 값이 작은 칩과 좁고 큰 칩을 같은 자로 재기 위해, 실제 판정 함수에 </a:t>
+            </a:r>
+            <a:r>
+              <a:rPr sz="1150" b="1">
+                <a:solidFill>
+                  <a:srgbClr val="1A1822"/>
+                </a:solidFill>
+                <a:latin typeface="맑은 고딕"/>
+              </a:rPr>
+              <a:t>36만 발</a:t>
+            </a:r>
+            <a:r>
+              <a:rPr sz="1150" b="0">
+                <a:solidFill>
+                  <a:srgbClr val="3D394A"/>
+                </a:solidFill>
+                <a:latin typeface="맑은 고딕"/>
+              </a:rPr>
+              <a:t>을 통과시켜 칩마다 두 수를</a:t>
             </a:r>
           </a:p>
           <a:p>
@@ -34359,8 +35195,8 @@
                 <a:tableStyleId>{2D5ABB26-0587-4C30-8999-92F81FD0307C}</a:tableStyleId>
               </a:tblPr>
               <a:tblGrid>
-                <a:gridCol w="1642348"/>
-                <a:gridCol w="7913131"/>
+                <a:gridCol w="2107826"/>
+                <a:gridCol w="7447653"/>
               </a:tblGrid>
               <a:tr h="297180">
                 <a:tc>
@@ -34562,9 +35398,9 @@
               </a:lnSpc>
             </a:pPr>
             <a:r>
-              <a:rPr sz="1100" b="0">
-                <a:solidFill>
-                  <a:srgbClr val="3D394A"/>
+              <a:rPr sz="1100" b="1">
+                <a:solidFill>
+                  <a:srgbClr val="1A1822"/>
                 </a:solidFill>
                 <a:latin typeface="맑은 고딕"/>
               </a:rPr>
@@ -34587,7 +35423,25 @@
                 </a:solidFill>
                 <a:latin typeface="맑은 고딕"/>
               </a:rPr>
-              <a:t>· 칩은 한 장만 든다. 조합 효과는 이 표에 안 들어 있다</a:t>
+              <a:t>· </a:t>
+            </a:r>
+            <a:r>
+              <a:rPr sz="1100" b="1">
+                <a:solidFill>
+                  <a:srgbClr val="1A1822"/>
+                </a:solidFill>
+                <a:latin typeface="맑은 고딕"/>
+              </a:rPr>
+              <a:t>칩은 한 장만 든다.</a:t>
+            </a:r>
+            <a:r>
+              <a:rPr sz="1100" b="0">
+                <a:solidFill>
+                  <a:srgbClr val="3D394A"/>
+                </a:solidFill>
+                <a:latin typeface="맑은 고딕"/>
+              </a:rPr>
+              <a:t> 조합 효과는 이 표에 안 들어 있다</a:t>
             </a:r>
           </a:p>
           <a:p>
@@ -34606,7 +35460,25 @@
                 </a:solidFill>
                 <a:latin typeface="맑은 고딕"/>
               </a:rPr>
-              <a:t>· 균등 조준. 착탄점이 조준 사각형 위에 고르게 분포한다고 본다</a:t>
+              <a:t>· </a:t>
+            </a:r>
+            <a:r>
+              <a:rPr sz="1100" b="1">
+                <a:solidFill>
+                  <a:srgbClr val="1A1822"/>
+                </a:solidFill>
+                <a:latin typeface="맑은 고딕"/>
+              </a:rPr>
+              <a:t>균등 조준.</a:t>
+            </a:r>
+            <a:r>
+              <a:rPr sz="1100" b="0">
+                <a:solidFill>
+                  <a:srgbClr val="3D394A"/>
+                </a:solidFill>
+                <a:latin typeface="맑은 고딕"/>
+              </a:rPr>
+              <a:t> 착탄점이 조준 사각형 위에 고르게 분포한다고 본다</a:t>
             </a:r>
           </a:p>
           <a:p>
@@ -34625,7 +35497,25 @@
                 </a:solidFill>
                 <a:latin typeface="맑은 고딕"/>
               </a:rPr>
-              <a:t>· 기본 판. 개조가 하나도 안 붙은 상태다</a:t>
+              <a:t>· </a:t>
+            </a:r>
+            <a:r>
+              <a:rPr sz="1100" b="1">
+                <a:solidFill>
+                  <a:srgbClr val="1A1822"/>
+                </a:solidFill>
+                <a:latin typeface="맑은 고딕"/>
+              </a:rPr>
+              <a:t>기본 판.</a:t>
+            </a:r>
+            <a:r>
+              <a:rPr sz="1100" b="0">
+                <a:solidFill>
+                  <a:srgbClr val="3D394A"/>
+                </a:solidFill>
+                <a:latin typeface="맑은 고딕"/>
+              </a:rPr>
+              <a:t> 개조가 하나도 안 붙은 상태다</a:t>
             </a:r>
           </a:p>
           <a:p>
@@ -34644,7 +35534,25 @@
                 </a:solidFill>
                 <a:latin typeface="맑은 고딕"/>
               </a:rPr>
-              <a:t>세 전제가 모두 실제 플레이와 다르다. 이 표는 칩끼리 비교할 때만 쓴다.</a:t>
+              <a:t>세 전제가 모두 실제 플레이와 다르다. 이 표는 </a:t>
+            </a:r>
+            <a:r>
+              <a:rPr sz="1100" b="1">
+                <a:solidFill>
+                  <a:srgbClr val="1A1822"/>
+                </a:solidFill>
+                <a:latin typeface="맑은 고딕"/>
+              </a:rPr>
+              <a:t>칩끼리 비교할 때만</a:t>
+            </a:r>
+            <a:r>
+              <a:rPr sz="1100" b="0">
+                <a:solidFill>
+                  <a:srgbClr val="3D394A"/>
+                </a:solidFill>
+                <a:latin typeface="맑은 고딕"/>
+              </a:rPr>
+              <a:t> 쓴다.</a:t>
             </a:r>
           </a:p>
         </p:txBody>
@@ -34818,7 +35726,16 @@
                 </a:solidFill>
                 <a:latin typeface="맑은 고딕"/>
               </a:rPr>
-              <a:t>조건 열아홉을 서로 곱해 보면 171쌍 중 38쌍(22%)이 영원히 안 만난다.</a:t>
+              <a:t>조건 열아홉을 서로 곱해 보면 </a:t>
+            </a:r>
+            <a:r>
+              <a:rPr sz="1150" b="1">
+                <a:solidFill>
+                  <a:srgbClr val="1A1822"/>
+                </a:solidFill>
+                <a:latin typeface="맑은 고딕"/>
+              </a:rPr>
+              <a:t>171쌍 중 38쌍(22%)이 영원히 안 만난다.</a:t>
             </a:r>
           </a:p>
         </p:txBody>
@@ -35257,9 +36174,9 @@
               </a:lnSpc>
             </a:pPr>
             <a:r>
-              <a:rPr sz="1100" b="0">
-                <a:solidFill>
-                  <a:srgbClr val="3D394A"/>
+              <a:rPr sz="1100" b="1">
+                <a:solidFill>
+                  <a:srgbClr val="1A1822"/>
                 </a:solidFill>
                 <a:latin typeface="맑은 고딕"/>
               </a:rPr>
@@ -35287,8 +36204,8 @@
                 <a:tableStyleId>{2D5ABB26-0587-4C30-8999-92F81FD0307C}</a:tableStyleId>
               </a:tblPr>
               <a:tblGrid>
-                <a:gridCol w="6615332"/>
-                <a:gridCol w="2940147"/>
+                <a:gridCol w="6142808"/>
+                <a:gridCol w="3412671"/>
               </a:tblGrid>
               <a:tr h="297180">
                 <a:tc>
@@ -35497,9 +36414,9 @@
                         </a:lnSpc>
                       </a:pPr>
                       <a:r>
-                        <a:rPr sz="1000" b="0">
-                          <a:solidFill>
-                            <a:srgbClr val="3D394A"/>
+                        <a:rPr sz="1000" b="1">
+                          <a:solidFill>
+                            <a:srgbClr val="1A1822"/>
                           </a:solidFill>
                           <a:latin typeface="맑은 고딕"/>
                         </a:rPr>
@@ -35602,13 +36519,22 @@
               </a:lnSpc>
             </a:pPr>
             <a:r>
+              <a:rPr sz="1100" b="1">
+                <a:solidFill>
+                  <a:srgbClr val="1A1822"/>
+                </a:solidFill>
+                <a:latin typeface="맑은 고딕"/>
+              </a:rPr>
+              <a:t>판이 좌우 대칭이 아니다.</a:t>
+            </a:r>
+            <a:r>
               <a:rPr sz="1100" b="0">
                 <a:solidFill>
                   <a:srgbClr val="3D394A"/>
                 </a:solidFill>
                 <a:latin typeface="맑은 고딕"/>
               </a:rPr>
-              <a:t>판이 좌우 대칭이 아니다. 칸 배치 때문에 왼쪽 절반은 중물이 60%, 오른쪽 절반은 대물 35% · 소물 35%다. 좌익수와 중물은 같은 조준선을</a:t>
+              <a:t> 칸 배치 때문에 왼쪽 절반은 중물이 60%, 오른쪽 절반은 대물 35% · 소물 35%다. **좌익수와 중물은 같은</a:t>
             </a:r>
           </a:p>
           <a:p>
@@ -35627,7 +36553,25 @@
                 </a:solidFill>
                 <a:latin typeface="맑은 고딕"/>
               </a:rPr>
-              <a:t>쓴다. 그리고 큰 칸의 이웃은 작은 칸이다. 20의 이웃은 1과 5다. 대물을 노리면 소물이 터진다.</a:t>
+              <a:t>조준선을 쓴다.</a:t>
+            </a:r>
+            <a:r>
+              <a:rPr sz="1100" b="1">
+                <a:solidFill>
+                  <a:srgbClr val="1A1822"/>
+                </a:solidFill>
+                <a:latin typeface="맑은 고딕"/>
+              </a:rPr>
+              <a:t> 그리고 큰 칸의 이웃은 작은 칸이다. 20의 이웃은 1과 5다. </a:t>
+            </a:r>
+            <a:r>
+              <a:rPr sz="1100" b="0">
+                <a:solidFill>
+                  <a:srgbClr val="3D394A"/>
+                </a:solidFill>
+                <a:latin typeface="맑은 고딕"/>
+              </a:rPr>
+              <a:t>대물을 노리면 소물이 터진다.**</a:t>
             </a:r>
           </a:p>
         </p:txBody>
@@ -35860,7 +36804,7 @@
         </p:nvGraphicFramePr>
         <p:xfrm>
           <a:off x="566928" y="1668780"/>
-          <a:ext cx="9555478" cy="1783080"/>
+          <a:ext cx="9555477" cy="1783080"/>
         </p:xfrm>
         <a:graphic>
           <a:graphicData uri="http://schemas.openxmlformats.org/drawingml/2006/table">
@@ -35869,12 +36813,12 @@
                 <a:tableStyleId>{2D5ABB26-0587-4C30-8999-92F81FD0307C}</a:tableStyleId>
               </a:tblPr>
               <a:tblGrid>
-                <a:gridCol w="852124"/>
-                <a:gridCol w="3976580"/>
-                <a:gridCol w="659139"/>
-                <a:gridCol w="659139"/>
-                <a:gridCol w="2177650"/>
-                <a:gridCol w="1230846"/>
+                <a:gridCol w="1172692"/>
+                <a:gridCol w="3788698"/>
+                <a:gridCol w="673316"/>
+                <a:gridCol w="673316"/>
+                <a:gridCol w="2074763"/>
+                <a:gridCol w="1172692"/>
               </a:tblGrid>
               <a:tr h="297180">
                 <a:tc>
@@ -36133,9 +37077,9 @@
                         </a:lnSpc>
                       </a:pPr>
                       <a:r>
-                        <a:rPr sz="1000" b="0">
-                          <a:solidFill>
-                            <a:srgbClr val="3D394A"/>
+                        <a:rPr sz="1000" b="1">
+                          <a:solidFill>
+                            <a:srgbClr val="1A1822"/>
                           </a:solidFill>
                           <a:latin typeface="맑은 고딕"/>
                         </a:rPr>
@@ -36434,9 +37378,9 @@
                         </a:lnSpc>
                       </a:pPr>
                       <a:r>
-                        <a:rPr sz="1000" b="0">
-                          <a:solidFill>
-                            <a:srgbClr val="3D394A"/>
+                        <a:rPr sz="1000" b="1">
+                          <a:solidFill>
+                            <a:srgbClr val="1A1822"/>
                           </a:solidFill>
                           <a:latin typeface="맑은 고딕"/>
                         </a:rPr>
@@ -36843,9 +37787,9 @@
                         </a:lnSpc>
                       </a:pPr>
                       <a:r>
-                        <a:rPr sz="1000" b="0">
-                          <a:solidFill>
-                            <a:srgbClr val="3D394A"/>
+                        <a:rPr sz="1000" b="1">
+                          <a:solidFill>
+                            <a:srgbClr val="1A1822"/>
                           </a:solidFill>
                           <a:latin typeface="맑은 고딕"/>
                         </a:rPr>
@@ -36892,9 +37836,9 @@
               </a:lnSpc>
             </a:pPr>
             <a:r>
-              <a:rPr sz="1100" b="0">
-                <a:solidFill>
-                  <a:srgbClr val="3D394A"/>
+              <a:rPr sz="1100" b="1">
+                <a:solidFill>
+                  <a:srgbClr val="1A1822"/>
                 </a:solidFill>
                 <a:latin typeface="맑은 고딕"/>
               </a:rPr>
@@ -36917,7 +37861,25 @@
                 </a:solidFill>
                 <a:latin typeface="맑은 고딕"/>
               </a:rPr>
-              <a:t>· 불은 다트당 761로 가장 높고 빗나감이 0.00%다. 대신 역풍 하나가 761을 308로 내린다. 열 장이 이 축과 배타다</a:t>
+              <a:t>· </a:t>
+            </a:r>
+            <a:r>
+              <a:rPr sz="1100" b="1">
+                <a:solidFill>
+                  <a:srgbClr val="1A1822"/>
+                </a:solidFill>
+                <a:latin typeface="맑은 고딕"/>
+              </a:rPr>
+              <a:t>불</a:t>
+            </a:r>
+            <a:r>
+              <a:rPr sz="1100" b="0">
+                <a:solidFill>
+                  <a:srgbClr val="3D394A"/>
+                </a:solidFill>
+                <a:latin typeface="맑은 고딕"/>
+              </a:rPr>
+              <a:t>은 다트당 761로 가장 높고 빗나감이 0.00%다. 대신 역풍 하나가 761을 308로 내린다. 열 장이 이 축과 배타다</a:t>
             </a:r>
           </a:p>
           <a:p>
@@ -36936,7 +37898,25 @@
                 </a:solidFill>
                 <a:latin typeface="맑은 고딕"/>
               </a:rPr>
-              <a:t>· 우측 대소는 가장 싸고(40골드) 오차에 강하다. 18칸 양옆이 소물이라 빗맞아도 걸린다</a:t>
+              <a:t>· </a:t>
+            </a:r>
+            <a:r>
+              <a:rPr sz="1100" b="1">
+                <a:solidFill>
+                  <a:srgbClr val="1A1822"/>
+                </a:solidFill>
+                <a:latin typeface="맑은 고딕"/>
+              </a:rPr>
+              <a:t>우측 대소</a:t>
+            </a:r>
+            <a:r>
+              <a:rPr sz="1100" b="0">
+                <a:solidFill>
+                  <a:srgbClr val="3D394A"/>
+                </a:solidFill>
+                <a:latin typeface="맑은 고딕"/>
+              </a:rPr>
+              <a:t>는 가장 싸고(40골드) 오차에 강하다. 18칸 양옆이 소물이라 빗맞아도 걸린다</a:t>
             </a:r>
           </a:p>
           <a:p>
@@ -36955,7 +37935,43 @@
                 </a:solidFill>
                 <a:latin typeface="맑은 고딕"/>
               </a:rPr>
-              <a:t>· 무조건은 천장이 낮은 대신 어떤 제약도 안 무섭다. R6는 넘고 R7에서 막힌다. 보험 축이다</a:t>
+              <a:t>· </a:t>
+            </a:r>
+            <a:r>
+              <a:rPr sz="1100" b="1">
+                <a:solidFill>
+                  <a:srgbClr val="1A1822"/>
+                </a:solidFill>
+                <a:latin typeface="맑은 고딕"/>
+              </a:rPr>
+              <a:t>무조건</a:t>
+            </a:r>
+            <a:r>
+              <a:rPr sz="1100" b="0">
+                <a:solidFill>
+                  <a:srgbClr val="3D394A"/>
+                </a:solidFill>
+                <a:latin typeface="맑은 고딕"/>
+              </a:rPr>
+              <a:t>은 천장이 낮은 대신 어떤 제약도 안 무섭다. R6는 넘고 R7에서 막힌다. </a:t>
+            </a:r>
+            <a:r>
+              <a:rPr sz="1100" b="1">
+                <a:solidFill>
+                  <a:srgbClr val="1A1822"/>
+                </a:solidFill>
+                <a:latin typeface="맑은 고딕"/>
+              </a:rPr>
+              <a:t>보험 축</a:t>
+            </a:r>
+            <a:r>
+              <a:rPr sz="1100" b="0">
+                <a:solidFill>
+                  <a:srgbClr val="3D394A"/>
+                </a:solidFill>
+                <a:latin typeface="맑은 고딕"/>
+              </a:rPr>
+              <a:t>이다</a:t>
             </a:r>
           </a:p>
           <a:p>
@@ -36968,13 +37984,22 @@
               </a:spcBef>
             </a:pPr>
             <a:r>
+              <a:rPr sz="1100" b="1">
+                <a:solidFill>
+                  <a:srgbClr val="1A1822"/>
+                </a:solidFill>
+                <a:latin typeface="맑은 고딕"/>
+              </a:rPr>
+              <a:t>그런데 완성이 안 된다.</a:t>
+            </a:r>
+            <a:r>
               <a:rPr sz="1100" b="0">
                 <a:solidFill>
                   <a:srgbClr val="3D394A"/>
                 </a:solidFill>
                 <a:latin typeface="맑은 고딕"/>
               </a:rPr>
-              <a:t>그런데 완성이 안 된다. 누적 골드가 R5에 35, R6에 44, R7에 53인데 위 축들이 40~54골드다. 증폭기는 R5 매대에 처음 뜬다. 축이 완성되는</a:t>
+              <a:t> 누적 골드가 R5에 35, R6에 44, R7에 53인데 위 축들이 40~54골드다. 증폭기는 R5 매대에 처음 뜬다. 축이</a:t>
             </a:r>
           </a:p>
           <a:p>
@@ -36993,7 +38018,7 @@
                 </a:solidFill>
                 <a:latin typeface="맑은 고딕"/>
               </a:rPr>
-              <a:t>라운드와 그 축이 필요한 라운드가 겹친다.</a:t>
+              <a:t>완성되는 라운드와 그 축이 필요한 라운드가 겹친다.</a:t>
             </a:r>
           </a:p>
         </p:txBody>
@@ -37089,7 +38114,7 @@
                 </a:solidFill>
                 <a:latin typeface="맑은 고딕"/>
               </a:rPr>
-              <a:t>6장 · 성장 및 경제 시스템</a:t>
+              <a:t>5장 · 캐릭터 · 유닛 · 아이템 기획</a:t>
             </a:r>
           </a:p>
         </p:txBody>
@@ -37196,8 +38221,8 @@
                 <a:tableStyleId>{2D5ABB26-0587-4C30-8999-92F81FD0307C}</a:tableStyleId>
               </a:tblPr>
               <a:tblGrid>
-                <a:gridCol w="1678665"/>
-                <a:gridCol w="7876814"/>
+                <a:gridCol w="1885950"/>
+                <a:gridCol w="7669529"/>
               </a:tblGrid>
               <a:tr h="297180">
                 <a:tc>
@@ -37356,7 +38381,16 @@
                           </a:solidFill>
                           <a:latin typeface="맑은 고딕"/>
                         </a:rPr>
-                        <a:t>빗나가면 판정이 다른 조건을 안 본다. 기여가 다트당 11.30점에 고정된다. 빌드가 셀수록 빈손이 나빠진다</a:t>
+                        <a:t>빗나가면 판정이 다른 조건을 안 본다. 기여가 다트당 11.30점에 고정된다. </a:t>
+                      </a:r>
+                      <a:r>
+                        <a:rPr sz="1000" b="1">
+                          <a:solidFill>
+                            <a:srgbClr val="1A1822"/>
+                          </a:solidFill>
+                          <a:latin typeface="맑은 고딕"/>
+                        </a:rPr>
+                        <a:t>빌드가 셀수록 빈손이 나빠진다</a:t>
                       </a:r>
                     </a:p>
                   </a:txBody>
@@ -37511,13 +38545,22 @@
               </a:lnSpc>
             </a:pPr>
             <a:r>
+              <a:rPr sz="1100" b="1">
+                <a:solidFill>
+                  <a:srgbClr val="1A1822"/>
+                </a:solidFill>
+                <a:latin typeface="맑은 고딕"/>
+              </a:rPr>
+              <a:t>가장 큰 반시너지는 다트에서 나온다.</a:t>
+            </a:r>
+            <a:r>
               <a:rPr sz="1100" b="0">
                 <a:solidFill>
                   <a:srgbClr val="3D394A"/>
                 </a:solidFill>
                 <a:latin typeface="맑은 고딕"/>
               </a:rPr>
-              <a:t>가장 큰 반시너지는 다트에서 나온다. 6골드짜리 가벼운 다트 하나가 칸 축을 +83%, 무조건 축을 +195% 올리고 동시에 링 축을 −70% 낸다. 칩</a:t>
+              <a:t> 6골드짜리 가벼운 다트 하나가 칸 축을 +83%, 무조건 축을 +195% 올리고 동시에 링 축을 −70% 낸다.</a:t>
             </a:r>
           </a:p>
           <a:p>
@@ -37530,13 +38573,13 @@
               </a:spcBef>
             </a:pPr>
             <a:r>
-              <a:rPr sz="1100" b="0">
-                <a:solidFill>
-                  <a:srgbClr val="3D394A"/>
+              <a:rPr sz="1100" b="1">
+                <a:solidFill>
+                  <a:srgbClr val="1A1822"/>
                 </a:solidFill>
                 <a:latin typeface="맑은 고딕"/>
               </a:rPr>
-              <a:t>다섯 장 중 어느 한 장보다 크다.</a:t>
+              <a:t>칩 다섯 장 중 어느 한 장보다 크다.</a:t>
             </a:r>
           </a:p>
         </p:txBody>
@@ -37895,9 +38938,9 @@
               </a:lnSpc>
             </a:pPr>
             <a:r>
-              <a:rPr sz="1100" b="0">
-                <a:solidFill>
-                  <a:srgbClr val="3D394A"/>
+              <a:rPr sz="1100" b="1">
+                <a:solidFill>
+                  <a:srgbClr val="1A1822"/>
                 </a:solidFill>
                 <a:latin typeface="맑은 고딕"/>
               </a:rPr>
@@ -37914,9 +38957,9 @@
               </a:spcBef>
             </a:pPr>
             <a:r>
-              <a:rPr sz="1100" b="0">
-                <a:solidFill>
-                  <a:srgbClr val="3D394A"/>
+              <a:rPr sz="1100" b="1">
+                <a:solidFill>
+                  <a:srgbClr val="1A1822"/>
                 </a:solidFill>
                 <a:latin typeface="맑은 고딕"/>
               </a:rPr>
@@ -37977,7 +39020,25 @@
                 </a:solidFill>
                 <a:latin typeface="맑은 고딕"/>
               </a:rPr>
-              <a:t>점수는 두 개의 수로 만들어진다. 꽂힌 자리가 앞의 수를 정하고, 들고 있는 칩이 뒤의 수를 정한다. 둘은 더해지지 않고 곱해진다. 한쪽만</a:t>
+              <a:t>점수는 두 개의 수로 만들어진다. </a:t>
+            </a:r>
+            <a:r>
+              <a:rPr sz="1100" b="1">
+                <a:solidFill>
+                  <a:srgbClr val="1A1822"/>
+                </a:solidFill>
+                <a:latin typeface="맑은 고딕"/>
+              </a:rPr>
+              <a:t>꽂힌 자리가 앞의 수를 정하고, 들고 있는 칩이 뒤의 수를 정한다.</a:t>
+            </a:r>
+            <a:r>
+              <a:rPr sz="1100" b="0">
+                <a:solidFill>
+                  <a:srgbClr val="3D394A"/>
+                </a:solidFill>
+                <a:latin typeface="맑은 고딕"/>
+              </a:rPr>
+              <a:t> 둘은 더해지지 않고 곱해진다. 한쪽만</a:t>
             </a:r>
           </a:p>
           <a:p>
@@ -38666,7 +39727,7 @@
         </p:nvGraphicFramePr>
         <p:xfrm>
           <a:off x="566928" y="1668780"/>
-          <a:ext cx="9555480" cy="1357884"/>
+          <a:ext cx="9555479" cy="1357884"/>
         </p:xfrm>
         <a:graphic>
           <a:graphicData uri="http://schemas.openxmlformats.org/drawingml/2006/table">
@@ -38675,8 +39736,8 @@
                 <a:tableStyleId>{2D5ABB26-0587-4C30-8999-92F81FD0307C}</a:tableStyleId>
               </a:tblPr>
               <a:tblGrid>
-                <a:gridCol w="1274064"/>
-                <a:gridCol w="8281416"/>
+                <a:gridCol w="1528876"/>
+                <a:gridCol w="8026603"/>
               </a:tblGrid>
               <a:tr h="297180">
                 <a:tc>
@@ -38723,7 +39784,16 @@
                           </a:solidFill>
                           <a:latin typeface="맑은 고딕"/>
                         </a:rPr>
-                        <a:t>칩 2 · 개조 1 · 다트 1. 개조가 동나거나 판이 더는 못 받으면 그 자리를 칩으로 메운다. 자리는 늘 넷이다</a:t>
+                        <a:t>칩 2 · 개조 1 · 다트 1. 개조가 동나거나 판이 더는 못 받으면 그 자리를 칩으로 메운다. </a:t>
+                      </a:r>
+                      <a:r>
+                        <a:rPr sz="1000" b="1">
+                          <a:solidFill>
+                            <a:srgbClr val="1A1822"/>
+                          </a:solidFill>
+                          <a:latin typeface="맑은 고딕"/>
+                        </a:rPr>
+                        <a:t>자리는 늘 넷이다</a:t>
                       </a:r>
                     </a:p>
                   </a:txBody>
@@ -38934,13 +40004,22 @@
               </a:lnSpc>
             </a:pPr>
             <a:r>
+              <a:rPr sz="1100" b="1">
+                <a:solidFill>
+                  <a:srgbClr val="1A1822"/>
+                </a:solidFill>
+                <a:latin typeface="맑은 고딕"/>
+              </a:rPr>
+              <a:t>칩만 되팔 수 있다.</a:t>
+            </a:r>
+            <a:r>
               <a:rPr sz="1100" b="0">
                 <a:solidFill>
                   <a:srgbClr val="3D394A"/>
                 </a:solidFill>
                 <a:latin typeface="맑은 고딕"/>
               </a:rPr>
-              <a:t>칩만 되팔 수 있다. 판(개조)과 탄창(다트)은 되돌릴 수 없다. 산 개조는 지워지지 않고 판의 모양으로 끝까지 남는다.</a:t>
+              <a:t> 판(개조)과 탄창(다트)은 되돌릴 수 없다. 산 개조는 지워지지 않고 판의 모양으로 끝까지 남는다.</a:t>
             </a:r>
           </a:p>
         </p:txBody>
@@ -39114,7 +40193,25 @@
                 </a:solidFill>
                 <a:latin typeface="맑은 고딕"/>
               </a:rPr>
-              <a:t>R1에 4골드로는 이자가 0이다. 첫 상점에서 다 쓸지 아낄지가 첫 결정이다.</a:t>
+              <a:t>R1에 4골드로는 이자가 0이다. </a:t>
+            </a:r>
+            <a:r>
+              <a:rPr sz="1150" b="1">
+                <a:solidFill>
+                  <a:srgbClr val="1A1822"/>
+                </a:solidFill>
+                <a:latin typeface="맑은 고딕"/>
+              </a:rPr>
+              <a:t>첫 상점에서 다 쓸지 아낄지가 첫 결정</a:t>
+            </a:r>
+            <a:r>
+              <a:rPr sz="1150" b="0">
+                <a:solidFill>
+                  <a:srgbClr val="3D394A"/>
+                </a:solidFill>
+                <a:latin typeface="맑은 고딕"/>
+              </a:rPr>
+              <a:t>이다.</a:t>
             </a:r>
           </a:p>
         </p:txBody>
@@ -39182,9 +40279,9 @@
                 <a:tableStyleId>{2D5ABB26-0587-4C30-8999-92F81FD0307C}</a:tableStyleId>
               </a:tblPr>
               <a:tblGrid>
-                <a:gridCol w="886590"/>
-                <a:gridCol w="1871691"/>
-                <a:gridCol w="6797197"/>
+                <a:gridCol w="1183059"/>
+                <a:gridCol w="1729086"/>
+                <a:gridCol w="6643333"/>
               </a:tblGrid>
               <a:tr h="297180">
                 <a:tc>
@@ -39418,13 +40515,22 @@
                         </a:lnSpc>
                       </a:pPr>
                       <a:r>
-                        <a:rPr sz="1000" b="0">
-                          <a:solidFill>
-                            <a:srgbClr val="3D394A"/>
-                          </a:solidFill>
-                          <a:latin typeface="맑은 고딕"/>
-                        </a:rPr>
-                        <a:t>적은 발로 끝내라. 넘긴 순간 라운드가 끝나므로 과잉 조준이 손해가 된다</a:t>
+                        <a:rPr sz="1000" b="1">
+                          <a:solidFill>
+                            <a:srgbClr val="1A1822"/>
+                          </a:solidFill>
+                          <a:latin typeface="맑은 고딕"/>
+                        </a:rPr>
+                        <a:t>적은 발로 끝내라.</a:t>
+                      </a:r>
+                      <a:r>
+                        <a:rPr sz="1000" b="0">
+                          <a:solidFill>
+                            <a:srgbClr val="3D394A"/>
+                          </a:solidFill>
+                          <a:latin typeface="맑은 고딕"/>
+                        </a:rPr>
+                        <a:t> 넘긴 순간 라운드가 끝나므로 과잉 조준이 손해가 된다</a:t>
                       </a:r>
                     </a:p>
                   </a:txBody>
@@ -39501,13 +40607,22 @@
                         </a:lnSpc>
                       </a:pPr>
                       <a:r>
-                        <a:rPr sz="1000" b="0">
-                          <a:solidFill>
-                            <a:srgbClr val="3D394A"/>
-                          </a:solidFill>
-                          <a:latin typeface="맑은 고딕"/>
-                        </a:rPr>
-                        <a:t>모아 둬라. 저축과 즉시 구매 사이의 첫 저울</a:t>
+                        <a:rPr sz="1000" b="1">
+                          <a:solidFill>
+                            <a:srgbClr val="1A1822"/>
+                          </a:solidFill>
+                          <a:latin typeface="맑은 고딕"/>
+                        </a:rPr>
+                        <a:t>모아 둬라.</a:t>
+                      </a:r>
+                      <a:r>
+                        <a:rPr sz="1000" b="0">
+                          <a:solidFill>
+                            <a:srgbClr val="3D394A"/>
+                          </a:solidFill>
+                          <a:latin typeface="맑은 고딕"/>
+                        </a:rPr>
+                        <a:t> 저축과 즉시 구매 사이의 첫 저울</a:t>
                       </a:r>
                     </a:p>
                   </a:txBody>
@@ -39584,9 +40699,9 @@
                         </a:lnSpc>
                       </a:pPr>
                       <a:r>
-                        <a:rPr sz="1000" b="0">
-                          <a:solidFill>
-                            <a:srgbClr val="3D394A"/>
+                        <a:rPr sz="1000" b="1">
+                          <a:solidFill>
+                            <a:srgbClr val="1A1822"/>
                           </a:solidFill>
                           <a:latin typeface="맑은 고딕"/>
                         </a:rPr>
@@ -39633,9 +40748,9 @@
               </a:lnSpc>
             </a:pPr>
             <a:r>
-              <a:rPr sz="1100" b="0">
-                <a:solidFill>
-                  <a:srgbClr val="3D394A"/>
+              <a:rPr sz="1100" b="1">
+                <a:solidFill>
+                  <a:srgbClr val="1A1822"/>
                 </a:solidFill>
                 <a:latin typeface="맑은 고딕"/>
               </a:rPr>
@@ -41027,7 +42142,25 @@
                 </a:solidFill>
                 <a:latin typeface="맑은 고딕"/>
               </a:rPr>
-              <a:t>칩이 판정 결과를 읽는다면, 개조는 판정이 읽는 값 자체를 바꾼다.</a:t>
+              <a:t>칩이 판정 결과를 읽는다면, 개조는 </a:t>
+            </a:r>
+            <a:r>
+              <a:rPr sz="1150" b="1">
+                <a:solidFill>
+                  <a:srgbClr val="1A1822"/>
+                </a:solidFill>
+                <a:latin typeface="맑은 고딕"/>
+              </a:rPr>
+              <a:t>판정이 읽는 값 자체</a:t>
+            </a:r>
+            <a:r>
+              <a:rPr sz="1150" b="0">
+                <a:solidFill>
+                  <a:srgbClr val="3D394A"/>
+                </a:solidFill>
+                <a:latin typeface="맑은 고딕"/>
+              </a:rPr>
+              <a:t>를 바꾼다.</a:t>
             </a:r>
           </a:p>
         </p:txBody>
@@ -41095,9 +42228,9 @@
                 <a:tableStyleId>{2D5ABB26-0587-4C30-8999-92F81FD0307C}</a:tableStyleId>
               </a:tblPr>
               <a:tblGrid>
-                <a:gridCol w="1170058"/>
-                <a:gridCol w="1365068"/>
-                <a:gridCol w="7020352"/>
+                <a:gridCol w="1802920"/>
+                <a:gridCol w="1262044"/>
+                <a:gridCol w="6490514"/>
               </a:tblGrid>
               <a:tr h="297180">
                 <a:tc>
@@ -41878,13 +43011,22 @@
               </a:lnSpc>
             </a:pPr>
             <a:r>
+              <a:rPr sz="1100" b="1">
+                <a:solidFill>
+                  <a:srgbClr val="1A1822"/>
+                </a:solidFill>
+                <a:latin typeface="맑은 고딕"/>
+              </a:rPr>
+              <a:t>이름은 단골들의 말이다.</a:t>
+            </a:r>
+            <a:r>
               <a:rPr sz="1100" b="0">
                 <a:solidFill>
                   <a:srgbClr val="3D394A"/>
                 </a:solidFill>
                 <a:latin typeface="맑은 고딕"/>
               </a:rPr>
-              <a:t>이름은 단골들의 말이다. 속살 · 겉살 · 벼랑 · 아랫목 · 멍석 · 판벌이 · 판갈이 · 짝패. 간판은 영어인데 판 위에서 쓰는 말은 우리말이다.</a:t>
+              <a:t> 속살 · 겉살 · 벼랑 · 아랫목 · 멍석 · 판벌이 · 판갈이 · 짝패. 간판은 영어인데 판 위에서 쓰는 말은</a:t>
             </a:r>
           </a:p>
           <a:p>
@@ -41903,7 +43045,7 @@
                 </a:solidFill>
                 <a:latin typeface="맑은 고딕"/>
               </a:rPr>
-              <a:t>속살과 겉살은 배타다. 정확한 역방향이라 둘을 같이 사면 서로를 되돌린다. 판벌이와 판갈이를 같이 사면 판값 상한(×1.50)에 걸려 매대에 안</a:t>
+              <a:t>우리말이다.</a:t>
             </a:r>
           </a:p>
           <a:p>
@@ -41916,13 +43058,59 @@
               </a:spcBef>
             </a:pPr>
             <a:r>
+              <a:rPr sz="1100" b="1">
+                <a:solidFill>
+                  <a:srgbClr val="1A1822"/>
+                </a:solidFill>
+                <a:latin typeface="맑은 고딕"/>
+              </a:rPr>
+              <a:t>속살과 겉살은 배타다.</a:t>
+            </a:r>
+            <a:r>
               <a:rPr sz="1100" b="0">
                 <a:solidFill>
                   <a:srgbClr val="3D394A"/>
                 </a:solidFill>
                 <a:latin typeface="맑은 고딕"/>
               </a:rPr>
-              <a:t>뜬다.</a:t>
+              <a:t> 정확한 역방향이라 둘을 같이 사면 서로를 되돌린다. </a:t>
+            </a:r>
+            <a:r>
+              <a:rPr sz="1100" b="1">
+                <a:solidFill>
+                  <a:srgbClr val="1A1822"/>
+                </a:solidFill>
+                <a:latin typeface="맑은 고딕"/>
+              </a:rPr>
+              <a:t>판벌이와 판갈이를 같이 사면</a:t>
+            </a:r>
+            <a:r>
+              <a:rPr sz="1100" b="0">
+                <a:solidFill>
+                  <a:srgbClr val="3D394A"/>
+                </a:solidFill>
+                <a:latin typeface="맑은 고딕"/>
+              </a:rPr>
+              <a:t> 판값 상한(×1.50)에 걸려</a:t>
+            </a:r>
+          </a:p>
+          <a:p>
+            <a:pPr>
+              <a:lnSpc>
+                <a:spcPct val="128000"/>
+              </a:lnSpc>
+              <a:spcBef>
+                <a:spcPts val="600"/>
+              </a:spcBef>
+            </a:pPr>
+            <a:r>
+              <a:rPr sz="1100" b="0">
+                <a:solidFill>
+                  <a:srgbClr val="3D394A"/>
+                </a:solidFill>
+                <a:latin typeface="맑은 고딕"/>
+              </a:rPr>
+              <a:t>매대에 안 뜬다.</a:t>
             </a:r>
           </a:p>
         </p:txBody>
@@ -42155,7 +43343,7 @@
         </p:nvGraphicFramePr>
         <p:xfrm>
           <a:off x="566928" y="1668780"/>
-          <a:ext cx="9555478" cy="1783080"/>
+          <a:ext cx="9555476" cy="1783080"/>
         </p:xfrm>
         <a:graphic>
           <a:graphicData uri="http://schemas.openxmlformats.org/drawingml/2006/table">
@@ -42164,11 +43352,11 @@
                 <a:tableStyleId>{2D5ABB26-0587-4C30-8999-92F81FD0307C}</a:tableStyleId>
               </a:tblPr>
               <a:tblGrid>
-                <a:gridCol w="819601"/>
-                <a:gridCol w="819601"/>
-                <a:gridCol w="1092801"/>
-                <a:gridCol w="6147010"/>
-                <a:gridCol w="676465"/>
+                <a:gridCol w="1287119"/>
+                <a:gridCol w="772271"/>
+                <a:gridCol w="1029695"/>
+                <a:gridCol w="5792039"/>
+                <a:gridCol w="674352"/>
               </a:tblGrid>
               <a:tr h="297180">
                 <a:tc>
@@ -43043,13 +44231,22 @@
               </a:spcBef>
             </a:pPr>
             <a:r>
+              <a:rPr sz="1100" b="1">
+                <a:solidFill>
+                  <a:srgbClr val="1A1822"/>
+                </a:solidFill>
+                <a:latin typeface="맑은 고딕"/>
+              </a:rPr>
+              <a:t>탄창은 벽에 꽂힌 여섯 자루다.</a:t>
+            </a:r>
+            <a:r>
               <a:rPr sz="1100" b="0">
                 <a:solidFill>
                   <a:srgbClr val="3D394A"/>
                 </a:solidFill>
                 <a:latin typeface="맑은 고딕"/>
               </a:rPr>
-              <a:t>탄창은 벽에 꽂힌 여섯 자루다. 남은 다트를 물건으로 보여준다. 라운드가 시작되면 오른쪽에서 날아와 벽에 꽂히고, 던진 것만 사라진다.</a:t>
+              <a:t> 남은 다트를 물건으로 보여준다. 라운드가 시작되면 오른쪽에서 날아와 벽에 꽂히고, 던진 것만 사라진다.</a:t>
             </a:r>
           </a:p>
           <a:p>
@@ -43242,7 +44439,16 @@
                 </a:solidFill>
                 <a:latin typeface="맑은 고딕"/>
               </a:rPr>
-              <a:t>조건 19 × 효과 4 = 76칸 중 21칸이 찼다(28%).</a:t>
+              <a:t>조건 19 × 효과 4 = </a:t>
+            </a:r>
+            <a:r>
+              <a:rPr sz="1150" b="1">
+                <a:solidFill>
+                  <a:srgbClr val="1A1822"/>
+                </a:solidFill>
+                <a:latin typeface="맑은 고딕"/>
+              </a:rPr>
+              <a:t>76칸 중 21칸이 찼다(28%).</a:t>
             </a:r>
           </a:p>
         </p:txBody>
@@ -43310,8 +44516,8 @@
                 <a:tableStyleId>{2D5ABB26-0587-4C30-8999-92F81FD0307C}</a:tableStyleId>
               </a:tblPr>
               <a:tblGrid>
-                <a:gridCol w="1816330"/>
-                <a:gridCol w="7739149"/>
+                <a:gridCol w="2063983"/>
+                <a:gridCol w="7491496"/>
               </a:tblGrid>
               <a:tr h="297180">
                 <a:tc>
@@ -43414,7 +44620,25 @@
                           </a:solidFill>
                           <a:latin typeface="맑은 고딕"/>
                         </a:rPr>
-                        <a:t>chip 13 · mult 9 · xmult 3 · mult_streak 1. 빌드가 커지는 길이 좁다</a:t>
+                        <a:t>chip 13 · mult 9 · xmult </a:t>
+                      </a:r>
+                      <a:r>
+                        <a:rPr sz="1000" b="1">
+                          <a:solidFill>
+                            <a:srgbClr val="1A1822"/>
+                          </a:solidFill>
+                          <a:latin typeface="맑은 고딕"/>
+                        </a:rPr>
+                        <a:t>3</a:t>
+                      </a:r>
+                      <a:r>
+                        <a:rPr sz="1000" b="0">
+                          <a:solidFill>
+                            <a:srgbClr val="3D394A"/>
+                          </a:solidFill>
+                          <a:latin typeface="맑은 고딕"/>
+                        </a:rPr>
+                        <a:t> · mult_streak 1. 빌드가 커지는 길이 좁다</a:t>
                       </a:r>
                     </a:p>
                   </a:txBody>
@@ -43625,13 +44849,22 @@
               </a:lnSpc>
             </a:pPr>
             <a:r>
+              <a:rPr sz="1100" b="1">
+                <a:solidFill>
+                  <a:srgbClr val="1A1822"/>
+                </a:solidFill>
+                <a:latin typeface="맑은 고딕"/>
+              </a:rPr>
+              <a:t>가격당 기여</a:t>
+            </a:r>
+            <a:r>
               <a:rPr sz="1100" b="0">
                 <a:solidFill>
                   <a:srgbClr val="3D394A"/>
                 </a:solidFill>
                 <a:latin typeface="맑은 고딕"/>
               </a:rPr>
-              <a:t>가격당 기여로 보면 변덕쟁이 2.733, 정밀 0.047로 58배 차이다. 죽은 축(같은 칸 · 연속)을 살리든 걷어내든 정해야 한다. 지금은 사면 손해인</a:t>
+              <a:t>로 보면 변덕쟁이 2.733, 정밀 0.047로 58배 차이다. 죽은 축(같은 칸 · 연속)을 살리든 걷어내든 정해야 한다. 지금은 사면</a:t>
             </a:r>
           </a:p>
           <a:p>
@@ -43650,7 +44883,7 @@
                 </a:solidFill>
                 <a:latin typeface="맑은 고딕"/>
               </a:rPr>
-              <a:t>칩이 매대 넷 중 한 자리를 차지한다.</a:t>
+              <a:t>손해인 칩이 매대 넷 중 한 자리를 차지한다.</a:t>
             </a:r>
           </a:p>
         </p:txBody>
@@ -43746,7 +44979,7 @@
                 </a:solidFill>
                 <a:latin typeface="맑은 고딕"/>
               </a:rPr>
-              <a:t>아트와 사운드</a:t>
+              <a:t>6장 · 성장 및 경제 시스템</a:t>
             </a:r>
           </a:p>
         </p:txBody>
@@ -43824,7 +45057,7 @@
                 </a:solidFill>
                 <a:latin typeface="맑은 고딕"/>
               </a:rPr>
-              <a:t>아래 여섯 건은 지금 빌드에서 실제로 확인했다.</a:t>
+              <a:t>여섯 건 모두 지금 빌드에서 확인했다.</a:t>
             </a:r>
           </a:p>
         </p:txBody>
@@ -43883,7 +45116,7 @@
         </p:nvGraphicFramePr>
         <p:xfrm>
           <a:off x="566928" y="1668780"/>
-          <a:ext cx="9555478" cy="3264408"/>
+          <a:ext cx="9555477" cy="3264408"/>
         </p:xfrm>
         <a:graphic>
           <a:graphicData uri="http://schemas.openxmlformats.org/drawingml/2006/table">
@@ -43892,10 +45125,10 @@
                 <a:tableStyleId>{2D5ABB26-0587-4C30-8999-92F81FD0307C}</a:tableStyleId>
               </a:tblPr>
               <a:tblGrid>
-                <a:gridCol w="1183476"/>
-                <a:gridCol w="657487"/>
-                <a:gridCol w="4602410"/>
-                <a:gridCol w="3112105"/>
+                <a:gridCol w="1307385"/>
+                <a:gridCol w="656820"/>
+                <a:gridCol w="4428242"/>
+                <a:gridCol w="3163030"/>
               </a:tblGrid>
               <a:tr h="297180">
                 <a:tc>
@@ -44650,13 +45883,22 @@
                         </a:lnSpc>
                       </a:pPr>
                       <a:r>
-                        <a:rPr sz="1000" b="0">
-                          <a:solidFill>
-                            <a:srgbClr val="3D394A"/>
-                          </a:solidFill>
-                          <a:latin typeface="맑은 고딕"/>
-                        </a:rPr>
-                        <a:t>사람 플레이 로그를 남긴다. 라운드별 클리어율, 사망 분포, 실제 조준 분포</a:t>
+                        <a:rPr sz="1000" b="1">
+                          <a:solidFill>
+                            <a:srgbClr val="1A1822"/>
+                          </a:solidFill>
+                          <a:latin typeface="맑은 고딕"/>
+                        </a:rPr>
+                        <a:t>사람 플레이 로그를 남긴다.</a:t>
+                      </a:r>
+                      <a:r>
+                        <a:rPr sz="1000" b="0">
+                          <a:solidFill>
+                            <a:srgbClr val="3D394A"/>
+                          </a:solidFill>
+                          <a:latin typeface="맑은 고딕"/>
+                        </a:rPr>
+                        <a:t> 라운드별 클리어율, 사망 분포, 실제 조준 분포</a:t>
                       </a:r>
                     </a:p>
                   </a:txBody>
@@ -44933,13 +46175,22 @@
               </a:lnSpc>
             </a:pPr>
             <a:r>
+              <a:rPr sz="1100" b="1">
+                <a:solidFill>
+                  <a:srgbClr val="1A1822"/>
+                </a:solidFill>
+                <a:latin typeface="맑은 고딕"/>
+              </a:rPr>
+              <a:t>왜 이렇게 했는가</a:t>
+            </a:r>
+            <a:r>
               <a:rPr sz="1100" b="0">
                 <a:solidFill>
                   <a:srgbClr val="3D394A"/>
                 </a:solidFill>
                 <a:latin typeface="맑은 고딕"/>
               </a:rPr>
-              <a:t>왜 이렇게 했는가 640×360에 최근접 필터라 이 크기에서 읽히는지 아닌지가 설계를 계속 되돌려 놓는다. 그림 파일이 있으면 「일단 그려 놓고</a:t>
+              <a:t> 640×360에 최근접 필터라 이 크기에서 읽히는지 아닌지가 설계를 계속 되돌려 놓는다. 그림 파일이 있으면 「일단 그려</a:t>
             </a:r>
           </a:p>
           <a:p>
@@ -44958,7 +46209,7 @@
                 </a:solidFill>
                 <a:latin typeface="맑은 고딕"/>
               </a:rPr>
-              <a:t>나중에」가 되지만, 코드로 그리면 안 읽히는 자리를 그 자리에서 고치게 된다.</a:t>
+              <a:t>놓고 나중에」가 되지만, 코드로 그리면 안 읽히는 자리를 그 자리에서 고치게 된다.</a:t>
             </a:r>
           </a:p>
           <a:p>
@@ -44971,9 +46222,9 @@
               </a:spcBef>
             </a:pPr>
             <a:r>
-              <a:rPr sz="1100" b="0">
-                <a:solidFill>
-                  <a:srgbClr val="3D394A"/>
+              <a:rPr sz="1100" b="1">
+                <a:solidFill>
+                  <a:srgbClr val="1A1822"/>
                 </a:solidFill>
                 <a:latin typeface="맑은 고딕"/>
               </a:rPr>
@@ -45442,13 +46693,22 @@
               </a:spcBef>
             </a:pPr>
             <a:r>
+              <a:rPr sz="1100" b="1">
+                <a:solidFill>
+                  <a:srgbClr val="1A1822"/>
+                </a:solidFill>
+                <a:latin typeface="맑은 고딕"/>
+              </a:rPr>
+              <a:t>그림이 안 되면 기능을 바꾼다.</a:t>
+            </a:r>
+            <a:r>
               <a:rPr sz="1100" b="0">
                 <a:solidFill>
                   <a:srgbClr val="3D394A"/>
                 </a:solidFill>
                 <a:latin typeface="맑은 고딕"/>
               </a:rPr>
-              <a:t>그림이 안 되면 기능을 바꾼다. 남은 다트를 손이 부채처럼 들고 있는 안을 두 번 만들었다가 버렸다. 어떤 각도로 그려도 살구색 덩어리로</a:t>
+              <a:t> 남은 다트를 손이 부채처럼 들고 있는 안을 두 번 만들었다가 버렸다. 어떤 각도로 그려도 살구색 덩어리로</a:t>
             </a:r>
           </a:p>
           <a:p>
@@ -45467,7 +46727,16 @@
                 </a:solidFill>
                 <a:latin typeface="맑은 고딕"/>
               </a:rPr>
-              <a:t>읽혔기 때문이고, 벽에 꽂힌 자루로 바꾼 뒤에야 읽혔다.</a:t>
+              <a:t>읽혔기 때문이고, </a:t>
+            </a:r>
+            <a:r>
+              <a:rPr sz="1100" b="1">
+                <a:solidFill>
+                  <a:srgbClr val="1A1822"/>
+                </a:solidFill>
+                <a:latin typeface="맑은 고딕"/>
+              </a:rPr>
+              <a:t>벽에 꽂힌 자루로 바꾼 뒤에야 읽혔다.</a:t>
             </a:r>
           </a:p>
         </p:txBody>
@@ -45563,7 +46832,7 @@
                 </a:solidFill>
                 <a:latin typeface="맑은 고딕"/>
               </a:rPr>
-              <a:t>개발 현황</a:t>
+              <a:t>아트와 사운드</a:t>
             </a:r>
           </a:p>
         </p:txBody>
@@ -45718,13 +46987,22 @@
               </a:lnSpc>
             </a:pPr>
             <a:r>
+              <a:rPr sz="1100" b="1">
+                <a:solidFill>
+                  <a:srgbClr val="1A1822"/>
+                </a:solidFill>
+                <a:latin typeface="맑은 고딕"/>
+              </a:rPr>
+              <a:t>칩 한 장에 반음씩 올린다.</a:t>
+            </a:r>
+            <a:r>
               <a:rPr sz="1100" b="0">
                 <a:solidFill>
                   <a:srgbClr val="3D394A"/>
                 </a:solidFill>
                 <a:latin typeface="맑은 고딕"/>
               </a:rPr>
-              <a:t>칩 한 장에 반음씩 올린다. 칩이 한 장씩 발동할 때마다 소리가 반음씩 올라간다. 몇 장이 남았는지 화면을 안 봐도 귀로 안다.</a:t>
+              <a:t> 칩이 한 장씩 발동할 때마다 소리가 반음씩 올라간다. 몇 장이 남았는지 화면을 안 봐도 귀로 안다.</a:t>
             </a:r>
           </a:p>
         </p:txBody>
@@ -46063,13 +47341,22 @@
               </a:lnSpc>
             </a:pPr>
             <a:r>
+              <a:rPr sz="1100" b="1">
+                <a:solidFill>
+                  <a:srgbClr val="1A1822"/>
+                </a:solidFill>
+                <a:latin typeface="맑은 고딕"/>
+              </a:rPr>
+              <a:t>점수를 받는 순간이 이 게임에서 가장 느리다.</a:t>
+            </a:r>
+            <a:r>
               <a:rPr sz="1100" b="0">
                 <a:solidFill>
                   <a:srgbClr val="3D394A"/>
                 </a:solidFill>
                 <a:latin typeface="맑은 고딕"/>
               </a:rPr>
-              <a:t>점수를 받는 순간이 이 게임에서 가장 느리다. 처음에는 정산이 훨씬 빨랐다. 빠른 정산은 결과를 알려 주기만 하고 세어 볼 틈을 안 준다. 한</a:t>
+              <a:t> 처음에는 정산이 훨씬 빨랐다. 빠른 정산은 결과를 알려 주기만 하고 세어 볼 틈을 안 준다.</a:t>
             </a:r>
           </a:p>
           <a:p>
@@ -46088,7 +47375,25 @@
                 </a:solidFill>
                 <a:latin typeface="맑은 고딕"/>
               </a:rPr>
-              <a:t>단계에 0.34초를 두고, 소리가 다음 수를 예고하게 고쳤다.</a:t>
+              <a:t>한 단계에 </a:t>
+            </a:r>
+            <a:r>
+              <a:rPr sz="1100" b="1">
+                <a:solidFill>
+                  <a:srgbClr val="1A1822"/>
+                </a:solidFill>
+                <a:latin typeface="맑은 고딕"/>
+              </a:rPr>
+              <a:t>0.34초</a:t>
+            </a:r>
+            <a:r>
+              <a:rPr sz="1100" b="0">
+                <a:solidFill>
+                  <a:srgbClr val="3D394A"/>
+                </a:solidFill>
+                <a:latin typeface="맑은 고딕"/>
+              </a:rPr>
+              <a:t>를 두고, 소리가 다음 수를 예고하게 고쳤다.</a:t>
             </a:r>
           </a:p>
         </p:txBody>
@@ -46282,7 +47587,7 @@
         </p:nvGraphicFramePr>
         <p:xfrm>
           <a:off x="566928" y="1280160"/>
-          <a:ext cx="9555479" cy="2971800"/>
+          <a:ext cx="9555478" cy="2971800"/>
         </p:xfrm>
         <a:graphic>
           <a:graphicData uri="http://schemas.openxmlformats.org/drawingml/2006/table">
@@ -46291,9 +47596,9 @@
                 <a:tableStyleId>{2D5ABB26-0587-4C30-8999-92F81FD0307C}</a:tableStyleId>
               </a:tblPr>
               <a:tblGrid>
-                <a:gridCol w="5493110"/>
-                <a:gridCol w="666628"/>
-                <a:gridCol w="3395741"/>
+                <a:gridCol w="5418055"/>
+                <a:gridCol w="788080"/>
+                <a:gridCol w="3349343"/>
               </a:tblGrid>
               <a:tr h="297180">
                 <a:tc>
@@ -46417,9 +47722,9 @@
                         </a:lnSpc>
                       </a:pPr>
                       <a:r>
-                        <a:rPr sz="1000" b="0">
-                          <a:solidFill>
-                            <a:srgbClr val="3D394A"/>
+                        <a:rPr sz="1000" b="1">
+                          <a:solidFill>
+                            <a:srgbClr val="1A1822"/>
                           </a:solidFill>
                           <a:latin typeface="맑은 고딕"/>
                         </a:rPr>
@@ -46500,9 +47805,9 @@
                         </a:lnSpc>
                       </a:pPr>
                       <a:r>
-                        <a:rPr sz="1000" b="0">
-                          <a:solidFill>
-                            <a:srgbClr val="3D394A"/>
+                        <a:rPr sz="1000" b="1">
+                          <a:solidFill>
+                            <a:srgbClr val="1A1822"/>
                           </a:solidFill>
                           <a:latin typeface="맑은 고딕"/>
                         </a:rPr>
@@ -46583,9 +47888,9 @@
                         </a:lnSpc>
                       </a:pPr>
                       <a:r>
-                        <a:rPr sz="1000" b="0">
-                          <a:solidFill>
-                            <a:srgbClr val="3D394A"/>
+                        <a:rPr sz="1000" b="1">
+                          <a:solidFill>
+                            <a:srgbClr val="1A1822"/>
                           </a:solidFill>
                           <a:latin typeface="맑은 고딕"/>
                         </a:rPr>
@@ -46666,9 +47971,9 @@
                         </a:lnSpc>
                       </a:pPr>
                       <a:r>
-                        <a:rPr sz="1000" b="0">
-                          <a:solidFill>
-                            <a:srgbClr val="3D394A"/>
+                        <a:rPr sz="1000" b="1">
+                          <a:solidFill>
+                            <a:srgbClr val="1A1822"/>
                           </a:solidFill>
                           <a:latin typeface="맑은 고딕"/>
                         </a:rPr>
@@ -46749,9 +48054,9 @@
                         </a:lnSpc>
                       </a:pPr>
                       <a:r>
-                        <a:rPr sz="1000" b="0">
-                          <a:solidFill>
-                            <a:srgbClr val="3D394A"/>
+                        <a:rPr sz="1000" b="1">
+                          <a:solidFill>
+                            <a:srgbClr val="1A1822"/>
                           </a:solidFill>
                           <a:latin typeface="맑은 고딕"/>
                         </a:rPr>
@@ -46832,9 +48137,9 @@
                         </a:lnSpc>
                       </a:pPr>
                       <a:r>
-                        <a:rPr sz="1000" b="0">
-                          <a:solidFill>
-                            <a:srgbClr val="3D394A"/>
+                        <a:rPr sz="1000" b="1">
+                          <a:solidFill>
+                            <a:srgbClr val="1A1822"/>
                           </a:solidFill>
                           <a:latin typeface="맑은 고딕"/>
                         </a:rPr>
@@ -46915,9 +48220,9 @@
                         </a:lnSpc>
                       </a:pPr>
                       <a:r>
-                        <a:rPr sz="1000" b="0">
-                          <a:solidFill>
-                            <a:srgbClr val="3D394A"/>
+                        <a:rPr sz="1000" b="1">
+                          <a:solidFill>
+                            <a:srgbClr val="1A1822"/>
                           </a:solidFill>
                           <a:latin typeface="맑은 고딕"/>
                         </a:rPr>
@@ -46998,9 +48303,9 @@
                         </a:lnSpc>
                       </a:pPr>
                       <a:r>
-                        <a:rPr sz="1000" b="0">
-                          <a:solidFill>
-                            <a:srgbClr val="3D394A"/>
+                        <a:rPr sz="1000" b="1">
+                          <a:solidFill>
+                            <a:srgbClr val="1A1822"/>
                           </a:solidFill>
                           <a:latin typeface="맑은 고딕"/>
                         </a:rPr>
@@ -47081,9 +48386,9 @@
                         </a:lnSpc>
                       </a:pPr>
                       <a:r>
-                        <a:rPr sz="1000" b="0">
-                          <a:solidFill>
-                            <a:srgbClr val="3D394A"/>
+                        <a:rPr sz="1000" b="1">
+                          <a:solidFill>
+                            <a:srgbClr val="1A1822"/>
                           </a:solidFill>
                           <a:latin typeface="맑은 고딕"/>
                         </a:rPr>
@@ -47157,9 +48462,9 @@
               </a:lnSpc>
             </a:pPr>
             <a:r>
-              <a:rPr sz="1100" b="0">
-                <a:solidFill>
-                  <a:srgbClr val="3D394A"/>
+              <a:rPr sz="1100" b="1">
+                <a:solidFill>
+                  <a:srgbClr val="1A1822"/>
                 </a:solidFill>
                 <a:latin typeface="맑은 고딕"/>
               </a:rPr>
@@ -47432,7 +48737,7 @@
                           </a:solidFill>
                           <a:latin typeface="맑은 고딕"/>
                         </a:rPr>
-                        <a:t>data/.csv</a:t>
+                        <a:t>data/*.csv</a:t>
                       </a:r>
                     </a:p>
                   </a:txBody>
@@ -47502,13 +48807,22 @@
               </a:lnSpc>
             </a:pPr>
             <a:r>
+              <a:rPr sz="1100" b="1">
+                <a:solidFill>
+                  <a:srgbClr val="1A1822"/>
+                </a:solidFill>
+                <a:latin typeface="맑은 고딕"/>
+              </a:rPr>
+              <a:t>개발 궤적.</a:t>
+            </a:r>
+            <a:r>
               <a:rPr sz="1100" b="0">
                 <a:solidFill>
                   <a:srgbClr val="3D394A"/>
                 </a:solidFill>
                 <a:latin typeface="맑은 고딕"/>
               </a:rPr>
-              <a:t>개발 궤적. 1주차 컨셉·조준·판정·득점 연출 → 2주차 칩과 상점·클리어 정산·스테이지 선택 → 3주차 상점을 물리 테이블로·인게임 UI·탄창 →</a:t>
+              <a:t> 1주차 컨셉·조준·판정·득점 연출 → 2주차 칩과 상점·클리어 정산·스테이지 선택 → 3주차 상점을 물리 테이블로·인게임</a:t>
             </a:r>
           </a:p>
           <a:p>
@@ -47527,7 +48841,7 @@
                 </a:solidFill>
                 <a:latin typeface="맑은 고딕"/>
               </a:rPr>
-              <a:t>4주차 아이콘 체계·데이터 테이블·기획서</a:t>
+              <a:t>UI·탄창 → 4주차 아이콘 체계·데이터 테이블·기획서</a:t>
             </a:r>
           </a:p>
         </p:txBody>
@@ -47881,13 +49195,22 @@
               </a:lnSpc>
             </a:pPr>
             <a:r>
+              <a:rPr sz="1100" b="1">
+                <a:solidFill>
+                  <a:srgbClr val="1A1822"/>
+                </a:solidFill>
+                <a:latin typeface="맑은 고딕"/>
+              </a:rPr>
+              <a:t>예시.</a:t>
+            </a:r>
+            <a:r>
               <a:rPr sz="1100" b="0">
                 <a:solidFill>
                   <a:srgbClr val="3D394A"/>
                 </a:solidFill>
                 <a:latin typeface="맑은 고딕"/>
               </a:rPr>
-              <a:t>예시. 20번 칸 트리플에 꽂힌다. 칸 20이 칩 20을, 트리플 링이 배수 3을 준다. 여기에 칩 「삼중고」(트리플 명중 시 배수 +4)가 붙으면</a:t>
+              <a:t> 20번 칸 트리플에 꽂힌다. 칸 20이 칩 20을, 트리플 링이 배수 3을 준다. 여기에 칩 「삼중고」(트리플 명중 시 배수 +4)가 붙으면</a:t>
             </a:r>
           </a:p>
           <a:p>
@@ -47919,9 +49242,9 @@
               </a:spcBef>
             </a:pPr>
             <a:r>
-              <a:rPr sz="1100" b="0">
-                <a:solidFill>
-                  <a:srgbClr val="3D394A"/>
+              <a:rPr sz="1100" b="1">
+                <a:solidFill>
+                  <a:srgbClr val="1A1822"/>
                 </a:solidFill>
                 <a:latin typeface="맑은 고딕"/>
               </a:rPr>
@@ -47949,8 +49272,8 @@
                 <a:tableStyleId>{2D5ABB26-0587-4C30-8999-92F81FD0307C}</a:tableStyleId>
               </a:tblPr>
               <a:tblGrid>
-                <a:gridCol w="1828004"/>
-                <a:gridCol w="7727475"/>
+                <a:gridCol w="2087751"/>
+                <a:gridCol w="7467728"/>
               </a:tblGrid>
               <a:tr h="297180">
                 <a:tc>
@@ -48385,7 +49708,25 @@
                 </a:solidFill>
                 <a:latin typeface="맑은 고딕"/>
               </a:rPr>
-              <a:t>통과시켜 쟀다. 아직 사람이 플레이한 기록은 0건이다. 다음 작업은 그 기록을 남기는 것이다.</a:t>
+              <a:t>통과시켜 쟀다. </a:t>
+            </a:r>
+            <a:r>
+              <a:rPr sz="1150" b="1">
+                <a:solidFill>
+                  <a:srgbClr val="1A1822"/>
+                </a:solidFill>
+                <a:latin typeface="맑은 고딕"/>
+              </a:rPr>
+              <a:t>아직 사람이 플레이한 기록은 0건이다.</a:t>
+            </a:r>
+            <a:r>
+              <a:rPr sz="1150" b="0">
+                <a:solidFill>
+                  <a:srgbClr val="3D394A"/>
+                </a:solidFill>
+                <a:latin typeface="맑은 고딕"/>
+              </a:rPr>
+              <a:t> 다음 작업은 그 기록을 남기는 것이다.</a:t>
             </a:r>
           </a:p>
         </p:txBody>
@@ -48462,9 +49803,9 @@
               </a:lnSpc>
             </a:pPr>
             <a:r>
-              <a:rPr sz="1100" b="0">
-                <a:solidFill>
-                  <a:srgbClr val="3D394A"/>
+              <a:rPr sz="1100" b="1">
+                <a:solidFill>
+                  <a:srgbClr val="1A1822"/>
                 </a:solidFill>
                 <a:latin typeface="맑은 고딕"/>
               </a:rPr>
@@ -48492,8 +49833,8 @@
                 <a:tableStyleId>{2D5ABB26-0587-4C30-8999-92F81FD0307C}</a:tableStyleId>
               </a:tblPr>
               <a:tblGrid>
-                <a:gridCol w="1400372"/>
-                <a:gridCol w="8155107"/>
+                <a:gridCol w="1672208"/>
+                <a:gridCol w="7883271"/>
               </a:tblGrid>
               <a:tr h="297180">
                 <a:tc>
@@ -48807,9 +50148,9 @@
               </a:lnSpc>
             </a:pPr>
             <a:r>
-              <a:rPr sz="1100" b="0">
-                <a:solidFill>
-                  <a:srgbClr val="3D394A"/>
+              <a:rPr sz="1100" b="1">
+                <a:solidFill>
+                  <a:srgbClr val="1A1822"/>
                 </a:solidFill>
                 <a:latin typeface="맑은 고딕"/>
               </a:rPr>
@@ -48837,8 +50178,8 @@
                 <a:tableStyleId>{2D5ABB26-0587-4C30-8999-92F81FD0307C}</a:tableStyleId>
               </a:tblPr>
               <a:tblGrid>
-                <a:gridCol w="1528876"/>
-                <a:gridCol w="8026603"/>
+                <a:gridCol w="1489165"/>
+                <a:gridCol w="8066314"/>
               </a:tblGrid>
               <a:tr h="297180">
                 <a:tc>
@@ -48879,13 +50220,22 @@
                         </a:lnSpc>
                       </a:pPr>
                       <a:r>
-                        <a:rPr sz="1000" b="0">
-                          <a:solidFill>
-                            <a:srgbClr val="3D394A"/>
-                          </a:solidFill>
-                          <a:latin typeface="맑은 고딕"/>
-                        </a:rPr>
-                        <a:t>8라운드 완주로 끝. 무한 모드 · 승수 상승 · 일일 챌린지는 미정</a:t>
+                        <a:rPr sz="1000" b="1">
+                          <a:solidFill>
+                            <a:srgbClr val="1A1822"/>
+                          </a:solidFill>
+                          <a:latin typeface="맑은 고딕"/>
+                        </a:rPr>
+                        <a:t>8라운드 완주로 끝.</a:t>
+                      </a:r>
+                      <a:r>
+                        <a:rPr sz="1000" b="0">
+                          <a:solidFill>
+                            <a:srgbClr val="3D394A"/>
+                          </a:solidFill>
+                          <a:latin typeface="맑은 고딕"/>
+                        </a:rPr>
+                        <a:t> 무한 모드 · 승수 상승 · 일일 챌린지는 미정</a:t>
                       </a:r>
                     </a:p>
                   </a:txBody>
@@ -49152,9 +50502,9 @@
               </a:lnSpc>
             </a:pPr>
             <a:r>
-              <a:rPr sz="1100" b="0">
-                <a:solidFill>
-                  <a:srgbClr val="3D394A"/>
+              <a:rPr sz="1100" b="1">
+                <a:solidFill>
+                  <a:srgbClr val="1A1822"/>
                 </a:solidFill>
                 <a:latin typeface="맑은 고딕"/>
               </a:rPr>
@@ -49332,7 +50682,25 @@
                 </a:solidFill>
                 <a:latin typeface="맑은 고딕"/>
               </a:rPr>
-              <a:t>카드 게임에서 배수는 카드에 적힌 수다. 다트판에서 배수는 판 위의 띠이고, 띠는 넓이를 가진다. 이 게임이 다트판을</a:t>
+              <a:t>카드 게임에서 배수는 카드에 적힌 수다. 다트판에서 배수는 판 위의 띠이고, </a:t>
+            </a:r>
+            <a:r>
+              <a:rPr sz="1150" b="1">
+                <a:solidFill>
+                  <a:srgbClr val="1A1822"/>
+                </a:solidFill>
+                <a:latin typeface="맑은 고딕"/>
+              </a:rPr>
+              <a:t>띠는 넓이를 가진다.</a:t>
+            </a:r>
+            <a:r>
+              <a:rPr sz="1150" b="0">
+                <a:solidFill>
+                  <a:srgbClr val="3D394A"/>
+                </a:solidFill>
+                <a:latin typeface="맑은 고딕"/>
+              </a:rPr>
+              <a:t> 이 게임이 다트판을</a:t>
             </a:r>
           </a:p>
           <a:p>
@@ -49658,7 +51026,16 @@
                           </a:solidFill>
                           <a:latin typeface="맑은 고딕"/>
                         </a:rPr>
-                        <a:t>카드를 사거나 띠를 넓힌다</a:t>
+                        <a:t>카드를 사거나 </a:t>
+                      </a:r>
+                      <a:r>
+                        <a:rPr sz="1000" b="1">
+                          <a:solidFill>
+                            <a:srgbClr val="1A1822"/>
+                          </a:solidFill>
+                          <a:latin typeface="맑은 고딕"/>
+                        </a:rPr>
+                        <a:t>띠를 넓힌다</a:t>
                       </a:r>
                     </a:p>
                   </a:txBody>
@@ -49784,9 +51161,9 @@
               </a:lnSpc>
             </a:pPr>
             <a:r>
-              <a:rPr sz="1100" b="0">
-                <a:solidFill>
-                  <a:srgbClr val="3D394A"/>
+              <a:rPr sz="1100" b="1">
+                <a:solidFill>
+                  <a:srgbClr val="1A1822"/>
                 </a:solidFill>
                 <a:latin typeface="맑은 고딕"/>
               </a:rPr>
@@ -49809,7 +51186,25 @@
                 </a:solidFill>
                 <a:latin typeface="맑은 고딕"/>
               </a:rPr>
-              <a:t>· 개조 「속살」 한 장이 트리플 띠를 0.06 넓히면, 칩을 한 장도 안 사고 배수 3의 기대값이 절반 가까이 오른다. 카드 게임에는 이 축이</a:t>
+              <a:t>· 개조 「속살」 한 장이 트리플 띠를 0.06 넓히면, </a:t>
+            </a:r>
+            <a:r>
+              <a:rPr sz="1100" b="1">
+                <a:solidFill>
+                  <a:srgbClr val="1A1822"/>
+                </a:solidFill>
+                <a:latin typeface="맑은 고딕"/>
+              </a:rPr>
+              <a:t>칩을 한 장도 안 사고</a:t>
+            </a:r>
+            <a:r>
+              <a:rPr sz="1100" b="0">
+                <a:solidFill>
+                  <a:srgbClr val="3D394A"/>
+                </a:solidFill>
+                <a:latin typeface="맑은 고딕"/>
+              </a:rPr>
+              <a:t> 배수 3의 기대값이 절반 가까이 오른다. 카드 게임에는 이 축이</a:t>
             </a:r>
           </a:p>
           <a:p>
@@ -50175,7 +51570,7 @@
         </p:nvGraphicFramePr>
         <p:xfrm>
           <a:off x="566928" y="1668780"/>
-          <a:ext cx="9555479" cy="1655064"/>
+          <a:ext cx="9555478" cy="1993392"/>
         </p:xfrm>
         <a:graphic>
           <a:graphicData uri="http://schemas.openxmlformats.org/drawingml/2006/table">
@@ -50184,9 +51579,9 @@
                 <a:tableStyleId>{2D5ABB26-0587-4C30-8999-92F81FD0307C}</a:tableStyleId>
               </a:tblPr>
               <a:tblGrid>
-                <a:gridCol w="1604737"/>
-                <a:gridCol w="3720072"/>
-                <a:gridCol w="4230670"/>
+                <a:gridCol w="1787355"/>
+                <a:gridCol w="3505967"/>
+                <a:gridCol w="4262156"/>
               </a:tblGrid>
               <a:tr h="297180">
                 <a:tc>
@@ -50271,7 +51666,7 @@
                   </a:tcPr>
                 </a:tc>
               </a:tr>
-              <a:tr h="297180">
+              <a:tr h="466344">
                 <a:tc>
                   <a:txBody>
                     <a:bodyPr wrap="square"/>
@@ -50343,7 +51738,25 @@
                           </a:solidFill>
                           <a:latin typeface="맑은 고딕"/>
                         </a:rPr>
-                        <a:t>카드 뽑기를 버렸다. 무작위 패 대신 조준이 그 자리를 채운다</a:t>
+                        <a:t>카드 뽑기를 버렸다. 무작위 패 대신 </a:t>
+                      </a:r>
+                      <a:r>
+                        <a:rPr sz="1000" b="1">
+                          <a:solidFill>
+                            <a:srgbClr val="1A1822"/>
+                          </a:solidFill>
+                          <a:latin typeface="맑은 고딕"/>
+                        </a:rPr>
+                        <a:t>조준</a:t>
+                      </a:r>
+                      <a:r>
+                        <a:rPr sz="1000" b="0">
+                          <a:solidFill>
+                            <a:srgbClr val="3D394A"/>
+                          </a:solidFill>
+                          <a:latin typeface="맑은 고딕"/>
+                        </a:rPr>
+                        <a:t>이 그 자리를 채운다</a:t>
                       </a:r>
                     </a:p>
                   </a:txBody>
@@ -50354,7 +51767,7 @@
                   </a:tcPr>
                 </a:tc>
               </a:tr>
-              <a:tr h="297180">
+              <a:tr h="466344">
                 <a:tc>
                   <a:txBody>
                     <a:bodyPr wrap="square"/>
@@ -50426,7 +51839,25 @@
                           </a:solidFill>
                           <a:latin typeface="맑은 고딕"/>
                         </a:rPr>
-                        <a:t>501도 크리켓도 없다. 빌린 것은 판의 형태뿐이다</a:t>
+                        <a:t>501도 크리켓도 없다. 빌린 것은 </a:t>
+                      </a:r>
+                      <a:r>
+                        <a:rPr sz="1000" b="1">
+                          <a:solidFill>
+                            <a:srgbClr val="1A1822"/>
+                          </a:solidFill>
+                          <a:latin typeface="맑은 고딕"/>
+                        </a:rPr>
+                        <a:t>판의 형태</a:t>
+                      </a:r>
+                      <a:r>
+                        <a:rPr sz="1000" b="0">
+                          <a:solidFill>
+                            <a:srgbClr val="3D394A"/>
+                          </a:solidFill>
+                          <a:latin typeface="맑은 고딕"/>
+                        </a:rPr>
+                        <a:t>뿐이다</a:t>
                       </a:r>
                     </a:p>
                   </a:txBody>
@@ -50615,7 +52046,7 @@
         </p:nvSpPr>
         <p:spPr>
           <a:xfrm>
-            <a:off x="566928" y="3415284"/>
+            <a:off x="566928" y="3753611"/>
             <a:ext cx="9555480" cy="274320"/>
           </a:xfrm>
           <a:prstGeom prst="rect">
@@ -50635,9 +52066,9 @@
               </a:lnSpc>
             </a:pPr>
             <a:r>
-              <a:rPr sz="1100" b="0">
-                <a:solidFill>
-                  <a:srgbClr val="3D394A"/>
+              <a:rPr sz="1100" b="1">
+                <a:solidFill>
+                  <a:srgbClr val="1A1822"/>
                 </a:solidFill>
                 <a:latin typeface="맑은 고딕"/>
               </a:rPr>
@@ -50660,7 +52091,25 @@
                 </a:solidFill>
                 <a:latin typeface="맑은 고딕"/>
               </a:rPr>
-              <a:t>· 조준과 착탄에 난수가 0이다. 게이지는 주기 1.0의 삼각파이고, 멈춘 시점이 그대로 착탄점이다.</a:t>
+              <a:t>· </a:t>
+            </a:r>
+            <a:r>
+              <a:rPr sz="1100" b="1">
+                <a:solidFill>
+                  <a:srgbClr val="1A1822"/>
+                </a:solidFill>
+                <a:latin typeface="맑은 고딕"/>
+              </a:rPr>
+              <a:t>조준과 착탄에 난수가 0이다.</a:t>
+            </a:r>
+            <a:r>
+              <a:rPr sz="1100" b="0">
+                <a:solidFill>
+                  <a:srgbClr val="3D394A"/>
+                </a:solidFill>
+                <a:latin typeface="맑은 고딕"/>
+              </a:rPr>
+              <a:t> 게이지는 주기 1.0의 삼각파이고, 멈춘 시점이 그대로 착탄점이다.</a:t>
             </a:r>
           </a:p>
           <a:p>
@@ -50679,7 +52128,25 @@
                 </a:solidFill>
                 <a:latin typeface="맑은 고딕"/>
               </a:rPr>
-              <a:t>· 밸런스 통화가 기하다. 판값(board_val)이 균등 조준 다트당 기대 점수를 면적 적분 하나로 낸다. 칩·개조·다트가 「다트당 몇 점」이라는</a:t>
+              <a:t>· </a:t>
+            </a:r>
+            <a:r>
+              <a:rPr sz="1100" b="1">
+                <a:solidFill>
+                  <a:srgbClr val="1A1822"/>
+                </a:solidFill>
+                <a:latin typeface="맑은 고딕"/>
+              </a:rPr>
+              <a:t>밸런스 통화가 기하다.</a:t>
+            </a:r>
+            <a:r>
+              <a:rPr sz="1100" b="0">
+                <a:solidFill>
+                  <a:srgbClr val="3D394A"/>
+                </a:solidFill>
+                <a:latin typeface="맑은 고딕"/>
+              </a:rPr>
+              <a:t> 판값(board_val)이 균등 조준 다트당 기대 점수를 면적 적분 하나로 낸다. 칩·개조·다트가 「다트당 몇</a:t>
             </a:r>
           </a:p>
           <a:p>
@@ -50698,7 +52165,7 @@
                 </a:solidFill>
                 <a:latin typeface="맑은 고딕"/>
               </a:rPr>
-              <a:t>같은 자로 재진다.</a:t>
+              <a:t>점」이라는 같은 자로 재진다.</a:t>
             </a:r>
           </a:p>
           <a:p>
@@ -50717,7 +52184,25 @@
                 </a:solidFill>
                 <a:latin typeface="맑은 고딕"/>
               </a:rPr>
-              <a:t>· 조합을 막는 것은 슬롯이 아니다. 판값이다. 칩은 5칸이 상한이지만 개조는 슬롯을 안 먹는다. 대신 판값이 기본의 1.50배를 넘기는 개조는</a:t>
+              <a:t>· </a:t>
+            </a:r>
+            <a:r>
+              <a:rPr sz="1100" b="1">
+                <a:solidFill>
+                  <a:srgbClr val="1A1822"/>
+                </a:solidFill>
+                <a:latin typeface="맑은 고딕"/>
+              </a:rPr>
+              <a:t>조합을 막는 것은 슬롯이 아니다. 판값이다.</a:t>
+            </a:r>
+            <a:r>
+              <a:rPr sz="1100" b="0">
+                <a:solidFill>
+                  <a:srgbClr val="3D394A"/>
+                </a:solidFill>
+                <a:latin typeface="맑은 고딕"/>
+              </a:rPr>
+              <a:t> 칩은 5칸이 상한이지만 개조는 슬롯을 안 먹는다. 대신 판값이 기본의 1.50배를 넘기는</a:t>
             </a:r>
           </a:p>
           <a:p>
@@ -50736,7 +52221,7 @@
                 </a:solidFill>
                 <a:latin typeface="맑은 고딕"/>
               </a:rPr>
-              <a:t>매대에 아예 안 뜬다.</a:t>
+              <a:t>개조는 매대에 아예 안 뜬다.</a:t>
             </a:r>
           </a:p>
         </p:txBody>
@@ -50832,7 +52317,7 @@
                 </a:solidFill>
                 <a:latin typeface="맑은 고딕"/>
               </a:rPr>
-              <a:t>2장 · 핵심 재미 요소</a:t>
+              <a:t>1장 · 게임 개요</a:t>
             </a:r>
           </a:p>
         </p:txBody>
@@ -50948,9 +52433,9 @@
               </a:lnSpc>
             </a:pPr>
             <a:r>
-              <a:rPr sz="1100" b="0">
-                <a:solidFill>
-                  <a:srgbClr val="3D394A"/>
+              <a:rPr sz="1100" b="1">
+                <a:solidFill>
+                  <a:srgbClr val="1A1822"/>
                 </a:solidFill>
                 <a:latin typeface="맑은 고딕"/>
               </a:rPr>
@@ -50969,7 +52454,7 @@
         </p:nvGraphicFramePr>
         <p:xfrm>
           <a:off x="566928" y="1641348"/>
-          <a:ext cx="9555479" cy="1399032"/>
+          <a:ext cx="9555479" cy="1229868"/>
         </p:xfrm>
         <a:graphic>
           <a:graphicData uri="http://schemas.openxmlformats.org/drawingml/2006/table">
@@ -50978,8 +52463,8 @@
                 <a:tableStyleId>{2D5ABB26-0587-4C30-8999-92F81FD0307C}</a:tableStyleId>
               </a:tblPr>
               <a:tblGrid>
-                <a:gridCol w="735036"/>
-                <a:gridCol w="8820443"/>
+                <a:gridCol w="955547"/>
+                <a:gridCol w="8599932"/>
               </a:tblGrid>
               <a:tr h="466344">
                 <a:tc>
@@ -51093,7 +52578,7 @@
                   </a:tcPr>
                 </a:tc>
               </a:tr>
-              <a:tr h="635508">
+              <a:tr h="466344">
                 <a:tc>
                   <a:txBody>
                     <a:bodyPr wrap="square"/>
@@ -51161,7 +52646,7 @@
         </p:nvSpPr>
         <p:spPr>
           <a:xfrm>
-            <a:off x="566928" y="3131820"/>
+            <a:off x="566928" y="2962656"/>
             <a:ext cx="9555480" cy="274320"/>
           </a:xfrm>
           <a:prstGeom prst="rect">
@@ -51181,9 +52666,9 @@
               </a:lnSpc>
             </a:pPr>
             <a:r>
-              <a:rPr sz="1100" b="0">
-                <a:solidFill>
-                  <a:srgbClr val="3D394A"/>
+              <a:rPr sz="1100" b="1">
+                <a:solidFill>
+                  <a:srgbClr val="1A1822"/>
                 </a:solidFill>
                 <a:latin typeface="맑은 고딕"/>
               </a:rPr>
@@ -51201,7 +52686,7 @@
           <p:nvPr/>
         </p:nvGraphicFramePr>
         <p:xfrm>
-          <a:off x="566928" y="3493008"/>
+          <a:off x="566928" y="3323844"/>
           <a:ext cx="9555480" cy="1485900"/>
         </p:xfrm>
         <a:graphic>
@@ -51506,7 +52991,7 @@
         </p:nvSpPr>
         <p:spPr>
           <a:xfrm>
-            <a:off x="566928" y="5070348"/>
+            <a:off x="566928" y="4901183"/>
             <a:ext cx="9555480" cy="274320"/>
           </a:xfrm>
           <a:prstGeom prst="rect">
@@ -51526,13 +53011,22 @@
               </a:lnSpc>
             </a:pPr>
             <a:r>
+              <a:rPr sz="1100" b="1">
+                <a:solidFill>
+                  <a:srgbClr val="1A1822"/>
+                </a:solidFill>
+                <a:latin typeface="맑은 고딕"/>
+              </a:rPr>
+              <a:t>전제하는 리스크.</a:t>
+            </a:r>
+            <a:r>
               <a:rPr sz="1100" b="0">
                 <a:solidFill>
                   <a:srgbClr val="3D394A"/>
                 </a:solidFill>
                 <a:latin typeface="맑은 고딕"/>
               </a:rPr>
-              <a:t>전제하는 리스크. 조준 실력을 요구하는 덱빌더는 두 유저층의 교집합이라 좁다. 이 리스크를 줄이는 손잡이가 「난수 없는 조준」이다.</a:t>
+              <a:t> 조준 실력을 요구하는 덱빌더는 두 유저층의 교집합이라 좁다. 이 리스크를 줄이는 손잡이가 「난수 없는 조준」이다.</a:t>
             </a:r>
           </a:p>
           <a:p>
@@ -51686,7 +53180,7 @@
                 </a:solidFill>
                 <a:latin typeface="맑은 고딕"/>
               </a:rPr>
-              <a:t>핵심 재미 세 기둥</a:t>
+              <a:t>조준 · 조합 · 정산</a:t>
             </a:r>
           </a:p>
         </p:txBody>
@@ -51793,9 +53287,9 @@
                 <a:tableStyleId>{2D5ABB26-0587-4C30-8999-92F81FD0307C}</a:tableStyleId>
               </a:tblPr>
               <a:tblGrid>
-                <a:gridCol w="655663"/>
-                <a:gridCol w="1709236"/>
-                <a:gridCol w="7190580"/>
+                <a:gridCol w="671394"/>
+                <a:gridCol w="1706215"/>
+                <a:gridCol w="7177870"/>
               </a:tblGrid>
               <a:tr h="297180">
                 <a:tc>
@@ -51815,7 +53309,7 @@
                           </a:solidFill>
                           <a:latin typeface="맑은 고딕"/>
                         </a:rPr>
-                        <a:t>기둥</a:t>
+                        <a:t>축</a:t>
                       </a:r>
                     </a:p>
                   </a:txBody>
@@ -52167,7 +53661,7 @@
                 </a:solidFill>
                 <a:latin typeface="맑은 고딕"/>
               </a:rPr>
-              <a:t>셋은 한 발 안에서 순서대로 일어난다. 조준하고, 조건이 걸리고, 숫자가 쌓인다. 한 사이클이 약 6초다.</a:t>
+              <a:t>축 셋은 한 발 안에서 순서대로 일어난다. 조준하고, 조건이 걸리고, 숫자가 쌓인다. 한 사이클이 약 6초다.</a:t>
             </a:r>
           </a:p>
         </p:txBody>
